--- a/gakkyu/tegami/pptx/T3.pptx
+++ b/gakkyu/tegami/pptx/T3.pptx
@@ -3622,6 +3622,7 @@
               <a:srgbClr val="6AA7A7"/>
             </a:solidFill>
           </a:ln>
+          <a:effectLst/>
         </p:spPr>
         <p:style>
           <a:lnRef idx="2">
@@ -3630,7 +3631,7 @@
           <a:fillRef idx="0">
             <a:schemeClr val="accent1"/>
           </a:fillRef>
-          <a:effectRef idx="1">
+          <a:effectRef idx="0">
             <a:schemeClr val="accent1"/>
           </a:effectRef>
           <a:fontRef idx="minor">
@@ -3681,7 +3682,7 @@
             <a:fillRef idx="3">
               <a:schemeClr val="accent1"/>
             </a:fillRef>
-            <a:effectRef idx="2">
+            <a:effectRef idx="0">
               <a:schemeClr val="accent1"/>
             </a:effectRef>
             <a:fontRef idx="minor">
@@ -3715,15 +3716,16 @@
                 <a:srgbClr val="8FBFBF"/>
               </a:solidFill>
             </a:ln>
-          </p:spPr>
-          <p:style>
-            <a:lnRef idx="2">
-              <a:schemeClr val="accent1"/>
-            </a:lnRef>
-            <a:fillRef idx="0">
-              <a:schemeClr val="accent1"/>
-            </a:fillRef>
-            <a:effectRef idx="1">
+            <a:effectLst/>
+          </p:spPr>
+          <p:style>
+            <a:lnRef idx="2">
+              <a:schemeClr val="accent1"/>
+            </a:lnRef>
+            <a:fillRef idx="0">
+              <a:schemeClr val="accent1"/>
+            </a:fillRef>
+            <a:effectRef idx="0">
               <a:schemeClr val="accent1"/>
             </a:effectRef>
             <a:fontRef idx="minor">
@@ -3750,15 +3752,16 @@
                 <a:srgbClr val="8FBFBF"/>
               </a:solidFill>
             </a:ln>
-          </p:spPr>
-          <p:style>
-            <a:lnRef idx="2">
-              <a:schemeClr val="accent1"/>
-            </a:lnRef>
-            <a:fillRef idx="0">
-              <a:schemeClr val="accent1"/>
-            </a:fillRef>
-            <a:effectRef idx="1">
+            <a:effectLst/>
+          </p:spPr>
+          <p:style>
+            <a:lnRef idx="2">
+              <a:schemeClr val="accent1"/>
+            </a:lnRef>
+            <a:fillRef idx="0">
+              <a:schemeClr val="accent1"/>
+            </a:fillRef>
+            <a:effectRef idx="0">
               <a:schemeClr val="accent1"/>
             </a:effectRef>
             <a:fontRef idx="minor">
@@ -3785,15 +3788,16 @@
                 <a:srgbClr val="8FBFBF"/>
               </a:solidFill>
             </a:ln>
-          </p:spPr>
-          <p:style>
-            <a:lnRef idx="2">
-              <a:schemeClr val="accent1"/>
-            </a:lnRef>
-            <a:fillRef idx="0">
-              <a:schemeClr val="accent1"/>
-            </a:fillRef>
-            <a:effectRef idx="1">
+            <a:effectLst/>
+          </p:spPr>
+          <p:style>
+            <a:lnRef idx="2">
+              <a:schemeClr val="accent1"/>
+            </a:lnRef>
+            <a:fillRef idx="0">
+              <a:schemeClr val="accent1"/>
+            </a:fillRef>
+            <a:effectRef idx="0">
               <a:schemeClr val="accent1"/>
             </a:effectRef>
             <a:fontRef idx="minor">
@@ -3820,15 +3824,16 @@
                 <a:srgbClr val="8FBFBF"/>
               </a:solidFill>
             </a:ln>
-          </p:spPr>
-          <p:style>
-            <a:lnRef idx="2">
-              <a:schemeClr val="accent1"/>
-            </a:lnRef>
-            <a:fillRef idx="0">
-              <a:schemeClr val="accent1"/>
-            </a:fillRef>
-            <a:effectRef idx="1">
+            <a:effectLst/>
+          </p:spPr>
+          <p:style>
+            <a:lnRef idx="2">
+              <a:schemeClr val="accent1"/>
+            </a:lnRef>
+            <a:fillRef idx="0">
+              <a:schemeClr val="accent1"/>
+            </a:fillRef>
+            <a:effectRef idx="0">
               <a:schemeClr val="accent1"/>
             </a:effectRef>
             <a:fontRef idx="minor">
@@ -3855,15 +3860,16 @@
                 <a:srgbClr val="8FBFBF"/>
               </a:solidFill>
             </a:ln>
-          </p:spPr>
-          <p:style>
-            <a:lnRef idx="2">
-              <a:schemeClr val="accent1"/>
-            </a:lnRef>
-            <a:fillRef idx="0">
-              <a:schemeClr val="accent1"/>
-            </a:fillRef>
-            <a:effectRef idx="1">
+            <a:effectLst/>
+          </p:spPr>
+          <p:style>
+            <a:lnRef idx="2">
+              <a:schemeClr val="accent1"/>
+            </a:lnRef>
+            <a:fillRef idx="0">
+              <a:schemeClr val="accent1"/>
+            </a:fillRef>
+            <a:effectRef idx="0">
               <a:schemeClr val="accent1"/>
             </a:effectRef>
             <a:fontRef idx="minor">
@@ -3890,15 +3896,16 @@
                 <a:srgbClr val="8FBFBF"/>
               </a:solidFill>
             </a:ln>
-          </p:spPr>
-          <p:style>
-            <a:lnRef idx="2">
-              <a:schemeClr val="accent1"/>
-            </a:lnRef>
-            <a:fillRef idx="0">
-              <a:schemeClr val="accent1"/>
-            </a:fillRef>
-            <a:effectRef idx="1">
+            <a:effectLst/>
+          </p:spPr>
+          <p:style>
+            <a:lnRef idx="2">
+              <a:schemeClr val="accent1"/>
+            </a:lnRef>
+            <a:fillRef idx="0">
+              <a:schemeClr val="accent1"/>
+            </a:fillRef>
+            <a:effectRef idx="0">
               <a:schemeClr val="accent1"/>
             </a:effectRef>
             <a:fontRef idx="minor">
@@ -3925,15 +3932,16 @@
                 <a:srgbClr val="8FBFBF"/>
               </a:solidFill>
             </a:ln>
-          </p:spPr>
-          <p:style>
-            <a:lnRef idx="2">
-              <a:schemeClr val="accent1"/>
-            </a:lnRef>
-            <a:fillRef idx="0">
-              <a:schemeClr val="accent1"/>
-            </a:fillRef>
-            <a:effectRef idx="1">
+            <a:effectLst/>
+          </p:spPr>
+          <p:style>
+            <a:lnRef idx="2">
+              <a:schemeClr val="accent1"/>
+            </a:lnRef>
+            <a:fillRef idx="0">
+              <a:schemeClr val="accent1"/>
+            </a:fillRef>
+            <a:effectRef idx="0">
               <a:schemeClr val="accent1"/>
             </a:effectRef>
             <a:fontRef idx="minor">
@@ -3960,15 +3968,16 @@
                 <a:srgbClr val="8FBFBF"/>
               </a:solidFill>
             </a:ln>
-          </p:spPr>
-          <p:style>
-            <a:lnRef idx="2">
-              <a:schemeClr val="accent1"/>
-            </a:lnRef>
-            <a:fillRef idx="0">
-              <a:schemeClr val="accent1"/>
-            </a:fillRef>
-            <a:effectRef idx="1">
+            <a:effectLst/>
+          </p:spPr>
+          <p:style>
+            <a:lnRef idx="2">
+              <a:schemeClr val="accent1"/>
+            </a:lnRef>
+            <a:fillRef idx="0">
+              <a:schemeClr val="accent1"/>
+            </a:fillRef>
+            <a:effectRef idx="0">
               <a:schemeClr val="accent1"/>
             </a:effectRef>
             <a:fontRef idx="minor">
@@ -3995,15 +4004,16 @@
                 <a:srgbClr val="8FBFBF"/>
               </a:solidFill>
             </a:ln>
-          </p:spPr>
-          <p:style>
-            <a:lnRef idx="2">
-              <a:schemeClr val="accent1"/>
-            </a:lnRef>
-            <a:fillRef idx="0">
-              <a:schemeClr val="accent1"/>
-            </a:fillRef>
-            <a:effectRef idx="1">
+            <a:effectLst/>
+          </p:spPr>
+          <p:style>
+            <a:lnRef idx="2">
+              <a:schemeClr val="accent1"/>
+            </a:lnRef>
+            <a:fillRef idx="0">
+              <a:schemeClr val="accent1"/>
+            </a:fillRef>
+            <a:effectRef idx="0">
               <a:schemeClr val="accent1"/>
             </a:effectRef>
             <a:fontRef idx="minor">
@@ -4030,15 +4040,16 @@
                 <a:srgbClr val="8FBFBF"/>
               </a:solidFill>
             </a:ln>
-          </p:spPr>
-          <p:style>
-            <a:lnRef idx="2">
-              <a:schemeClr val="accent1"/>
-            </a:lnRef>
-            <a:fillRef idx="0">
-              <a:schemeClr val="accent1"/>
-            </a:fillRef>
-            <a:effectRef idx="1">
+            <a:effectLst/>
+          </p:spPr>
+          <p:style>
+            <a:lnRef idx="2">
+              <a:schemeClr val="accent1"/>
+            </a:lnRef>
+            <a:fillRef idx="0">
+              <a:schemeClr val="accent1"/>
+            </a:fillRef>
+            <a:effectRef idx="0">
               <a:schemeClr val="accent1"/>
             </a:effectRef>
             <a:fontRef idx="minor">
@@ -4065,15 +4076,16 @@
                 <a:srgbClr val="8FBFBF"/>
               </a:solidFill>
             </a:ln>
-          </p:spPr>
-          <p:style>
-            <a:lnRef idx="2">
-              <a:schemeClr val="accent1"/>
-            </a:lnRef>
-            <a:fillRef idx="0">
-              <a:schemeClr val="accent1"/>
-            </a:fillRef>
-            <a:effectRef idx="1">
+            <a:effectLst/>
+          </p:spPr>
+          <p:style>
+            <a:lnRef idx="2">
+              <a:schemeClr val="accent1"/>
+            </a:lnRef>
+            <a:fillRef idx="0">
+              <a:schemeClr val="accent1"/>
+            </a:fillRef>
+            <a:effectRef idx="0">
               <a:schemeClr val="accent1"/>
             </a:effectRef>
             <a:fontRef idx="minor">
@@ -4100,15 +4112,16 @@
                 <a:srgbClr val="8FBFBF"/>
               </a:solidFill>
             </a:ln>
-          </p:spPr>
-          <p:style>
-            <a:lnRef idx="2">
-              <a:schemeClr val="accent1"/>
-            </a:lnRef>
-            <a:fillRef idx="0">
-              <a:schemeClr val="accent1"/>
-            </a:fillRef>
-            <a:effectRef idx="1">
+            <a:effectLst/>
+          </p:spPr>
+          <p:style>
+            <a:lnRef idx="2">
+              <a:schemeClr val="accent1"/>
+            </a:lnRef>
+            <a:fillRef idx="0">
+              <a:schemeClr val="accent1"/>
+            </a:fillRef>
+            <a:effectRef idx="0">
               <a:schemeClr val="accent1"/>
             </a:effectRef>
             <a:fontRef idx="minor">
@@ -4135,15 +4148,16 @@
                 <a:srgbClr val="8FBFBF"/>
               </a:solidFill>
             </a:ln>
-          </p:spPr>
-          <p:style>
-            <a:lnRef idx="2">
-              <a:schemeClr val="accent1"/>
-            </a:lnRef>
-            <a:fillRef idx="0">
-              <a:schemeClr val="accent1"/>
-            </a:fillRef>
-            <a:effectRef idx="1">
+            <a:effectLst/>
+          </p:spPr>
+          <p:style>
+            <a:lnRef idx="2">
+              <a:schemeClr val="accent1"/>
+            </a:lnRef>
+            <a:fillRef idx="0">
+              <a:schemeClr val="accent1"/>
+            </a:fillRef>
+            <a:effectRef idx="0">
               <a:schemeClr val="accent1"/>
             </a:effectRef>
             <a:fontRef idx="minor">
@@ -4170,15 +4184,16 @@
                 <a:srgbClr val="8FBFBF"/>
               </a:solidFill>
             </a:ln>
-          </p:spPr>
-          <p:style>
-            <a:lnRef idx="2">
-              <a:schemeClr val="accent1"/>
-            </a:lnRef>
-            <a:fillRef idx="0">
-              <a:schemeClr val="accent1"/>
-            </a:fillRef>
-            <a:effectRef idx="1">
+            <a:effectLst/>
+          </p:spPr>
+          <p:style>
+            <a:lnRef idx="2">
+              <a:schemeClr val="accent1"/>
+            </a:lnRef>
+            <a:fillRef idx="0">
+              <a:schemeClr val="accent1"/>
+            </a:fillRef>
+            <a:effectRef idx="0">
               <a:schemeClr val="accent1"/>
             </a:effectRef>
             <a:fontRef idx="minor">
@@ -4205,15 +4220,16 @@
                 <a:srgbClr val="8FBFBF"/>
               </a:solidFill>
             </a:ln>
-          </p:spPr>
-          <p:style>
-            <a:lnRef idx="2">
-              <a:schemeClr val="accent1"/>
-            </a:lnRef>
-            <a:fillRef idx="0">
-              <a:schemeClr val="accent1"/>
-            </a:fillRef>
-            <a:effectRef idx="1">
+            <a:effectLst/>
+          </p:spPr>
+          <p:style>
+            <a:lnRef idx="2">
+              <a:schemeClr val="accent1"/>
+            </a:lnRef>
+            <a:fillRef idx="0">
+              <a:schemeClr val="accent1"/>
+            </a:fillRef>
+            <a:effectRef idx="0">
               <a:schemeClr val="accent1"/>
             </a:effectRef>
             <a:fontRef idx="minor">
@@ -4240,15 +4256,16 @@
                 <a:srgbClr val="8FBFBF"/>
               </a:solidFill>
             </a:ln>
-          </p:spPr>
-          <p:style>
-            <a:lnRef idx="2">
-              <a:schemeClr val="accent1"/>
-            </a:lnRef>
-            <a:fillRef idx="0">
-              <a:schemeClr val="accent1"/>
-            </a:fillRef>
-            <a:effectRef idx="1">
+            <a:effectLst/>
+          </p:spPr>
+          <p:style>
+            <a:lnRef idx="2">
+              <a:schemeClr val="accent1"/>
+            </a:lnRef>
+            <a:fillRef idx="0">
+              <a:schemeClr val="accent1"/>
+            </a:fillRef>
+            <a:effectRef idx="0">
               <a:schemeClr val="accent1"/>
             </a:effectRef>
             <a:fontRef idx="minor">
@@ -4275,15 +4292,16 @@
                 <a:srgbClr val="8FBFBF"/>
               </a:solidFill>
             </a:ln>
-          </p:spPr>
-          <p:style>
-            <a:lnRef idx="2">
-              <a:schemeClr val="accent1"/>
-            </a:lnRef>
-            <a:fillRef idx="0">
-              <a:schemeClr val="accent1"/>
-            </a:fillRef>
-            <a:effectRef idx="1">
+            <a:effectLst/>
+          </p:spPr>
+          <p:style>
+            <a:lnRef idx="2">
+              <a:schemeClr val="accent1"/>
+            </a:lnRef>
+            <a:fillRef idx="0">
+              <a:schemeClr val="accent1"/>
+            </a:fillRef>
+            <a:effectRef idx="0">
               <a:schemeClr val="accent1"/>
             </a:effectRef>
             <a:fontRef idx="minor">
@@ -4335,7 +4353,7 @@
             <a:fillRef idx="3">
               <a:schemeClr val="accent1"/>
             </a:fillRef>
-            <a:effectRef idx="2">
+            <a:effectRef idx="0">
               <a:schemeClr val="accent1"/>
             </a:effectRef>
             <a:fontRef idx="minor">
@@ -4369,15 +4387,16 @@
                 <a:srgbClr val="8FBFBF"/>
               </a:solidFill>
             </a:ln>
-          </p:spPr>
-          <p:style>
-            <a:lnRef idx="2">
-              <a:schemeClr val="accent1"/>
-            </a:lnRef>
-            <a:fillRef idx="0">
-              <a:schemeClr val="accent1"/>
-            </a:fillRef>
-            <a:effectRef idx="1">
+            <a:effectLst/>
+          </p:spPr>
+          <p:style>
+            <a:lnRef idx="2">
+              <a:schemeClr val="accent1"/>
+            </a:lnRef>
+            <a:fillRef idx="0">
+              <a:schemeClr val="accent1"/>
+            </a:fillRef>
+            <a:effectRef idx="0">
               <a:schemeClr val="accent1"/>
             </a:effectRef>
             <a:fontRef idx="minor">
@@ -4404,15 +4423,16 @@
                 <a:srgbClr val="8FBFBF"/>
               </a:solidFill>
             </a:ln>
-          </p:spPr>
-          <p:style>
-            <a:lnRef idx="2">
-              <a:schemeClr val="accent1"/>
-            </a:lnRef>
-            <a:fillRef idx="0">
-              <a:schemeClr val="accent1"/>
-            </a:fillRef>
-            <a:effectRef idx="1">
+            <a:effectLst/>
+          </p:spPr>
+          <p:style>
+            <a:lnRef idx="2">
+              <a:schemeClr val="accent1"/>
+            </a:lnRef>
+            <a:fillRef idx="0">
+              <a:schemeClr val="accent1"/>
+            </a:fillRef>
+            <a:effectRef idx="0">
               <a:schemeClr val="accent1"/>
             </a:effectRef>
             <a:fontRef idx="minor">
@@ -4439,15 +4459,16 @@
                 <a:srgbClr val="8FBFBF"/>
               </a:solidFill>
             </a:ln>
-          </p:spPr>
-          <p:style>
-            <a:lnRef idx="2">
-              <a:schemeClr val="accent1"/>
-            </a:lnRef>
-            <a:fillRef idx="0">
-              <a:schemeClr val="accent1"/>
-            </a:fillRef>
-            <a:effectRef idx="1">
+            <a:effectLst/>
+          </p:spPr>
+          <p:style>
+            <a:lnRef idx="2">
+              <a:schemeClr val="accent1"/>
+            </a:lnRef>
+            <a:fillRef idx="0">
+              <a:schemeClr val="accent1"/>
+            </a:fillRef>
+            <a:effectRef idx="0">
               <a:schemeClr val="accent1"/>
             </a:effectRef>
             <a:fontRef idx="minor">
@@ -4474,15 +4495,16 @@
                 <a:srgbClr val="8FBFBF"/>
               </a:solidFill>
             </a:ln>
-          </p:spPr>
-          <p:style>
-            <a:lnRef idx="2">
-              <a:schemeClr val="accent1"/>
-            </a:lnRef>
-            <a:fillRef idx="0">
-              <a:schemeClr val="accent1"/>
-            </a:fillRef>
-            <a:effectRef idx="1">
+            <a:effectLst/>
+          </p:spPr>
+          <p:style>
+            <a:lnRef idx="2">
+              <a:schemeClr val="accent1"/>
+            </a:lnRef>
+            <a:fillRef idx="0">
+              <a:schemeClr val="accent1"/>
+            </a:fillRef>
+            <a:effectRef idx="0">
               <a:schemeClr val="accent1"/>
             </a:effectRef>
             <a:fontRef idx="minor">
@@ -4509,15 +4531,16 @@
                 <a:srgbClr val="8FBFBF"/>
               </a:solidFill>
             </a:ln>
-          </p:spPr>
-          <p:style>
-            <a:lnRef idx="2">
-              <a:schemeClr val="accent1"/>
-            </a:lnRef>
-            <a:fillRef idx="0">
-              <a:schemeClr val="accent1"/>
-            </a:fillRef>
-            <a:effectRef idx="1">
+            <a:effectLst/>
+          </p:spPr>
+          <p:style>
+            <a:lnRef idx="2">
+              <a:schemeClr val="accent1"/>
+            </a:lnRef>
+            <a:fillRef idx="0">
+              <a:schemeClr val="accent1"/>
+            </a:fillRef>
+            <a:effectRef idx="0">
               <a:schemeClr val="accent1"/>
             </a:effectRef>
             <a:fontRef idx="minor">
@@ -4544,15 +4567,16 @@
                 <a:srgbClr val="8FBFBF"/>
               </a:solidFill>
             </a:ln>
-          </p:spPr>
-          <p:style>
-            <a:lnRef idx="2">
-              <a:schemeClr val="accent1"/>
-            </a:lnRef>
-            <a:fillRef idx="0">
-              <a:schemeClr val="accent1"/>
-            </a:fillRef>
-            <a:effectRef idx="1">
+            <a:effectLst/>
+          </p:spPr>
+          <p:style>
+            <a:lnRef idx="2">
+              <a:schemeClr val="accent1"/>
+            </a:lnRef>
+            <a:fillRef idx="0">
+              <a:schemeClr val="accent1"/>
+            </a:fillRef>
+            <a:effectRef idx="0">
               <a:schemeClr val="accent1"/>
             </a:effectRef>
             <a:fontRef idx="minor">
@@ -4579,15 +4603,16 @@
                 <a:srgbClr val="8FBFBF"/>
               </a:solidFill>
             </a:ln>
-          </p:spPr>
-          <p:style>
-            <a:lnRef idx="2">
-              <a:schemeClr val="accent1"/>
-            </a:lnRef>
-            <a:fillRef idx="0">
-              <a:schemeClr val="accent1"/>
-            </a:fillRef>
-            <a:effectRef idx="1">
+            <a:effectLst/>
+          </p:spPr>
+          <p:style>
+            <a:lnRef idx="2">
+              <a:schemeClr val="accent1"/>
+            </a:lnRef>
+            <a:fillRef idx="0">
+              <a:schemeClr val="accent1"/>
+            </a:fillRef>
+            <a:effectRef idx="0">
               <a:schemeClr val="accent1"/>
             </a:effectRef>
             <a:fontRef idx="minor">
@@ -4614,15 +4639,16 @@
                 <a:srgbClr val="8FBFBF"/>
               </a:solidFill>
             </a:ln>
-          </p:spPr>
-          <p:style>
-            <a:lnRef idx="2">
-              <a:schemeClr val="accent1"/>
-            </a:lnRef>
-            <a:fillRef idx="0">
-              <a:schemeClr val="accent1"/>
-            </a:fillRef>
-            <a:effectRef idx="1">
+            <a:effectLst/>
+          </p:spPr>
+          <p:style>
+            <a:lnRef idx="2">
+              <a:schemeClr val="accent1"/>
+            </a:lnRef>
+            <a:fillRef idx="0">
+              <a:schemeClr val="accent1"/>
+            </a:fillRef>
+            <a:effectRef idx="0">
               <a:schemeClr val="accent1"/>
             </a:effectRef>
             <a:fontRef idx="minor">
@@ -4649,15 +4675,16 @@
                 <a:srgbClr val="8FBFBF"/>
               </a:solidFill>
             </a:ln>
-          </p:spPr>
-          <p:style>
-            <a:lnRef idx="2">
-              <a:schemeClr val="accent1"/>
-            </a:lnRef>
-            <a:fillRef idx="0">
-              <a:schemeClr val="accent1"/>
-            </a:fillRef>
-            <a:effectRef idx="1">
+            <a:effectLst/>
+          </p:spPr>
+          <p:style>
+            <a:lnRef idx="2">
+              <a:schemeClr val="accent1"/>
+            </a:lnRef>
+            <a:fillRef idx="0">
+              <a:schemeClr val="accent1"/>
+            </a:fillRef>
+            <a:effectRef idx="0">
               <a:schemeClr val="accent1"/>
             </a:effectRef>
             <a:fontRef idx="minor">
@@ -4684,15 +4711,16 @@
                 <a:srgbClr val="8FBFBF"/>
               </a:solidFill>
             </a:ln>
-          </p:spPr>
-          <p:style>
-            <a:lnRef idx="2">
-              <a:schemeClr val="accent1"/>
-            </a:lnRef>
-            <a:fillRef idx="0">
-              <a:schemeClr val="accent1"/>
-            </a:fillRef>
-            <a:effectRef idx="1">
+            <a:effectLst/>
+          </p:spPr>
+          <p:style>
+            <a:lnRef idx="2">
+              <a:schemeClr val="accent1"/>
+            </a:lnRef>
+            <a:fillRef idx="0">
+              <a:schemeClr val="accent1"/>
+            </a:fillRef>
+            <a:effectRef idx="0">
               <a:schemeClr val="accent1"/>
             </a:effectRef>
             <a:fontRef idx="minor">
@@ -4719,15 +4747,16 @@
                 <a:srgbClr val="8FBFBF"/>
               </a:solidFill>
             </a:ln>
-          </p:spPr>
-          <p:style>
-            <a:lnRef idx="2">
-              <a:schemeClr val="accent1"/>
-            </a:lnRef>
-            <a:fillRef idx="0">
-              <a:schemeClr val="accent1"/>
-            </a:fillRef>
-            <a:effectRef idx="1">
+            <a:effectLst/>
+          </p:spPr>
+          <p:style>
+            <a:lnRef idx="2">
+              <a:schemeClr val="accent1"/>
+            </a:lnRef>
+            <a:fillRef idx="0">
+              <a:schemeClr val="accent1"/>
+            </a:fillRef>
+            <a:effectRef idx="0">
               <a:schemeClr val="accent1"/>
             </a:effectRef>
             <a:fontRef idx="minor">
@@ -4754,15 +4783,16 @@
                 <a:srgbClr val="8FBFBF"/>
               </a:solidFill>
             </a:ln>
-          </p:spPr>
-          <p:style>
-            <a:lnRef idx="2">
-              <a:schemeClr val="accent1"/>
-            </a:lnRef>
-            <a:fillRef idx="0">
-              <a:schemeClr val="accent1"/>
-            </a:fillRef>
-            <a:effectRef idx="1">
+            <a:effectLst/>
+          </p:spPr>
+          <p:style>
+            <a:lnRef idx="2">
+              <a:schemeClr val="accent1"/>
+            </a:lnRef>
+            <a:fillRef idx="0">
+              <a:schemeClr val="accent1"/>
+            </a:fillRef>
+            <a:effectRef idx="0">
               <a:schemeClr val="accent1"/>
             </a:effectRef>
             <a:fontRef idx="minor">
@@ -4789,15 +4819,16 @@
                 <a:srgbClr val="8FBFBF"/>
               </a:solidFill>
             </a:ln>
-          </p:spPr>
-          <p:style>
-            <a:lnRef idx="2">
-              <a:schemeClr val="accent1"/>
-            </a:lnRef>
-            <a:fillRef idx="0">
-              <a:schemeClr val="accent1"/>
-            </a:fillRef>
-            <a:effectRef idx="1">
+            <a:effectLst/>
+          </p:spPr>
+          <p:style>
+            <a:lnRef idx="2">
+              <a:schemeClr val="accent1"/>
+            </a:lnRef>
+            <a:fillRef idx="0">
+              <a:schemeClr val="accent1"/>
+            </a:fillRef>
+            <a:effectRef idx="0">
               <a:schemeClr val="accent1"/>
             </a:effectRef>
             <a:fontRef idx="minor">
@@ -4824,15 +4855,16 @@
                 <a:srgbClr val="8FBFBF"/>
               </a:solidFill>
             </a:ln>
-          </p:spPr>
-          <p:style>
-            <a:lnRef idx="2">
-              <a:schemeClr val="accent1"/>
-            </a:lnRef>
-            <a:fillRef idx="0">
-              <a:schemeClr val="accent1"/>
-            </a:fillRef>
-            <a:effectRef idx="1">
+            <a:effectLst/>
+          </p:spPr>
+          <p:style>
+            <a:lnRef idx="2">
+              <a:schemeClr val="accent1"/>
+            </a:lnRef>
+            <a:fillRef idx="0">
+              <a:schemeClr val="accent1"/>
+            </a:fillRef>
+            <a:effectRef idx="0">
               <a:schemeClr val="accent1"/>
             </a:effectRef>
             <a:fontRef idx="minor">
@@ -4859,15 +4891,16 @@
                 <a:srgbClr val="8FBFBF"/>
               </a:solidFill>
             </a:ln>
-          </p:spPr>
-          <p:style>
-            <a:lnRef idx="2">
-              <a:schemeClr val="accent1"/>
-            </a:lnRef>
-            <a:fillRef idx="0">
-              <a:schemeClr val="accent1"/>
-            </a:fillRef>
-            <a:effectRef idx="1">
+            <a:effectLst/>
+          </p:spPr>
+          <p:style>
+            <a:lnRef idx="2">
+              <a:schemeClr val="accent1"/>
+            </a:lnRef>
+            <a:fillRef idx="0">
+              <a:schemeClr val="accent1"/>
+            </a:fillRef>
+            <a:effectRef idx="0">
               <a:schemeClr val="accent1"/>
             </a:effectRef>
             <a:fontRef idx="minor">
@@ -4894,15 +4927,16 @@
                 <a:srgbClr val="8FBFBF"/>
               </a:solidFill>
             </a:ln>
-          </p:spPr>
-          <p:style>
-            <a:lnRef idx="2">
-              <a:schemeClr val="accent1"/>
-            </a:lnRef>
-            <a:fillRef idx="0">
-              <a:schemeClr val="accent1"/>
-            </a:fillRef>
-            <a:effectRef idx="1">
+            <a:effectLst/>
+          </p:spPr>
+          <p:style>
+            <a:lnRef idx="2">
+              <a:schemeClr val="accent1"/>
+            </a:lnRef>
+            <a:fillRef idx="0">
+              <a:schemeClr val="accent1"/>
+            </a:fillRef>
+            <a:effectRef idx="0">
               <a:schemeClr val="accent1"/>
             </a:effectRef>
             <a:fontRef idx="minor">
@@ -4929,15 +4963,16 @@
                 <a:srgbClr val="8FBFBF"/>
               </a:solidFill>
             </a:ln>
-          </p:spPr>
-          <p:style>
-            <a:lnRef idx="2">
-              <a:schemeClr val="accent1"/>
-            </a:lnRef>
-            <a:fillRef idx="0">
-              <a:schemeClr val="accent1"/>
-            </a:fillRef>
-            <a:effectRef idx="1">
+            <a:effectLst/>
+          </p:spPr>
+          <p:style>
+            <a:lnRef idx="2">
+              <a:schemeClr val="accent1"/>
+            </a:lnRef>
+            <a:fillRef idx="0">
+              <a:schemeClr val="accent1"/>
+            </a:fillRef>
+            <a:effectRef idx="0">
               <a:schemeClr val="accent1"/>
             </a:effectRef>
             <a:fontRef idx="minor">
@@ -4989,7 +5024,7 @@
             <a:fillRef idx="3">
               <a:schemeClr val="accent1"/>
             </a:fillRef>
-            <a:effectRef idx="2">
+            <a:effectRef idx="0">
               <a:schemeClr val="accent1"/>
             </a:effectRef>
             <a:fontRef idx="minor">
@@ -5023,15 +5058,16 @@
                 <a:srgbClr val="8FBFBF"/>
               </a:solidFill>
             </a:ln>
-          </p:spPr>
-          <p:style>
-            <a:lnRef idx="2">
-              <a:schemeClr val="accent1"/>
-            </a:lnRef>
-            <a:fillRef idx="0">
-              <a:schemeClr val="accent1"/>
-            </a:fillRef>
-            <a:effectRef idx="1">
+            <a:effectLst/>
+          </p:spPr>
+          <p:style>
+            <a:lnRef idx="2">
+              <a:schemeClr val="accent1"/>
+            </a:lnRef>
+            <a:fillRef idx="0">
+              <a:schemeClr val="accent1"/>
+            </a:fillRef>
+            <a:effectRef idx="0">
               <a:schemeClr val="accent1"/>
             </a:effectRef>
             <a:fontRef idx="minor">
@@ -5058,15 +5094,16 @@
                 <a:srgbClr val="8FBFBF"/>
               </a:solidFill>
             </a:ln>
-          </p:spPr>
-          <p:style>
-            <a:lnRef idx="2">
-              <a:schemeClr val="accent1"/>
-            </a:lnRef>
-            <a:fillRef idx="0">
-              <a:schemeClr val="accent1"/>
-            </a:fillRef>
-            <a:effectRef idx="1">
+            <a:effectLst/>
+          </p:spPr>
+          <p:style>
+            <a:lnRef idx="2">
+              <a:schemeClr val="accent1"/>
+            </a:lnRef>
+            <a:fillRef idx="0">
+              <a:schemeClr val="accent1"/>
+            </a:fillRef>
+            <a:effectRef idx="0">
               <a:schemeClr val="accent1"/>
             </a:effectRef>
             <a:fontRef idx="minor">
@@ -5093,15 +5130,16 @@
                 <a:srgbClr val="8FBFBF"/>
               </a:solidFill>
             </a:ln>
-          </p:spPr>
-          <p:style>
-            <a:lnRef idx="2">
-              <a:schemeClr val="accent1"/>
-            </a:lnRef>
-            <a:fillRef idx="0">
-              <a:schemeClr val="accent1"/>
-            </a:fillRef>
-            <a:effectRef idx="1">
+            <a:effectLst/>
+          </p:spPr>
+          <p:style>
+            <a:lnRef idx="2">
+              <a:schemeClr val="accent1"/>
+            </a:lnRef>
+            <a:fillRef idx="0">
+              <a:schemeClr val="accent1"/>
+            </a:fillRef>
+            <a:effectRef idx="0">
               <a:schemeClr val="accent1"/>
             </a:effectRef>
             <a:fontRef idx="minor">
@@ -5128,15 +5166,16 @@
                 <a:srgbClr val="8FBFBF"/>
               </a:solidFill>
             </a:ln>
-          </p:spPr>
-          <p:style>
-            <a:lnRef idx="2">
-              <a:schemeClr val="accent1"/>
-            </a:lnRef>
-            <a:fillRef idx="0">
-              <a:schemeClr val="accent1"/>
-            </a:fillRef>
-            <a:effectRef idx="1">
+            <a:effectLst/>
+          </p:spPr>
+          <p:style>
+            <a:lnRef idx="2">
+              <a:schemeClr val="accent1"/>
+            </a:lnRef>
+            <a:fillRef idx="0">
+              <a:schemeClr val="accent1"/>
+            </a:fillRef>
+            <a:effectRef idx="0">
               <a:schemeClr val="accent1"/>
             </a:effectRef>
             <a:fontRef idx="minor">
@@ -5163,15 +5202,16 @@
                 <a:srgbClr val="8FBFBF"/>
               </a:solidFill>
             </a:ln>
-          </p:spPr>
-          <p:style>
-            <a:lnRef idx="2">
-              <a:schemeClr val="accent1"/>
-            </a:lnRef>
-            <a:fillRef idx="0">
-              <a:schemeClr val="accent1"/>
-            </a:fillRef>
-            <a:effectRef idx="1">
+            <a:effectLst/>
+          </p:spPr>
+          <p:style>
+            <a:lnRef idx="2">
+              <a:schemeClr val="accent1"/>
+            </a:lnRef>
+            <a:fillRef idx="0">
+              <a:schemeClr val="accent1"/>
+            </a:fillRef>
+            <a:effectRef idx="0">
               <a:schemeClr val="accent1"/>
             </a:effectRef>
             <a:fontRef idx="minor">
@@ -5198,15 +5238,16 @@
                 <a:srgbClr val="8FBFBF"/>
               </a:solidFill>
             </a:ln>
-          </p:spPr>
-          <p:style>
-            <a:lnRef idx="2">
-              <a:schemeClr val="accent1"/>
-            </a:lnRef>
-            <a:fillRef idx="0">
-              <a:schemeClr val="accent1"/>
-            </a:fillRef>
-            <a:effectRef idx="1">
+            <a:effectLst/>
+          </p:spPr>
+          <p:style>
+            <a:lnRef idx="2">
+              <a:schemeClr val="accent1"/>
+            </a:lnRef>
+            <a:fillRef idx="0">
+              <a:schemeClr val="accent1"/>
+            </a:fillRef>
+            <a:effectRef idx="0">
               <a:schemeClr val="accent1"/>
             </a:effectRef>
             <a:fontRef idx="minor">
@@ -5233,15 +5274,16 @@
                 <a:srgbClr val="8FBFBF"/>
               </a:solidFill>
             </a:ln>
-          </p:spPr>
-          <p:style>
-            <a:lnRef idx="2">
-              <a:schemeClr val="accent1"/>
-            </a:lnRef>
-            <a:fillRef idx="0">
-              <a:schemeClr val="accent1"/>
-            </a:fillRef>
-            <a:effectRef idx="1">
+            <a:effectLst/>
+          </p:spPr>
+          <p:style>
+            <a:lnRef idx="2">
+              <a:schemeClr val="accent1"/>
+            </a:lnRef>
+            <a:fillRef idx="0">
+              <a:schemeClr val="accent1"/>
+            </a:fillRef>
+            <a:effectRef idx="0">
               <a:schemeClr val="accent1"/>
             </a:effectRef>
             <a:fontRef idx="minor">
@@ -5268,15 +5310,16 @@
                 <a:srgbClr val="8FBFBF"/>
               </a:solidFill>
             </a:ln>
-          </p:spPr>
-          <p:style>
-            <a:lnRef idx="2">
-              <a:schemeClr val="accent1"/>
-            </a:lnRef>
-            <a:fillRef idx="0">
-              <a:schemeClr val="accent1"/>
-            </a:fillRef>
-            <a:effectRef idx="1">
+            <a:effectLst/>
+          </p:spPr>
+          <p:style>
+            <a:lnRef idx="2">
+              <a:schemeClr val="accent1"/>
+            </a:lnRef>
+            <a:fillRef idx="0">
+              <a:schemeClr val="accent1"/>
+            </a:fillRef>
+            <a:effectRef idx="0">
               <a:schemeClr val="accent1"/>
             </a:effectRef>
             <a:fontRef idx="minor">
@@ -5303,15 +5346,16 @@
                 <a:srgbClr val="8FBFBF"/>
               </a:solidFill>
             </a:ln>
-          </p:spPr>
-          <p:style>
-            <a:lnRef idx="2">
-              <a:schemeClr val="accent1"/>
-            </a:lnRef>
-            <a:fillRef idx="0">
-              <a:schemeClr val="accent1"/>
-            </a:fillRef>
-            <a:effectRef idx="1">
+            <a:effectLst/>
+          </p:spPr>
+          <p:style>
+            <a:lnRef idx="2">
+              <a:schemeClr val="accent1"/>
+            </a:lnRef>
+            <a:fillRef idx="0">
+              <a:schemeClr val="accent1"/>
+            </a:fillRef>
+            <a:effectRef idx="0">
               <a:schemeClr val="accent1"/>
             </a:effectRef>
             <a:fontRef idx="minor">
@@ -5338,15 +5382,16 @@
                 <a:srgbClr val="8FBFBF"/>
               </a:solidFill>
             </a:ln>
-          </p:spPr>
-          <p:style>
-            <a:lnRef idx="2">
-              <a:schemeClr val="accent1"/>
-            </a:lnRef>
-            <a:fillRef idx="0">
-              <a:schemeClr val="accent1"/>
-            </a:fillRef>
-            <a:effectRef idx="1">
+            <a:effectLst/>
+          </p:spPr>
+          <p:style>
+            <a:lnRef idx="2">
+              <a:schemeClr val="accent1"/>
+            </a:lnRef>
+            <a:fillRef idx="0">
+              <a:schemeClr val="accent1"/>
+            </a:fillRef>
+            <a:effectRef idx="0">
               <a:schemeClr val="accent1"/>
             </a:effectRef>
             <a:fontRef idx="minor">
@@ -5373,15 +5418,16 @@
                 <a:srgbClr val="8FBFBF"/>
               </a:solidFill>
             </a:ln>
-          </p:spPr>
-          <p:style>
-            <a:lnRef idx="2">
-              <a:schemeClr val="accent1"/>
-            </a:lnRef>
-            <a:fillRef idx="0">
-              <a:schemeClr val="accent1"/>
-            </a:fillRef>
-            <a:effectRef idx="1">
+            <a:effectLst/>
+          </p:spPr>
+          <p:style>
+            <a:lnRef idx="2">
+              <a:schemeClr val="accent1"/>
+            </a:lnRef>
+            <a:fillRef idx="0">
+              <a:schemeClr val="accent1"/>
+            </a:fillRef>
+            <a:effectRef idx="0">
               <a:schemeClr val="accent1"/>
             </a:effectRef>
             <a:fontRef idx="minor">
@@ -5408,15 +5454,16 @@
                 <a:srgbClr val="8FBFBF"/>
               </a:solidFill>
             </a:ln>
-          </p:spPr>
-          <p:style>
-            <a:lnRef idx="2">
-              <a:schemeClr val="accent1"/>
-            </a:lnRef>
-            <a:fillRef idx="0">
-              <a:schemeClr val="accent1"/>
-            </a:fillRef>
-            <a:effectRef idx="1">
+            <a:effectLst/>
+          </p:spPr>
+          <p:style>
+            <a:lnRef idx="2">
+              <a:schemeClr val="accent1"/>
+            </a:lnRef>
+            <a:fillRef idx="0">
+              <a:schemeClr val="accent1"/>
+            </a:fillRef>
+            <a:effectRef idx="0">
               <a:schemeClr val="accent1"/>
             </a:effectRef>
             <a:fontRef idx="minor">
@@ -5443,15 +5490,16 @@
                 <a:srgbClr val="8FBFBF"/>
               </a:solidFill>
             </a:ln>
-          </p:spPr>
-          <p:style>
-            <a:lnRef idx="2">
-              <a:schemeClr val="accent1"/>
-            </a:lnRef>
-            <a:fillRef idx="0">
-              <a:schemeClr val="accent1"/>
-            </a:fillRef>
-            <a:effectRef idx="1">
+            <a:effectLst/>
+          </p:spPr>
+          <p:style>
+            <a:lnRef idx="2">
+              <a:schemeClr val="accent1"/>
+            </a:lnRef>
+            <a:fillRef idx="0">
+              <a:schemeClr val="accent1"/>
+            </a:fillRef>
+            <a:effectRef idx="0">
               <a:schemeClr val="accent1"/>
             </a:effectRef>
             <a:fontRef idx="minor">
@@ -5478,15 +5526,16 @@
                 <a:srgbClr val="8FBFBF"/>
               </a:solidFill>
             </a:ln>
-          </p:spPr>
-          <p:style>
-            <a:lnRef idx="2">
-              <a:schemeClr val="accent1"/>
-            </a:lnRef>
-            <a:fillRef idx="0">
-              <a:schemeClr val="accent1"/>
-            </a:fillRef>
-            <a:effectRef idx="1">
+            <a:effectLst/>
+          </p:spPr>
+          <p:style>
+            <a:lnRef idx="2">
+              <a:schemeClr val="accent1"/>
+            </a:lnRef>
+            <a:fillRef idx="0">
+              <a:schemeClr val="accent1"/>
+            </a:fillRef>
+            <a:effectRef idx="0">
               <a:schemeClr val="accent1"/>
             </a:effectRef>
             <a:fontRef idx="minor">
@@ -5513,15 +5562,16 @@
                 <a:srgbClr val="8FBFBF"/>
               </a:solidFill>
             </a:ln>
-          </p:spPr>
-          <p:style>
-            <a:lnRef idx="2">
-              <a:schemeClr val="accent1"/>
-            </a:lnRef>
-            <a:fillRef idx="0">
-              <a:schemeClr val="accent1"/>
-            </a:fillRef>
-            <a:effectRef idx="1">
+            <a:effectLst/>
+          </p:spPr>
+          <p:style>
+            <a:lnRef idx="2">
+              <a:schemeClr val="accent1"/>
+            </a:lnRef>
+            <a:fillRef idx="0">
+              <a:schemeClr val="accent1"/>
+            </a:fillRef>
+            <a:effectRef idx="0">
               <a:schemeClr val="accent1"/>
             </a:effectRef>
             <a:fontRef idx="minor">
@@ -5548,15 +5598,16 @@
                 <a:srgbClr val="8FBFBF"/>
               </a:solidFill>
             </a:ln>
-          </p:spPr>
-          <p:style>
-            <a:lnRef idx="2">
-              <a:schemeClr val="accent1"/>
-            </a:lnRef>
-            <a:fillRef idx="0">
-              <a:schemeClr val="accent1"/>
-            </a:fillRef>
-            <a:effectRef idx="1">
+            <a:effectLst/>
+          </p:spPr>
+          <p:style>
+            <a:lnRef idx="2">
+              <a:schemeClr val="accent1"/>
+            </a:lnRef>
+            <a:fillRef idx="0">
+              <a:schemeClr val="accent1"/>
+            </a:fillRef>
+            <a:effectRef idx="0">
               <a:schemeClr val="accent1"/>
             </a:effectRef>
             <a:fontRef idx="minor">
@@ -5583,15 +5634,16 @@
                 <a:srgbClr val="8FBFBF"/>
               </a:solidFill>
             </a:ln>
-          </p:spPr>
-          <p:style>
-            <a:lnRef idx="2">
-              <a:schemeClr val="accent1"/>
-            </a:lnRef>
-            <a:fillRef idx="0">
-              <a:schemeClr val="accent1"/>
-            </a:fillRef>
-            <a:effectRef idx="1">
+            <a:effectLst/>
+          </p:spPr>
+          <p:style>
+            <a:lnRef idx="2">
+              <a:schemeClr val="accent1"/>
+            </a:lnRef>
+            <a:fillRef idx="0">
+              <a:schemeClr val="accent1"/>
+            </a:fillRef>
+            <a:effectRef idx="0">
               <a:schemeClr val="accent1"/>
             </a:effectRef>
             <a:fontRef idx="minor">
@@ -5643,7 +5695,7 @@
             <a:fillRef idx="3">
               <a:schemeClr val="accent1"/>
             </a:fillRef>
-            <a:effectRef idx="2">
+            <a:effectRef idx="0">
               <a:schemeClr val="accent1"/>
             </a:effectRef>
             <a:fontRef idx="minor">
@@ -5677,15 +5729,16 @@
                 <a:srgbClr val="8FBFBF"/>
               </a:solidFill>
             </a:ln>
-          </p:spPr>
-          <p:style>
-            <a:lnRef idx="2">
-              <a:schemeClr val="accent1"/>
-            </a:lnRef>
-            <a:fillRef idx="0">
-              <a:schemeClr val="accent1"/>
-            </a:fillRef>
-            <a:effectRef idx="1">
+            <a:effectLst/>
+          </p:spPr>
+          <p:style>
+            <a:lnRef idx="2">
+              <a:schemeClr val="accent1"/>
+            </a:lnRef>
+            <a:fillRef idx="0">
+              <a:schemeClr val="accent1"/>
+            </a:fillRef>
+            <a:effectRef idx="0">
               <a:schemeClr val="accent1"/>
             </a:effectRef>
             <a:fontRef idx="minor">
@@ -5712,15 +5765,16 @@
                 <a:srgbClr val="8FBFBF"/>
               </a:solidFill>
             </a:ln>
-          </p:spPr>
-          <p:style>
-            <a:lnRef idx="2">
-              <a:schemeClr val="accent1"/>
-            </a:lnRef>
-            <a:fillRef idx="0">
-              <a:schemeClr val="accent1"/>
-            </a:fillRef>
-            <a:effectRef idx="1">
+            <a:effectLst/>
+          </p:spPr>
+          <p:style>
+            <a:lnRef idx="2">
+              <a:schemeClr val="accent1"/>
+            </a:lnRef>
+            <a:fillRef idx="0">
+              <a:schemeClr val="accent1"/>
+            </a:fillRef>
+            <a:effectRef idx="0">
               <a:schemeClr val="accent1"/>
             </a:effectRef>
             <a:fontRef idx="minor">
@@ -5747,15 +5801,16 @@
                 <a:srgbClr val="8FBFBF"/>
               </a:solidFill>
             </a:ln>
-          </p:spPr>
-          <p:style>
-            <a:lnRef idx="2">
-              <a:schemeClr val="accent1"/>
-            </a:lnRef>
-            <a:fillRef idx="0">
-              <a:schemeClr val="accent1"/>
-            </a:fillRef>
-            <a:effectRef idx="1">
+            <a:effectLst/>
+          </p:spPr>
+          <p:style>
+            <a:lnRef idx="2">
+              <a:schemeClr val="accent1"/>
+            </a:lnRef>
+            <a:fillRef idx="0">
+              <a:schemeClr val="accent1"/>
+            </a:fillRef>
+            <a:effectRef idx="0">
               <a:schemeClr val="accent1"/>
             </a:effectRef>
             <a:fontRef idx="minor">
@@ -5782,15 +5837,16 @@
                 <a:srgbClr val="8FBFBF"/>
               </a:solidFill>
             </a:ln>
-          </p:spPr>
-          <p:style>
-            <a:lnRef idx="2">
-              <a:schemeClr val="accent1"/>
-            </a:lnRef>
-            <a:fillRef idx="0">
-              <a:schemeClr val="accent1"/>
-            </a:fillRef>
-            <a:effectRef idx="1">
+            <a:effectLst/>
+          </p:spPr>
+          <p:style>
+            <a:lnRef idx="2">
+              <a:schemeClr val="accent1"/>
+            </a:lnRef>
+            <a:fillRef idx="0">
+              <a:schemeClr val="accent1"/>
+            </a:fillRef>
+            <a:effectRef idx="0">
               <a:schemeClr val="accent1"/>
             </a:effectRef>
             <a:fontRef idx="minor">
@@ -5817,15 +5873,16 @@
                 <a:srgbClr val="8FBFBF"/>
               </a:solidFill>
             </a:ln>
-          </p:spPr>
-          <p:style>
-            <a:lnRef idx="2">
-              <a:schemeClr val="accent1"/>
-            </a:lnRef>
-            <a:fillRef idx="0">
-              <a:schemeClr val="accent1"/>
-            </a:fillRef>
-            <a:effectRef idx="1">
+            <a:effectLst/>
+          </p:spPr>
+          <p:style>
+            <a:lnRef idx="2">
+              <a:schemeClr val="accent1"/>
+            </a:lnRef>
+            <a:fillRef idx="0">
+              <a:schemeClr val="accent1"/>
+            </a:fillRef>
+            <a:effectRef idx="0">
               <a:schemeClr val="accent1"/>
             </a:effectRef>
             <a:fontRef idx="minor">
@@ -5852,15 +5909,16 @@
                 <a:srgbClr val="8FBFBF"/>
               </a:solidFill>
             </a:ln>
-          </p:spPr>
-          <p:style>
-            <a:lnRef idx="2">
-              <a:schemeClr val="accent1"/>
-            </a:lnRef>
-            <a:fillRef idx="0">
-              <a:schemeClr val="accent1"/>
-            </a:fillRef>
-            <a:effectRef idx="1">
+            <a:effectLst/>
+          </p:spPr>
+          <p:style>
+            <a:lnRef idx="2">
+              <a:schemeClr val="accent1"/>
+            </a:lnRef>
+            <a:fillRef idx="0">
+              <a:schemeClr val="accent1"/>
+            </a:fillRef>
+            <a:effectRef idx="0">
               <a:schemeClr val="accent1"/>
             </a:effectRef>
             <a:fontRef idx="minor">
@@ -5887,15 +5945,16 @@
                 <a:srgbClr val="8FBFBF"/>
               </a:solidFill>
             </a:ln>
-          </p:spPr>
-          <p:style>
-            <a:lnRef idx="2">
-              <a:schemeClr val="accent1"/>
-            </a:lnRef>
-            <a:fillRef idx="0">
-              <a:schemeClr val="accent1"/>
-            </a:fillRef>
-            <a:effectRef idx="1">
+            <a:effectLst/>
+          </p:spPr>
+          <p:style>
+            <a:lnRef idx="2">
+              <a:schemeClr val="accent1"/>
+            </a:lnRef>
+            <a:fillRef idx="0">
+              <a:schemeClr val="accent1"/>
+            </a:fillRef>
+            <a:effectRef idx="0">
               <a:schemeClr val="accent1"/>
             </a:effectRef>
             <a:fontRef idx="minor">
@@ -5922,15 +5981,16 @@
                 <a:srgbClr val="8FBFBF"/>
               </a:solidFill>
             </a:ln>
-          </p:spPr>
-          <p:style>
-            <a:lnRef idx="2">
-              <a:schemeClr val="accent1"/>
-            </a:lnRef>
-            <a:fillRef idx="0">
-              <a:schemeClr val="accent1"/>
-            </a:fillRef>
-            <a:effectRef idx="1">
+            <a:effectLst/>
+          </p:spPr>
+          <p:style>
+            <a:lnRef idx="2">
+              <a:schemeClr val="accent1"/>
+            </a:lnRef>
+            <a:fillRef idx="0">
+              <a:schemeClr val="accent1"/>
+            </a:fillRef>
+            <a:effectRef idx="0">
               <a:schemeClr val="accent1"/>
             </a:effectRef>
             <a:fontRef idx="minor">
@@ -5957,15 +6017,16 @@
                 <a:srgbClr val="8FBFBF"/>
               </a:solidFill>
             </a:ln>
-          </p:spPr>
-          <p:style>
-            <a:lnRef idx="2">
-              <a:schemeClr val="accent1"/>
-            </a:lnRef>
-            <a:fillRef idx="0">
-              <a:schemeClr val="accent1"/>
-            </a:fillRef>
-            <a:effectRef idx="1">
+            <a:effectLst/>
+          </p:spPr>
+          <p:style>
+            <a:lnRef idx="2">
+              <a:schemeClr val="accent1"/>
+            </a:lnRef>
+            <a:fillRef idx="0">
+              <a:schemeClr val="accent1"/>
+            </a:fillRef>
+            <a:effectRef idx="0">
               <a:schemeClr val="accent1"/>
             </a:effectRef>
             <a:fontRef idx="minor">
@@ -5992,15 +6053,16 @@
                 <a:srgbClr val="8FBFBF"/>
               </a:solidFill>
             </a:ln>
-          </p:spPr>
-          <p:style>
-            <a:lnRef idx="2">
-              <a:schemeClr val="accent1"/>
-            </a:lnRef>
-            <a:fillRef idx="0">
-              <a:schemeClr val="accent1"/>
-            </a:fillRef>
-            <a:effectRef idx="1">
+            <a:effectLst/>
+          </p:spPr>
+          <p:style>
+            <a:lnRef idx="2">
+              <a:schemeClr val="accent1"/>
+            </a:lnRef>
+            <a:fillRef idx="0">
+              <a:schemeClr val="accent1"/>
+            </a:fillRef>
+            <a:effectRef idx="0">
               <a:schemeClr val="accent1"/>
             </a:effectRef>
             <a:fontRef idx="minor">
@@ -6027,15 +6089,16 @@
                 <a:srgbClr val="8FBFBF"/>
               </a:solidFill>
             </a:ln>
-          </p:spPr>
-          <p:style>
-            <a:lnRef idx="2">
-              <a:schemeClr val="accent1"/>
-            </a:lnRef>
-            <a:fillRef idx="0">
-              <a:schemeClr val="accent1"/>
-            </a:fillRef>
-            <a:effectRef idx="1">
+            <a:effectLst/>
+          </p:spPr>
+          <p:style>
+            <a:lnRef idx="2">
+              <a:schemeClr val="accent1"/>
+            </a:lnRef>
+            <a:fillRef idx="0">
+              <a:schemeClr val="accent1"/>
+            </a:fillRef>
+            <a:effectRef idx="0">
               <a:schemeClr val="accent1"/>
             </a:effectRef>
             <a:fontRef idx="minor">
@@ -6062,15 +6125,16 @@
                 <a:srgbClr val="8FBFBF"/>
               </a:solidFill>
             </a:ln>
-          </p:spPr>
-          <p:style>
-            <a:lnRef idx="2">
-              <a:schemeClr val="accent1"/>
-            </a:lnRef>
-            <a:fillRef idx="0">
-              <a:schemeClr val="accent1"/>
-            </a:fillRef>
-            <a:effectRef idx="1">
+            <a:effectLst/>
+          </p:spPr>
+          <p:style>
+            <a:lnRef idx="2">
+              <a:schemeClr val="accent1"/>
+            </a:lnRef>
+            <a:fillRef idx="0">
+              <a:schemeClr val="accent1"/>
+            </a:fillRef>
+            <a:effectRef idx="0">
               <a:schemeClr val="accent1"/>
             </a:effectRef>
             <a:fontRef idx="minor">
@@ -6097,15 +6161,16 @@
                 <a:srgbClr val="8FBFBF"/>
               </a:solidFill>
             </a:ln>
-          </p:spPr>
-          <p:style>
-            <a:lnRef idx="2">
-              <a:schemeClr val="accent1"/>
-            </a:lnRef>
-            <a:fillRef idx="0">
-              <a:schemeClr val="accent1"/>
-            </a:fillRef>
-            <a:effectRef idx="1">
+            <a:effectLst/>
+          </p:spPr>
+          <p:style>
+            <a:lnRef idx="2">
+              <a:schemeClr val="accent1"/>
+            </a:lnRef>
+            <a:fillRef idx="0">
+              <a:schemeClr val="accent1"/>
+            </a:fillRef>
+            <a:effectRef idx="0">
               <a:schemeClr val="accent1"/>
             </a:effectRef>
             <a:fontRef idx="minor">
@@ -6132,15 +6197,16 @@
                 <a:srgbClr val="8FBFBF"/>
               </a:solidFill>
             </a:ln>
-          </p:spPr>
-          <p:style>
-            <a:lnRef idx="2">
-              <a:schemeClr val="accent1"/>
-            </a:lnRef>
-            <a:fillRef idx="0">
-              <a:schemeClr val="accent1"/>
-            </a:fillRef>
-            <a:effectRef idx="1">
+            <a:effectLst/>
+          </p:spPr>
+          <p:style>
+            <a:lnRef idx="2">
+              <a:schemeClr val="accent1"/>
+            </a:lnRef>
+            <a:fillRef idx="0">
+              <a:schemeClr val="accent1"/>
+            </a:fillRef>
+            <a:effectRef idx="0">
               <a:schemeClr val="accent1"/>
             </a:effectRef>
             <a:fontRef idx="minor">
@@ -6167,15 +6233,16 @@
                 <a:srgbClr val="8FBFBF"/>
               </a:solidFill>
             </a:ln>
-          </p:spPr>
-          <p:style>
-            <a:lnRef idx="2">
-              <a:schemeClr val="accent1"/>
-            </a:lnRef>
-            <a:fillRef idx="0">
-              <a:schemeClr val="accent1"/>
-            </a:fillRef>
-            <a:effectRef idx="1">
+            <a:effectLst/>
+          </p:spPr>
+          <p:style>
+            <a:lnRef idx="2">
+              <a:schemeClr val="accent1"/>
+            </a:lnRef>
+            <a:fillRef idx="0">
+              <a:schemeClr val="accent1"/>
+            </a:fillRef>
+            <a:effectRef idx="0">
               <a:schemeClr val="accent1"/>
             </a:effectRef>
             <a:fontRef idx="minor">
@@ -6202,15 +6269,16 @@
                 <a:srgbClr val="8FBFBF"/>
               </a:solidFill>
             </a:ln>
-          </p:spPr>
-          <p:style>
-            <a:lnRef idx="2">
-              <a:schemeClr val="accent1"/>
-            </a:lnRef>
-            <a:fillRef idx="0">
-              <a:schemeClr val="accent1"/>
-            </a:fillRef>
-            <a:effectRef idx="1">
+            <a:effectLst/>
+          </p:spPr>
+          <p:style>
+            <a:lnRef idx="2">
+              <a:schemeClr val="accent1"/>
+            </a:lnRef>
+            <a:fillRef idx="0">
+              <a:schemeClr val="accent1"/>
+            </a:fillRef>
+            <a:effectRef idx="0">
               <a:schemeClr val="accent1"/>
             </a:effectRef>
             <a:fontRef idx="minor">
@@ -6237,15 +6305,16 @@
                 <a:srgbClr val="8FBFBF"/>
               </a:solidFill>
             </a:ln>
-          </p:spPr>
-          <p:style>
-            <a:lnRef idx="2">
-              <a:schemeClr val="accent1"/>
-            </a:lnRef>
-            <a:fillRef idx="0">
-              <a:schemeClr val="accent1"/>
-            </a:fillRef>
-            <a:effectRef idx="1">
+            <a:effectLst/>
+          </p:spPr>
+          <p:style>
+            <a:lnRef idx="2">
+              <a:schemeClr val="accent1"/>
+            </a:lnRef>
+            <a:fillRef idx="0">
+              <a:schemeClr val="accent1"/>
+            </a:fillRef>
+            <a:effectRef idx="0">
               <a:schemeClr val="accent1"/>
             </a:effectRef>
             <a:fontRef idx="minor">
@@ -6297,7 +6366,7 @@
             <a:fillRef idx="3">
               <a:schemeClr val="accent1"/>
             </a:fillRef>
-            <a:effectRef idx="2">
+            <a:effectRef idx="0">
               <a:schemeClr val="accent1"/>
             </a:effectRef>
             <a:fontRef idx="minor">
@@ -6331,15 +6400,16 @@
                 <a:srgbClr val="8FBFBF"/>
               </a:solidFill>
             </a:ln>
-          </p:spPr>
-          <p:style>
-            <a:lnRef idx="2">
-              <a:schemeClr val="accent1"/>
-            </a:lnRef>
-            <a:fillRef idx="0">
-              <a:schemeClr val="accent1"/>
-            </a:fillRef>
-            <a:effectRef idx="1">
+            <a:effectLst/>
+          </p:spPr>
+          <p:style>
+            <a:lnRef idx="2">
+              <a:schemeClr val="accent1"/>
+            </a:lnRef>
+            <a:fillRef idx="0">
+              <a:schemeClr val="accent1"/>
+            </a:fillRef>
+            <a:effectRef idx="0">
               <a:schemeClr val="accent1"/>
             </a:effectRef>
             <a:fontRef idx="minor">
@@ -6366,15 +6436,16 @@
                 <a:srgbClr val="8FBFBF"/>
               </a:solidFill>
             </a:ln>
-          </p:spPr>
-          <p:style>
-            <a:lnRef idx="2">
-              <a:schemeClr val="accent1"/>
-            </a:lnRef>
-            <a:fillRef idx="0">
-              <a:schemeClr val="accent1"/>
-            </a:fillRef>
-            <a:effectRef idx="1">
+            <a:effectLst/>
+          </p:spPr>
+          <p:style>
+            <a:lnRef idx="2">
+              <a:schemeClr val="accent1"/>
+            </a:lnRef>
+            <a:fillRef idx="0">
+              <a:schemeClr val="accent1"/>
+            </a:fillRef>
+            <a:effectRef idx="0">
               <a:schemeClr val="accent1"/>
             </a:effectRef>
             <a:fontRef idx="minor">
@@ -6401,15 +6472,16 @@
                 <a:srgbClr val="8FBFBF"/>
               </a:solidFill>
             </a:ln>
-          </p:spPr>
-          <p:style>
-            <a:lnRef idx="2">
-              <a:schemeClr val="accent1"/>
-            </a:lnRef>
-            <a:fillRef idx="0">
-              <a:schemeClr val="accent1"/>
-            </a:fillRef>
-            <a:effectRef idx="1">
+            <a:effectLst/>
+          </p:spPr>
+          <p:style>
+            <a:lnRef idx="2">
+              <a:schemeClr val="accent1"/>
+            </a:lnRef>
+            <a:fillRef idx="0">
+              <a:schemeClr val="accent1"/>
+            </a:fillRef>
+            <a:effectRef idx="0">
               <a:schemeClr val="accent1"/>
             </a:effectRef>
             <a:fontRef idx="minor">
@@ -6436,15 +6508,16 @@
                 <a:srgbClr val="8FBFBF"/>
               </a:solidFill>
             </a:ln>
-          </p:spPr>
-          <p:style>
-            <a:lnRef idx="2">
-              <a:schemeClr val="accent1"/>
-            </a:lnRef>
-            <a:fillRef idx="0">
-              <a:schemeClr val="accent1"/>
-            </a:fillRef>
-            <a:effectRef idx="1">
+            <a:effectLst/>
+          </p:spPr>
+          <p:style>
+            <a:lnRef idx="2">
+              <a:schemeClr val="accent1"/>
+            </a:lnRef>
+            <a:fillRef idx="0">
+              <a:schemeClr val="accent1"/>
+            </a:fillRef>
+            <a:effectRef idx="0">
               <a:schemeClr val="accent1"/>
             </a:effectRef>
             <a:fontRef idx="minor">
@@ -6471,15 +6544,16 @@
                 <a:srgbClr val="8FBFBF"/>
               </a:solidFill>
             </a:ln>
-          </p:spPr>
-          <p:style>
-            <a:lnRef idx="2">
-              <a:schemeClr val="accent1"/>
-            </a:lnRef>
-            <a:fillRef idx="0">
-              <a:schemeClr val="accent1"/>
-            </a:fillRef>
-            <a:effectRef idx="1">
+            <a:effectLst/>
+          </p:spPr>
+          <p:style>
+            <a:lnRef idx="2">
+              <a:schemeClr val="accent1"/>
+            </a:lnRef>
+            <a:fillRef idx="0">
+              <a:schemeClr val="accent1"/>
+            </a:fillRef>
+            <a:effectRef idx="0">
               <a:schemeClr val="accent1"/>
             </a:effectRef>
             <a:fontRef idx="minor">
@@ -6506,15 +6580,16 @@
                 <a:srgbClr val="8FBFBF"/>
               </a:solidFill>
             </a:ln>
-          </p:spPr>
-          <p:style>
-            <a:lnRef idx="2">
-              <a:schemeClr val="accent1"/>
-            </a:lnRef>
-            <a:fillRef idx="0">
-              <a:schemeClr val="accent1"/>
-            </a:fillRef>
-            <a:effectRef idx="1">
+            <a:effectLst/>
+          </p:spPr>
+          <p:style>
+            <a:lnRef idx="2">
+              <a:schemeClr val="accent1"/>
+            </a:lnRef>
+            <a:fillRef idx="0">
+              <a:schemeClr val="accent1"/>
+            </a:fillRef>
+            <a:effectRef idx="0">
               <a:schemeClr val="accent1"/>
             </a:effectRef>
             <a:fontRef idx="minor">
@@ -6541,15 +6616,16 @@
                 <a:srgbClr val="8FBFBF"/>
               </a:solidFill>
             </a:ln>
-          </p:spPr>
-          <p:style>
-            <a:lnRef idx="2">
-              <a:schemeClr val="accent1"/>
-            </a:lnRef>
-            <a:fillRef idx="0">
-              <a:schemeClr val="accent1"/>
-            </a:fillRef>
-            <a:effectRef idx="1">
+            <a:effectLst/>
+          </p:spPr>
+          <p:style>
+            <a:lnRef idx="2">
+              <a:schemeClr val="accent1"/>
+            </a:lnRef>
+            <a:fillRef idx="0">
+              <a:schemeClr val="accent1"/>
+            </a:fillRef>
+            <a:effectRef idx="0">
               <a:schemeClr val="accent1"/>
             </a:effectRef>
             <a:fontRef idx="minor">
@@ -6576,15 +6652,16 @@
                 <a:srgbClr val="8FBFBF"/>
               </a:solidFill>
             </a:ln>
-          </p:spPr>
-          <p:style>
-            <a:lnRef idx="2">
-              <a:schemeClr val="accent1"/>
-            </a:lnRef>
-            <a:fillRef idx="0">
-              <a:schemeClr val="accent1"/>
-            </a:fillRef>
-            <a:effectRef idx="1">
+            <a:effectLst/>
+          </p:spPr>
+          <p:style>
+            <a:lnRef idx="2">
+              <a:schemeClr val="accent1"/>
+            </a:lnRef>
+            <a:fillRef idx="0">
+              <a:schemeClr val="accent1"/>
+            </a:fillRef>
+            <a:effectRef idx="0">
               <a:schemeClr val="accent1"/>
             </a:effectRef>
             <a:fontRef idx="minor">
@@ -6611,15 +6688,16 @@
                 <a:srgbClr val="8FBFBF"/>
               </a:solidFill>
             </a:ln>
-          </p:spPr>
-          <p:style>
-            <a:lnRef idx="2">
-              <a:schemeClr val="accent1"/>
-            </a:lnRef>
-            <a:fillRef idx="0">
-              <a:schemeClr val="accent1"/>
-            </a:fillRef>
-            <a:effectRef idx="1">
+            <a:effectLst/>
+          </p:spPr>
+          <p:style>
+            <a:lnRef idx="2">
+              <a:schemeClr val="accent1"/>
+            </a:lnRef>
+            <a:fillRef idx="0">
+              <a:schemeClr val="accent1"/>
+            </a:fillRef>
+            <a:effectRef idx="0">
               <a:schemeClr val="accent1"/>
             </a:effectRef>
             <a:fontRef idx="minor">
@@ -6646,15 +6724,16 @@
                 <a:srgbClr val="8FBFBF"/>
               </a:solidFill>
             </a:ln>
-          </p:spPr>
-          <p:style>
-            <a:lnRef idx="2">
-              <a:schemeClr val="accent1"/>
-            </a:lnRef>
-            <a:fillRef idx="0">
-              <a:schemeClr val="accent1"/>
-            </a:fillRef>
-            <a:effectRef idx="1">
+            <a:effectLst/>
+          </p:spPr>
+          <p:style>
+            <a:lnRef idx="2">
+              <a:schemeClr val="accent1"/>
+            </a:lnRef>
+            <a:fillRef idx="0">
+              <a:schemeClr val="accent1"/>
+            </a:fillRef>
+            <a:effectRef idx="0">
               <a:schemeClr val="accent1"/>
             </a:effectRef>
             <a:fontRef idx="minor">
@@ -6681,15 +6760,16 @@
                 <a:srgbClr val="8FBFBF"/>
               </a:solidFill>
             </a:ln>
-          </p:spPr>
-          <p:style>
-            <a:lnRef idx="2">
-              <a:schemeClr val="accent1"/>
-            </a:lnRef>
-            <a:fillRef idx="0">
-              <a:schemeClr val="accent1"/>
-            </a:fillRef>
-            <a:effectRef idx="1">
+            <a:effectLst/>
+          </p:spPr>
+          <p:style>
+            <a:lnRef idx="2">
+              <a:schemeClr val="accent1"/>
+            </a:lnRef>
+            <a:fillRef idx="0">
+              <a:schemeClr val="accent1"/>
+            </a:fillRef>
+            <a:effectRef idx="0">
               <a:schemeClr val="accent1"/>
             </a:effectRef>
             <a:fontRef idx="minor">
@@ -6716,15 +6796,16 @@
                 <a:srgbClr val="8FBFBF"/>
               </a:solidFill>
             </a:ln>
-          </p:spPr>
-          <p:style>
-            <a:lnRef idx="2">
-              <a:schemeClr val="accent1"/>
-            </a:lnRef>
-            <a:fillRef idx="0">
-              <a:schemeClr val="accent1"/>
-            </a:fillRef>
-            <a:effectRef idx="1">
+            <a:effectLst/>
+          </p:spPr>
+          <p:style>
+            <a:lnRef idx="2">
+              <a:schemeClr val="accent1"/>
+            </a:lnRef>
+            <a:fillRef idx="0">
+              <a:schemeClr val="accent1"/>
+            </a:fillRef>
+            <a:effectRef idx="0">
               <a:schemeClr val="accent1"/>
             </a:effectRef>
             <a:fontRef idx="minor">
@@ -6751,15 +6832,16 @@
                 <a:srgbClr val="8FBFBF"/>
               </a:solidFill>
             </a:ln>
-          </p:spPr>
-          <p:style>
-            <a:lnRef idx="2">
-              <a:schemeClr val="accent1"/>
-            </a:lnRef>
-            <a:fillRef idx="0">
-              <a:schemeClr val="accent1"/>
-            </a:fillRef>
-            <a:effectRef idx="1">
+            <a:effectLst/>
+          </p:spPr>
+          <p:style>
+            <a:lnRef idx="2">
+              <a:schemeClr val="accent1"/>
+            </a:lnRef>
+            <a:fillRef idx="0">
+              <a:schemeClr val="accent1"/>
+            </a:fillRef>
+            <a:effectRef idx="0">
               <a:schemeClr val="accent1"/>
             </a:effectRef>
             <a:fontRef idx="minor">
@@ -6786,15 +6868,16 @@
                 <a:srgbClr val="8FBFBF"/>
               </a:solidFill>
             </a:ln>
-          </p:spPr>
-          <p:style>
-            <a:lnRef idx="2">
-              <a:schemeClr val="accent1"/>
-            </a:lnRef>
-            <a:fillRef idx="0">
-              <a:schemeClr val="accent1"/>
-            </a:fillRef>
-            <a:effectRef idx="1">
+            <a:effectLst/>
+          </p:spPr>
+          <p:style>
+            <a:lnRef idx="2">
+              <a:schemeClr val="accent1"/>
+            </a:lnRef>
+            <a:fillRef idx="0">
+              <a:schemeClr val="accent1"/>
+            </a:fillRef>
+            <a:effectRef idx="0">
               <a:schemeClr val="accent1"/>
             </a:effectRef>
             <a:fontRef idx="minor">
@@ -6821,15 +6904,16 @@
                 <a:srgbClr val="8FBFBF"/>
               </a:solidFill>
             </a:ln>
-          </p:spPr>
-          <p:style>
-            <a:lnRef idx="2">
-              <a:schemeClr val="accent1"/>
-            </a:lnRef>
-            <a:fillRef idx="0">
-              <a:schemeClr val="accent1"/>
-            </a:fillRef>
-            <a:effectRef idx="1">
+            <a:effectLst/>
+          </p:spPr>
+          <p:style>
+            <a:lnRef idx="2">
+              <a:schemeClr val="accent1"/>
+            </a:lnRef>
+            <a:fillRef idx="0">
+              <a:schemeClr val="accent1"/>
+            </a:fillRef>
+            <a:effectRef idx="0">
               <a:schemeClr val="accent1"/>
             </a:effectRef>
             <a:fontRef idx="minor">
@@ -6856,15 +6940,16 @@
                 <a:srgbClr val="8FBFBF"/>
               </a:solidFill>
             </a:ln>
-          </p:spPr>
-          <p:style>
-            <a:lnRef idx="2">
-              <a:schemeClr val="accent1"/>
-            </a:lnRef>
-            <a:fillRef idx="0">
-              <a:schemeClr val="accent1"/>
-            </a:fillRef>
-            <a:effectRef idx="1">
+            <a:effectLst/>
+          </p:spPr>
+          <p:style>
+            <a:lnRef idx="2">
+              <a:schemeClr val="accent1"/>
+            </a:lnRef>
+            <a:fillRef idx="0">
+              <a:schemeClr val="accent1"/>
+            </a:fillRef>
+            <a:effectRef idx="0">
               <a:schemeClr val="accent1"/>
             </a:effectRef>
             <a:fontRef idx="minor">
@@ -6891,15 +6976,16 @@
                 <a:srgbClr val="8FBFBF"/>
               </a:solidFill>
             </a:ln>
-          </p:spPr>
-          <p:style>
-            <a:lnRef idx="2">
-              <a:schemeClr val="accent1"/>
-            </a:lnRef>
-            <a:fillRef idx="0">
-              <a:schemeClr val="accent1"/>
-            </a:fillRef>
-            <a:effectRef idx="1">
+            <a:effectLst/>
+          </p:spPr>
+          <p:style>
+            <a:lnRef idx="2">
+              <a:schemeClr val="accent1"/>
+            </a:lnRef>
+            <a:fillRef idx="0">
+              <a:schemeClr val="accent1"/>
+            </a:fillRef>
+            <a:effectRef idx="0">
               <a:schemeClr val="accent1"/>
             </a:effectRef>
             <a:fontRef idx="minor">
@@ -6951,7 +7037,7 @@
             <a:fillRef idx="3">
               <a:schemeClr val="accent1"/>
             </a:fillRef>
-            <a:effectRef idx="2">
+            <a:effectRef idx="0">
               <a:schemeClr val="accent1"/>
             </a:effectRef>
             <a:fontRef idx="minor">
@@ -6985,15 +7071,16 @@
                 <a:srgbClr val="8FBFBF"/>
               </a:solidFill>
             </a:ln>
-          </p:spPr>
-          <p:style>
-            <a:lnRef idx="2">
-              <a:schemeClr val="accent1"/>
-            </a:lnRef>
-            <a:fillRef idx="0">
-              <a:schemeClr val="accent1"/>
-            </a:fillRef>
-            <a:effectRef idx="1">
+            <a:effectLst/>
+          </p:spPr>
+          <p:style>
+            <a:lnRef idx="2">
+              <a:schemeClr val="accent1"/>
+            </a:lnRef>
+            <a:fillRef idx="0">
+              <a:schemeClr val="accent1"/>
+            </a:fillRef>
+            <a:effectRef idx="0">
               <a:schemeClr val="accent1"/>
             </a:effectRef>
             <a:fontRef idx="minor">
@@ -7020,15 +7107,16 @@
                 <a:srgbClr val="8FBFBF"/>
               </a:solidFill>
             </a:ln>
-          </p:spPr>
-          <p:style>
-            <a:lnRef idx="2">
-              <a:schemeClr val="accent1"/>
-            </a:lnRef>
-            <a:fillRef idx="0">
-              <a:schemeClr val="accent1"/>
-            </a:fillRef>
-            <a:effectRef idx="1">
+            <a:effectLst/>
+          </p:spPr>
+          <p:style>
+            <a:lnRef idx="2">
+              <a:schemeClr val="accent1"/>
+            </a:lnRef>
+            <a:fillRef idx="0">
+              <a:schemeClr val="accent1"/>
+            </a:fillRef>
+            <a:effectRef idx="0">
               <a:schemeClr val="accent1"/>
             </a:effectRef>
             <a:fontRef idx="minor">
@@ -7055,15 +7143,16 @@
                 <a:srgbClr val="8FBFBF"/>
               </a:solidFill>
             </a:ln>
-          </p:spPr>
-          <p:style>
-            <a:lnRef idx="2">
-              <a:schemeClr val="accent1"/>
-            </a:lnRef>
-            <a:fillRef idx="0">
-              <a:schemeClr val="accent1"/>
-            </a:fillRef>
-            <a:effectRef idx="1">
+            <a:effectLst/>
+          </p:spPr>
+          <p:style>
+            <a:lnRef idx="2">
+              <a:schemeClr val="accent1"/>
+            </a:lnRef>
+            <a:fillRef idx="0">
+              <a:schemeClr val="accent1"/>
+            </a:fillRef>
+            <a:effectRef idx="0">
               <a:schemeClr val="accent1"/>
             </a:effectRef>
             <a:fontRef idx="minor">
@@ -7090,15 +7179,16 @@
                 <a:srgbClr val="8FBFBF"/>
               </a:solidFill>
             </a:ln>
-          </p:spPr>
-          <p:style>
-            <a:lnRef idx="2">
-              <a:schemeClr val="accent1"/>
-            </a:lnRef>
-            <a:fillRef idx="0">
-              <a:schemeClr val="accent1"/>
-            </a:fillRef>
-            <a:effectRef idx="1">
+            <a:effectLst/>
+          </p:spPr>
+          <p:style>
+            <a:lnRef idx="2">
+              <a:schemeClr val="accent1"/>
+            </a:lnRef>
+            <a:fillRef idx="0">
+              <a:schemeClr val="accent1"/>
+            </a:fillRef>
+            <a:effectRef idx="0">
               <a:schemeClr val="accent1"/>
             </a:effectRef>
             <a:fontRef idx="minor">
@@ -7125,15 +7215,16 @@
                 <a:srgbClr val="8FBFBF"/>
               </a:solidFill>
             </a:ln>
-          </p:spPr>
-          <p:style>
-            <a:lnRef idx="2">
-              <a:schemeClr val="accent1"/>
-            </a:lnRef>
-            <a:fillRef idx="0">
-              <a:schemeClr val="accent1"/>
-            </a:fillRef>
-            <a:effectRef idx="1">
+            <a:effectLst/>
+          </p:spPr>
+          <p:style>
+            <a:lnRef idx="2">
+              <a:schemeClr val="accent1"/>
+            </a:lnRef>
+            <a:fillRef idx="0">
+              <a:schemeClr val="accent1"/>
+            </a:fillRef>
+            <a:effectRef idx="0">
               <a:schemeClr val="accent1"/>
             </a:effectRef>
             <a:fontRef idx="minor">
@@ -7160,15 +7251,16 @@
                 <a:srgbClr val="8FBFBF"/>
               </a:solidFill>
             </a:ln>
-          </p:spPr>
-          <p:style>
-            <a:lnRef idx="2">
-              <a:schemeClr val="accent1"/>
-            </a:lnRef>
-            <a:fillRef idx="0">
-              <a:schemeClr val="accent1"/>
-            </a:fillRef>
-            <a:effectRef idx="1">
+            <a:effectLst/>
+          </p:spPr>
+          <p:style>
+            <a:lnRef idx="2">
+              <a:schemeClr val="accent1"/>
+            </a:lnRef>
+            <a:fillRef idx="0">
+              <a:schemeClr val="accent1"/>
+            </a:fillRef>
+            <a:effectRef idx="0">
               <a:schemeClr val="accent1"/>
             </a:effectRef>
             <a:fontRef idx="minor">
@@ -7195,15 +7287,16 @@
                 <a:srgbClr val="8FBFBF"/>
               </a:solidFill>
             </a:ln>
-          </p:spPr>
-          <p:style>
-            <a:lnRef idx="2">
-              <a:schemeClr val="accent1"/>
-            </a:lnRef>
-            <a:fillRef idx="0">
-              <a:schemeClr val="accent1"/>
-            </a:fillRef>
-            <a:effectRef idx="1">
+            <a:effectLst/>
+          </p:spPr>
+          <p:style>
+            <a:lnRef idx="2">
+              <a:schemeClr val="accent1"/>
+            </a:lnRef>
+            <a:fillRef idx="0">
+              <a:schemeClr val="accent1"/>
+            </a:fillRef>
+            <a:effectRef idx="0">
               <a:schemeClr val="accent1"/>
             </a:effectRef>
             <a:fontRef idx="minor">
@@ -7230,15 +7323,16 @@
                 <a:srgbClr val="8FBFBF"/>
               </a:solidFill>
             </a:ln>
-          </p:spPr>
-          <p:style>
-            <a:lnRef idx="2">
-              <a:schemeClr val="accent1"/>
-            </a:lnRef>
-            <a:fillRef idx="0">
-              <a:schemeClr val="accent1"/>
-            </a:fillRef>
-            <a:effectRef idx="1">
+            <a:effectLst/>
+          </p:spPr>
+          <p:style>
+            <a:lnRef idx="2">
+              <a:schemeClr val="accent1"/>
+            </a:lnRef>
+            <a:fillRef idx="0">
+              <a:schemeClr val="accent1"/>
+            </a:fillRef>
+            <a:effectRef idx="0">
               <a:schemeClr val="accent1"/>
             </a:effectRef>
             <a:fontRef idx="minor">
@@ -7265,15 +7359,16 @@
                 <a:srgbClr val="8FBFBF"/>
               </a:solidFill>
             </a:ln>
-          </p:spPr>
-          <p:style>
-            <a:lnRef idx="2">
-              <a:schemeClr val="accent1"/>
-            </a:lnRef>
-            <a:fillRef idx="0">
-              <a:schemeClr val="accent1"/>
-            </a:fillRef>
-            <a:effectRef idx="1">
+            <a:effectLst/>
+          </p:spPr>
+          <p:style>
+            <a:lnRef idx="2">
+              <a:schemeClr val="accent1"/>
+            </a:lnRef>
+            <a:fillRef idx="0">
+              <a:schemeClr val="accent1"/>
+            </a:fillRef>
+            <a:effectRef idx="0">
               <a:schemeClr val="accent1"/>
             </a:effectRef>
             <a:fontRef idx="minor">
@@ -7300,15 +7395,16 @@
                 <a:srgbClr val="8FBFBF"/>
               </a:solidFill>
             </a:ln>
-          </p:spPr>
-          <p:style>
-            <a:lnRef idx="2">
-              <a:schemeClr val="accent1"/>
-            </a:lnRef>
-            <a:fillRef idx="0">
-              <a:schemeClr val="accent1"/>
-            </a:fillRef>
-            <a:effectRef idx="1">
+            <a:effectLst/>
+          </p:spPr>
+          <p:style>
+            <a:lnRef idx="2">
+              <a:schemeClr val="accent1"/>
+            </a:lnRef>
+            <a:fillRef idx="0">
+              <a:schemeClr val="accent1"/>
+            </a:fillRef>
+            <a:effectRef idx="0">
               <a:schemeClr val="accent1"/>
             </a:effectRef>
             <a:fontRef idx="minor">
@@ -7335,15 +7431,16 @@
                 <a:srgbClr val="8FBFBF"/>
               </a:solidFill>
             </a:ln>
-          </p:spPr>
-          <p:style>
-            <a:lnRef idx="2">
-              <a:schemeClr val="accent1"/>
-            </a:lnRef>
-            <a:fillRef idx="0">
-              <a:schemeClr val="accent1"/>
-            </a:fillRef>
-            <a:effectRef idx="1">
+            <a:effectLst/>
+          </p:spPr>
+          <p:style>
+            <a:lnRef idx="2">
+              <a:schemeClr val="accent1"/>
+            </a:lnRef>
+            <a:fillRef idx="0">
+              <a:schemeClr val="accent1"/>
+            </a:fillRef>
+            <a:effectRef idx="0">
               <a:schemeClr val="accent1"/>
             </a:effectRef>
             <a:fontRef idx="minor">
@@ -7370,15 +7467,16 @@
                 <a:srgbClr val="8FBFBF"/>
               </a:solidFill>
             </a:ln>
-          </p:spPr>
-          <p:style>
-            <a:lnRef idx="2">
-              <a:schemeClr val="accent1"/>
-            </a:lnRef>
-            <a:fillRef idx="0">
-              <a:schemeClr val="accent1"/>
-            </a:fillRef>
-            <a:effectRef idx="1">
+            <a:effectLst/>
+          </p:spPr>
+          <p:style>
+            <a:lnRef idx="2">
+              <a:schemeClr val="accent1"/>
+            </a:lnRef>
+            <a:fillRef idx="0">
+              <a:schemeClr val="accent1"/>
+            </a:fillRef>
+            <a:effectRef idx="0">
               <a:schemeClr val="accent1"/>
             </a:effectRef>
             <a:fontRef idx="minor">
@@ -7405,15 +7503,16 @@
                 <a:srgbClr val="8FBFBF"/>
               </a:solidFill>
             </a:ln>
-          </p:spPr>
-          <p:style>
-            <a:lnRef idx="2">
-              <a:schemeClr val="accent1"/>
-            </a:lnRef>
-            <a:fillRef idx="0">
-              <a:schemeClr val="accent1"/>
-            </a:fillRef>
-            <a:effectRef idx="1">
+            <a:effectLst/>
+          </p:spPr>
+          <p:style>
+            <a:lnRef idx="2">
+              <a:schemeClr val="accent1"/>
+            </a:lnRef>
+            <a:fillRef idx="0">
+              <a:schemeClr val="accent1"/>
+            </a:fillRef>
+            <a:effectRef idx="0">
               <a:schemeClr val="accent1"/>
             </a:effectRef>
             <a:fontRef idx="minor">
@@ -7440,15 +7539,16 @@
                 <a:srgbClr val="8FBFBF"/>
               </a:solidFill>
             </a:ln>
-          </p:spPr>
-          <p:style>
-            <a:lnRef idx="2">
-              <a:schemeClr val="accent1"/>
-            </a:lnRef>
-            <a:fillRef idx="0">
-              <a:schemeClr val="accent1"/>
-            </a:fillRef>
-            <a:effectRef idx="1">
+            <a:effectLst/>
+          </p:spPr>
+          <p:style>
+            <a:lnRef idx="2">
+              <a:schemeClr val="accent1"/>
+            </a:lnRef>
+            <a:fillRef idx="0">
+              <a:schemeClr val="accent1"/>
+            </a:fillRef>
+            <a:effectRef idx="0">
               <a:schemeClr val="accent1"/>
             </a:effectRef>
             <a:fontRef idx="minor">
@@ -7475,15 +7575,16 @@
                 <a:srgbClr val="8FBFBF"/>
               </a:solidFill>
             </a:ln>
-          </p:spPr>
-          <p:style>
-            <a:lnRef idx="2">
-              <a:schemeClr val="accent1"/>
-            </a:lnRef>
-            <a:fillRef idx="0">
-              <a:schemeClr val="accent1"/>
-            </a:fillRef>
-            <a:effectRef idx="1">
+            <a:effectLst/>
+          </p:spPr>
+          <p:style>
+            <a:lnRef idx="2">
+              <a:schemeClr val="accent1"/>
+            </a:lnRef>
+            <a:fillRef idx="0">
+              <a:schemeClr val="accent1"/>
+            </a:fillRef>
+            <a:effectRef idx="0">
               <a:schemeClr val="accent1"/>
             </a:effectRef>
             <a:fontRef idx="minor">
@@ -7510,15 +7611,16 @@
                 <a:srgbClr val="8FBFBF"/>
               </a:solidFill>
             </a:ln>
-          </p:spPr>
-          <p:style>
-            <a:lnRef idx="2">
-              <a:schemeClr val="accent1"/>
-            </a:lnRef>
-            <a:fillRef idx="0">
-              <a:schemeClr val="accent1"/>
-            </a:fillRef>
-            <a:effectRef idx="1">
+            <a:effectLst/>
+          </p:spPr>
+          <p:style>
+            <a:lnRef idx="2">
+              <a:schemeClr val="accent1"/>
+            </a:lnRef>
+            <a:fillRef idx="0">
+              <a:schemeClr val="accent1"/>
+            </a:fillRef>
+            <a:effectRef idx="0">
               <a:schemeClr val="accent1"/>
             </a:effectRef>
             <a:fontRef idx="minor">
@@ -7545,15 +7647,16 @@
                 <a:srgbClr val="8FBFBF"/>
               </a:solidFill>
             </a:ln>
-          </p:spPr>
-          <p:style>
-            <a:lnRef idx="2">
-              <a:schemeClr val="accent1"/>
-            </a:lnRef>
-            <a:fillRef idx="0">
-              <a:schemeClr val="accent1"/>
-            </a:fillRef>
-            <a:effectRef idx="1">
+            <a:effectLst/>
+          </p:spPr>
+          <p:style>
+            <a:lnRef idx="2">
+              <a:schemeClr val="accent1"/>
+            </a:lnRef>
+            <a:fillRef idx="0">
+              <a:schemeClr val="accent1"/>
+            </a:fillRef>
+            <a:effectRef idx="0">
               <a:schemeClr val="accent1"/>
             </a:effectRef>
             <a:fontRef idx="minor">
@@ -7605,7 +7708,7 @@
             <a:fillRef idx="3">
               <a:schemeClr val="accent1"/>
             </a:fillRef>
-            <a:effectRef idx="2">
+            <a:effectRef idx="0">
               <a:schemeClr val="accent1"/>
             </a:effectRef>
             <a:fontRef idx="minor">
@@ -7639,15 +7742,16 @@
                 <a:srgbClr val="8FBFBF"/>
               </a:solidFill>
             </a:ln>
-          </p:spPr>
-          <p:style>
-            <a:lnRef idx="2">
-              <a:schemeClr val="accent1"/>
-            </a:lnRef>
-            <a:fillRef idx="0">
-              <a:schemeClr val="accent1"/>
-            </a:fillRef>
-            <a:effectRef idx="1">
+            <a:effectLst/>
+          </p:spPr>
+          <p:style>
+            <a:lnRef idx="2">
+              <a:schemeClr val="accent1"/>
+            </a:lnRef>
+            <a:fillRef idx="0">
+              <a:schemeClr val="accent1"/>
+            </a:fillRef>
+            <a:effectRef idx="0">
               <a:schemeClr val="accent1"/>
             </a:effectRef>
             <a:fontRef idx="minor">
@@ -7674,15 +7778,16 @@
                 <a:srgbClr val="8FBFBF"/>
               </a:solidFill>
             </a:ln>
-          </p:spPr>
-          <p:style>
-            <a:lnRef idx="2">
-              <a:schemeClr val="accent1"/>
-            </a:lnRef>
-            <a:fillRef idx="0">
-              <a:schemeClr val="accent1"/>
-            </a:fillRef>
-            <a:effectRef idx="1">
+            <a:effectLst/>
+          </p:spPr>
+          <p:style>
+            <a:lnRef idx="2">
+              <a:schemeClr val="accent1"/>
+            </a:lnRef>
+            <a:fillRef idx="0">
+              <a:schemeClr val="accent1"/>
+            </a:fillRef>
+            <a:effectRef idx="0">
               <a:schemeClr val="accent1"/>
             </a:effectRef>
             <a:fontRef idx="minor">
@@ -7709,15 +7814,16 @@
                 <a:srgbClr val="8FBFBF"/>
               </a:solidFill>
             </a:ln>
-          </p:spPr>
-          <p:style>
-            <a:lnRef idx="2">
-              <a:schemeClr val="accent1"/>
-            </a:lnRef>
-            <a:fillRef idx="0">
-              <a:schemeClr val="accent1"/>
-            </a:fillRef>
-            <a:effectRef idx="1">
+            <a:effectLst/>
+          </p:spPr>
+          <p:style>
+            <a:lnRef idx="2">
+              <a:schemeClr val="accent1"/>
+            </a:lnRef>
+            <a:fillRef idx="0">
+              <a:schemeClr val="accent1"/>
+            </a:fillRef>
+            <a:effectRef idx="0">
               <a:schemeClr val="accent1"/>
             </a:effectRef>
             <a:fontRef idx="minor">
@@ -7744,15 +7850,16 @@
                 <a:srgbClr val="8FBFBF"/>
               </a:solidFill>
             </a:ln>
-          </p:spPr>
-          <p:style>
-            <a:lnRef idx="2">
-              <a:schemeClr val="accent1"/>
-            </a:lnRef>
-            <a:fillRef idx="0">
-              <a:schemeClr val="accent1"/>
-            </a:fillRef>
-            <a:effectRef idx="1">
+            <a:effectLst/>
+          </p:spPr>
+          <p:style>
+            <a:lnRef idx="2">
+              <a:schemeClr val="accent1"/>
+            </a:lnRef>
+            <a:fillRef idx="0">
+              <a:schemeClr val="accent1"/>
+            </a:fillRef>
+            <a:effectRef idx="0">
               <a:schemeClr val="accent1"/>
             </a:effectRef>
             <a:fontRef idx="minor">
@@ -7779,15 +7886,16 @@
                 <a:srgbClr val="8FBFBF"/>
               </a:solidFill>
             </a:ln>
-          </p:spPr>
-          <p:style>
-            <a:lnRef idx="2">
-              <a:schemeClr val="accent1"/>
-            </a:lnRef>
-            <a:fillRef idx="0">
-              <a:schemeClr val="accent1"/>
-            </a:fillRef>
-            <a:effectRef idx="1">
+            <a:effectLst/>
+          </p:spPr>
+          <p:style>
+            <a:lnRef idx="2">
+              <a:schemeClr val="accent1"/>
+            </a:lnRef>
+            <a:fillRef idx="0">
+              <a:schemeClr val="accent1"/>
+            </a:fillRef>
+            <a:effectRef idx="0">
               <a:schemeClr val="accent1"/>
             </a:effectRef>
             <a:fontRef idx="minor">
@@ -7814,15 +7922,16 @@
                 <a:srgbClr val="8FBFBF"/>
               </a:solidFill>
             </a:ln>
-          </p:spPr>
-          <p:style>
-            <a:lnRef idx="2">
-              <a:schemeClr val="accent1"/>
-            </a:lnRef>
-            <a:fillRef idx="0">
-              <a:schemeClr val="accent1"/>
-            </a:fillRef>
-            <a:effectRef idx="1">
+            <a:effectLst/>
+          </p:spPr>
+          <p:style>
+            <a:lnRef idx="2">
+              <a:schemeClr val="accent1"/>
+            </a:lnRef>
+            <a:fillRef idx="0">
+              <a:schemeClr val="accent1"/>
+            </a:fillRef>
+            <a:effectRef idx="0">
               <a:schemeClr val="accent1"/>
             </a:effectRef>
             <a:fontRef idx="minor">
@@ -7849,15 +7958,16 @@
                 <a:srgbClr val="8FBFBF"/>
               </a:solidFill>
             </a:ln>
-          </p:spPr>
-          <p:style>
-            <a:lnRef idx="2">
-              <a:schemeClr val="accent1"/>
-            </a:lnRef>
-            <a:fillRef idx="0">
-              <a:schemeClr val="accent1"/>
-            </a:fillRef>
-            <a:effectRef idx="1">
+            <a:effectLst/>
+          </p:spPr>
+          <p:style>
+            <a:lnRef idx="2">
+              <a:schemeClr val="accent1"/>
+            </a:lnRef>
+            <a:fillRef idx="0">
+              <a:schemeClr val="accent1"/>
+            </a:fillRef>
+            <a:effectRef idx="0">
               <a:schemeClr val="accent1"/>
             </a:effectRef>
             <a:fontRef idx="minor">
@@ -7884,15 +7994,16 @@
                 <a:srgbClr val="8FBFBF"/>
               </a:solidFill>
             </a:ln>
-          </p:spPr>
-          <p:style>
-            <a:lnRef idx="2">
-              <a:schemeClr val="accent1"/>
-            </a:lnRef>
-            <a:fillRef idx="0">
-              <a:schemeClr val="accent1"/>
-            </a:fillRef>
-            <a:effectRef idx="1">
+            <a:effectLst/>
+          </p:spPr>
+          <p:style>
+            <a:lnRef idx="2">
+              <a:schemeClr val="accent1"/>
+            </a:lnRef>
+            <a:fillRef idx="0">
+              <a:schemeClr val="accent1"/>
+            </a:fillRef>
+            <a:effectRef idx="0">
               <a:schemeClr val="accent1"/>
             </a:effectRef>
             <a:fontRef idx="minor">
@@ -7919,15 +8030,16 @@
                 <a:srgbClr val="8FBFBF"/>
               </a:solidFill>
             </a:ln>
-          </p:spPr>
-          <p:style>
-            <a:lnRef idx="2">
-              <a:schemeClr val="accent1"/>
-            </a:lnRef>
-            <a:fillRef idx="0">
-              <a:schemeClr val="accent1"/>
-            </a:fillRef>
-            <a:effectRef idx="1">
+            <a:effectLst/>
+          </p:spPr>
+          <p:style>
+            <a:lnRef idx="2">
+              <a:schemeClr val="accent1"/>
+            </a:lnRef>
+            <a:fillRef idx="0">
+              <a:schemeClr val="accent1"/>
+            </a:fillRef>
+            <a:effectRef idx="0">
               <a:schemeClr val="accent1"/>
             </a:effectRef>
             <a:fontRef idx="minor">
@@ -7954,15 +8066,16 @@
                 <a:srgbClr val="8FBFBF"/>
               </a:solidFill>
             </a:ln>
-          </p:spPr>
-          <p:style>
-            <a:lnRef idx="2">
-              <a:schemeClr val="accent1"/>
-            </a:lnRef>
-            <a:fillRef idx="0">
-              <a:schemeClr val="accent1"/>
-            </a:fillRef>
-            <a:effectRef idx="1">
+            <a:effectLst/>
+          </p:spPr>
+          <p:style>
+            <a:lnRef idx="2">
+              <a:schemeClr val="accent1"/>
+            </a:lnRef>
+            <a:fillRef idx="0">
+              <a:schemeClr val="accent1"/>
+            </a:fillRef>
+            <a:effectRef idx="0">
               <a:schemeClr val="accent1"/>
             </a:effectRef>
             <a:fontRef idx="minor">
@@ -7989,15 +8102,16 @@
                 <a:srgbClr val="8FBFBF"/>
               </a:solidFill>
             </a:ln>
-          </p:spPr>
-          <p:style>
-            <a:lnRef idx="2">
-              <a:schemeClr val="accent1"/>
-            </a:lnRef>
-            <a:fillRef idx="0">
-              <a:schemeClr val="accent1"/>
-            </a:fillRef>
-            <a:effectRef idx="1">
+            <a:effectLst/>
+          </p:spPr>
+          <p:style>
+            <a:lnRef idx="2">
+              <a:schemeClr val="accent1"/>
+            </a:lnRef>
+            <a:fillRef idx="0">
+              <a:schemeClr val="accent1"/>
+            </a:fillRef>
+            <a:effectRef idx="0">
               <a:schemeClr val="accent1"/>
             </a:effectRef>
             <a:fontRef idx="minor">
@@ -8024,15 +8138,16 @@
                 <a:srgbClr val="8FBFBF"/>
               </a:solidFill>
             </a:ln>
-          </p:spPr>
-          <p:style>
-            <a:lnRef idx="2">
-              <a:schemeClr val="accent1"/>
-            </a:lnRef>
-            <a:fillRef idx="0">
-              <a:schemeClr val="accent1"/>
-            </a:fillRef>
-            <a:effectRef idx="1">
+            <a:effectLst/>
+          </p:spPr>
+          <p:style>
+            <a:lnRef idx="2">
+              <a:schemeClr val="accent1"/>
+            </a:lnRef>
+            <a:fillRef idx="0">
+              <a:schemeClr val="accent1"/>
+            </a:fillRef>
+            <a:effectRef idx="0">
               <a:schemeClr val="accent1"/>
             </a:effectRef>
             <a:fontRef idx="minor">
@@ -8059,15 +8174,16 @@
                 <a:srgbClr val="8FBFBF"/>
               </a:solidFill>
             </a:ln>
-          </p:spPr>
-          <p:style>
-            <a:lnRef idx="2">
-              <a:schemeClr val="accent1"/>
-            </a:lnRef>
-            <a:fillRef idx="0">
-              <a:schemeClr val="accent1"/>
-            </a:fillRef>
-            <a:effectRef idx="1">
+            <a:effectLst/>
+          </p:spPr>
+          <p:style>
+            <a:lnRef idx="2">
+              <a:schemeClr val="accent1"/>
+            </a:lnRef>
+            <a:fillRef idx="0">
+              <a:schemeClr val="accent1"/>
+            </a:fillRef>
+            <a:effectRef idx="0">
               <a:schemeClr val="accent1"/>
             </a:effectRef>
             <a:fontRef idx="minor">
@@ -8094,15 +8210,16 @@
                 <a:srgbClr val="8FBFBF"/>
               </a:solidFill>
             </a:ln>
-          </p:spPr>
-          <p:style>
-            <a:lnRef idx="2">
-              <a:schemeClr val="accent1"/>
-            </a:lnRef>
-            <a:fillRef idx="0">
-              <a:schemeClr val="accent1"/>
-            </a:fillRef>
-            <a:effectRef idx="1">
+            <a:effectLst/>
+          </p:spPr>
+          <p:style>
+            <a:lnRef idx="2">
+              <a:schemeClr val="accent1"/>
+            </a:lnRef>
+            <a:fillRef idx="0">
+              <a:schemeClr val="accent1"/>
+            </a:fillRef>
+            <a:effectRef idx="0">
               <a:schemeClr val="accent1"/>
             </a:effectRef>
             <a:fontRef idx="minor">
@@ -8129,15 +8246,16 @@
                 <a:srgbClr val="8FBFBF"/>
               </a:solidFill>
             </a:ln>
-          </p:spPr>
-          <p:style>
-            <a:lnRef idx="2">
-              <a:schemeClr val="accent1"/>
-            </a:lnRef>
-            <a:fillRef idx="0">
-              <a:schemeClr val="accent1"/>
-            </a:fillRef>
-            <a:effectRef idx="1">
+            <a:effectLst/>
+          </p:spPr>
+          <p:style>
+            <a:lnRef idx="2">
+              <a:schemeClr val="accent1"/>
+            </a:lnRef>
+            <a:fillRef idx="0">
+              <a:schemeClr val="accent1"/>
+            </a:fillRef>
+            <a:effectRef idx="0">
               <a:schemeClr val="accent1"/>
             </a:effectRef>
             <a:fontRef idx="minor">
@@ -8164,15 +8282,16 @@
                 <a:srgbClr val="8FBFBF"/>
               </a:solidFill>
             </a:ln>
-          </p:spPr>
-          <p:style>
-            <a:lnRef idx="2">
-              <a:schemeClr val="accent1"/>
-            </a:lnRef>
-            <a:fillRef idx="0">
-              <a:schemeClr val="accent1"/>
-            </a:fillRef>
-            <a:effectRef idx="1">
+            <a:effectLst/>
+          </p:spPr>
+          <p:style>
+            <a:lnRef idx="2">
+              <a:schemeClr val="accent1"/>
+            </a:lnRef>
+            <a:fillRef idx="0">
+              <a:schemeClr val="accent1"/>
+            </a:fillRef>
+            <a:effectRef idx="0">
               <a:schemeClr val="accent1"/>
             </a:effectRef>
             <a:fontRef idx="minor">
@@ -8199,15 +8318,16 @@
                 <a:srgbClr val="8FBFBF"/>
               </a:solidFill>
             </a:ln>
-          </p:spPr>
-          <p:style>
-            <a:lnRef idx="2">
-              <a:schemeClr val="accent1"/>
-            </a:lnRef>
-            <a:fillRef idx="0">
-              <a:schemeClr val="accent1"/>
-            </a:fillRef>
-            <a:effectRef idx="1">
+            <a:effectLst/>
+          </p:spPr>
+          <p:style>
+            <a:lnRef idx="2">
+              <a:schemeClr val="accent1"/>
+            </a:lnRef>
+            <a:fillRef idx="0">
+              <a:schemeClr val="accent1"/>
+            </a:fillRef>
+            <a:effectRef idx="0">
               <a:schemeClr val="accent1"/>
             </a:effectRef>
             <a:fontRef idx="minor">
@@ -8259,7 +8379,7 @@
             <a:fillRef idx="3">
               <a:schemeClr val="accent1"/>
             </a:fillRef>
-            <a:effectRef idx="2">
+            <a:effectRef idx="0">
               <a:schemeClr val="accent1"/>
             </a:effectRef>
             <a:fontRef idx="minor">
@@ -8293,15 +8413,16 @@
                 <a:srgbClr val="8FBFBF"/>
               </a:solidFill>
             </a:ln>
-          </p:spPr>
-          <p:style>
-            <a:lnRef idx="2">
-              <a:schemeClr val="accent1"/>
-            </a:lnRef>
-            <a:fillRef idx="0">
-              <a:schemeClr val="accent1"/>
-            </a:fillRef>
-            <a:effectRef idx="1">
+            <a:effectLst/>
+          </p:spPr>
+          <p:style>
+            <a:lnRef idx="2">
+              <a:schemeClr val="accent1"/>
+            </a:lnRef>
+            <a:fillRef idx="0">
+              <a:schemeClr val="accent1"/>
+            </a:fillRef>
+            <a:effectRef idx="0">
               <a:schemeClr val="accent1"/>
             </a:effectRef>
             <a:fontRef idx="minor">
@@ -8328,15 +8449,16 @@
                 <a:srgbClr val="8FBFBF"/>
               </a:solidFill>
             </a:ln>
-          </p:spPr>
-          <p:style>
-            <a:lnRef idx="2">
-              <a:schemeClr val="accent1"/>
-            </a:lnRef>
-            <a:fillRef idx="0">
-              <a:schemeClr val="accent1"/>
-            </a:fillRef>
-            <a:effectRef idx="1">
+            <a:effectLst/>
+          </p:spPr>
+          <p:style>
+            <a:lnRef idx="2">
+              <a:schemeClr val="accent1"/>
+            </a:lnRef>
+            <a:fillRef idx="0">
+              <a:schemeClr val="accent1"/>
+            </a:fillRef>
+            <a:effectRef idx="0">
               <a:schemeClr val="accent1"/>
             </a:effectRef>
             <a:fontRef idx="minor">
@@ -8363,15 +8485,16 @@
                 <a:srgbClr val="8FBFBF"/>
               </a:solidFill>
             </a:ln>
-          </p:spPr>
-          <p:style>
-            <a:lnRef idx="2">
-              <a:schemeClr val="accent1"/>
-            </a:lnRef>
-            <a:fillRef idx="0">
-              <a:schemeClr val="accent1"/>
-            </a:fillRef>
-            <a:effectRef idx="1">
+            <a:effectLst/>
+          </p:spPr>
+          <p:style>
+            <a:lnRef idx="2">
+              <a:schemeClr val="accent1"/>
+            </a:lnRef>
+            <a:fillRef idx="0">
+              <a:schemeClr val="accent1"/>
+            </a:fillRef>
+            <a:effectRef idx="0">
               <a:schemeClr val="accent1"/>
             </a:effectRef>
             <a:fontRef idx="minor">
@@ -8398,15 +8521,16 @@
                 <a:srgbClr val="8FBFBF"/>
               </a:solidFill>
             </a:ln>
-          </p:spPr>
-          <p:style>
-            <a:lnRef idx="2">
-              <a:schemeClr val="accent1"/>
-            </a:lnRef>
-            <a:fillRef idx="0">
-              <a:schemeClr val="accent1"/>
-            </a:fillRef>
-            <a:effectRef idx="1">
+            <a:effectLst/>
+          </p:spPr>
+          <p:style>
+            <a:lnRef idx="2">
+              <a:schemeClr val="accent1"/>
+            </a:lnRef>
+            <a:fillRef idx="0">
+              <a:schemeClr val="accent1"/>
+            </a:fillRef>
+            <a:effectRef idx="0">
               <a:schemeClr val="accent1"/>
             </a:effectRef>
             <a:fontRef idx="minor">
@@ -8433,15 +8557,16 @@
                 <a:srgbClr val="8FBFBF"/>
               </a:solidFill>
             </a:ln>
-          </p:spPr>
-          <p:style>
-            <a:lnRef idx="2">
-              <a:schemeClr val="accent1"/>
-            </a:lnRef>
-            <a:fillRef idx="0">
-              <a:schemeClr val="accent1"/>
-            </a:fillRef>
-            <a:effectRef idx="1">
+            <a:effectLst/>
+          </p:spPr>
+          <p:style>
+            <a:lnRef idx="2">
+              <a:schemeClr val="accent1"/>
+            </a:lnRef>
+            <a:fillRef idx="0">
+              <a:schemeClr val="accent1"/>
+            </a:fillRef>
+            <a:effectRef idx="0">
               <a:schemeClr val="accent1"/>
             </a:effectRef>
             <a:fontRef idx="minor">
@@ -8468,15 +8593,16 @@
                 <a:srgbClr val="8FBFBF"/>
               </a:solidFill>
             </a:ln>
-          </p:spPr>
-          <p:style>
-            <a:lnRef idx="2">
-              <a:schemeClr val="accent1"/>
-            </a:lnRef>
-            <a:fillRef idx="0">
-              <a:schemeClr val="accent1"/>
-            </a:fillRef>
-            <a:effectRef idx="1">
+            <a:effectLst/>
+          </p:spPr>
+          <p:style>
+            <a:lnRef idx="2">
+              <a:schemeClr val="accent1"/>
+            </a:lnRef>
+            <a:fillRef idx="0">
+              <a:schemeClr val="accent1"/>
+            </a:fillRef>
+            <a:effectRef idx="0">
               <a:schemeClr val="accent1"/>
             </a:effectRef>
             <a:fontRef idx="minor">
@@ -8503,15 +8629,16 @@
                 <a:srgbClr val="8FBFBF"/>
               </a:solidFill>
             </a:ln>
-          </p:spPr>
-          <p:style>
-            <a:lnRef idx="2">
-              <a:schemeClr val="accent1"/>
-            </a:lnRef>
-            <a:fillRef idx="0">
-              <a:schemeClr val="accent1"/>
-            </a:fillRef>
-            <a:effectRef idx="1">
+            <a:effectLst/>
+          </p:spPr>
+          <p:style>
+            <a:lnRef idx="2">
+              <a:schemeClr val="accent1"/>
+            </a:lnRef>
+            <a:fillRef idx="0">
+              <a:schemeClr val="accent1"/>
+            </a:fillRef>
+            <a:effectRef idx="0">
               <a:schemeClr val="accent1"/>
             </a:effectRef>
             <a:fontRef idx="minor">
@@ -8538,15 +8665,16 @@
                 <a:srgbClr val="8FBFBF"/>
               </a:solidFill>
             </a:ln>
-          </p:spPr>
-          <p:style>
-            <a:lnRef idx="2">
-              <a:schemeClr val="accent1"/>
-            </a:lnRef>
-            <a:fillRef idx="0">
-              <a:schemeClr val="accent1"/>
-            </a:fillRef>
-            <a:effectRef idx="1">
+            <a:effectLst/>
+          </p:spPr>
+          <p:style>
+            <a:lnRef idx="2">
+              <a:schemeClr val="accent1"/>
+            </a:lnRef>
+            <a:fillRef idx="0">
+              <a:schemeClr val="accent1"/>
+            </a:fillRef>
+            <a:effectRef idx="0">
               <a:schemeClr val="accent1"/>
             </a:effectRef>
             <a:fontRef idx="minor">
@@ -8573,15 +8701,16 @@
                 <a:srgbClr val="8FBFBF"/>
               </a:solidFill>
             </a:ln>
-          </p:spPr>
-          <p:style>
-            <a:lnRef idx="2">
-              <a:schemeClr val="accent1"/>
-            </a:lnRef>
-            <a:fillRef idx="0">
-              <a:schemeClr val="accent1"/>
-            </a:fillRef>
-            <a:effectRef idx="1">
+            <a:effectLst/>
+          </p:spPr>
+          <p:style>
+            <a:lnRef idx="2">
+              <a:schemeClr val="accent1"/>
+            </a:lnRef>
+            <a:fillRef idx="0">
+              <a:schemeClr val="accent1"/>
+            </a:fillRef>
+            <a:effectRef idx="0">
               <a:schemeClr val="accent1"/>
             </a:effectRef>
             <a:fontRef idx="minor">
@@ -8608,15 +8737,16 @@
                 <a:srgbClr val="8FBFBF"/>
               </a:solidFill>
             </a:ln>
-          </p:spPr>
-          <p:style>
-            <a:lnRef idx="2">
-              <a:schemeClr val="accent1"/>
-            </a:lnRef>
-            <a:fillRef idx="0">
-              <a:schemeClr val="accent1"/>
-            </a:fillRef>
-            <a:effectRef idx="1">
+            <a:effectLst/>
+          </p:spPr>
+          <p:style>
+            <a:lnRef idx="2">
+              <a:schemeClr val="accent1"/>
+            </a:lnRef>
+            <a:fillRef idx="0">
+              <a:schemeClr val="accent1"/>
+            </a:fillRef>
+            <a:effectRef idx="0">
               <a:schemeClr val="accent1"/>
             </a:effectRef>
             <a:fontRef idx="minor">
@@ -8643,15 +8773,16 @@
                 <a:srgbClr val="8FBFBF"/>
               </a:solidFill>
             </a:ln>
-          </p:spPr>
-          <p:style>
-            <a:lnRef idx="2">
-              <a:schemeClr val="accent1"/>
-            </a:lnRef>
-            <a:fillRef idx="0">
-              <a:schemeClr val="accent1"/>
-            </a:fillRef>
-            <a:effectRef idx="1">
+            <a:effectLst/>
+          </p:spPr>
+          <p:style>
+            <a:lnRef idx="2">
+              <a:schemeClr val="accent1"/>
+            </a:lnRef>
+            <a:fillRef idx="0">
+              <a:schemeClr val="accent1"/>
+            </a:fillRef>
+            <a:effectRef idx="0">
               <a:schemeClr val="accent1"/>
             </a:effectRef>
             <a:fontRef idx="minor">
@@ -8678,15 +8809,16 @@
                 <a:srgbClr val="8FBFBF"/>
               </a:solidFill>
             </a:ln>
-          </p:spPr>
-          <p:style>
-            <a:lnRef idx="2">
-              <a:schemeClr val="accent1"/>
-            </a:lnRef>
-            <a:fillRef idx="0">
-              <a:schemeClr val="accent1"/>
-            </a:fillRef>
-            <a:effectRef idx="1">
+            <a:effectLst/>
+          </p:spPr>
+          <p:style>
+            <a:lnRef idx="2">
+              <a:schemeClr val="accent1"/>
+            </a:lnRef>
+            <a:fillRef idx="0">
+              <a:schemeClr val="accent1"/>
+            </a:fillRef>
+            <a:effectRef idx="0">
               <a:schemeClr val="accent1"/>
             </a:effectRef>
             <a:fontRef idx="minor">
@@ -8713,15 +8845,16 @@
                 <a:srgbClr val="8FBFBF"/>
               </a:solidFill>
             </a:ln>
-          </p:spPr>
-          <p:style>
-            <a:lnRef idx="2">
-              <a:schemeClr val="accent1"/>
-            </a:lnRef>
-            <a:fillRef idx="0">
-              <a:schemeClr val="accent1"/>
-            </a:fillRef>
-            <a:effectRef idx="1">
+            <a:effectLst/>
+          </p:spPr>
+          <p:style>
+            <a:lnRef idx="2">
+              <a:schemeClr val="accent1"/>
+            </a:lnRef>
+            <a:fillRef idx="0">
+              <a:schemeClr val="accent1"/>
+            </a:fillRef>
+            <a:effectRef idx="0">
               <a:schemeClr val="accent1"/>
             </a:effectRef>
             <a:fontRef idx="minor">
@@ -8748,15 +8881,16 @@
                 <a:srgbClr val="8FBFBF"/>
               </a:solidFill>
             </a:ln>
-          </p:spPr>
-          <p:style>
-            <a:lnRef idx="2">
-              <a:schemeClr val="accent1"/>
-            </a:lnRef>
-            <a:fillRef idx="0">
-              <a:schemeClr val="accent1"/>
-            </a:fillRef>
-            <a:effectRef idx="1">
+            <a:effectLst/>
+          </p:spPr>
+          <p:style>
+            <a:lnRef idx="2">
+              <a:schemeClr val="accent1"/>
+            </a:lnRef>
+            <a:fillRef idx="0">
+              <a:schemeClr val="accent1"/>
+            </a:fillRef>
+            <a:effectRef idx="0">
               <a:schemeClr val="accent1"/>
             </a:effectRef>
             <a:fontRef idx="minor">
@@ -8783,15 +8917,16 @@
                 <a:srgbClr val="8FBFBF"/>
               </a:solidFill>
             </a:ln>
-          </p:spPr>
-          <p:style>
-            <a:lnRef idx="2">
-              <a:schemeClr val="accent1"/>
-            </a:lnRef>
-            <a:fillRef idx="0">
-              <a:schemeClr val="accent1"/>
-            </a:fillRef>
-            <a:effectRef idx="1">
+            <a:effectLst/>
+          </p:spPr>
+          <p:style>
+            <a:lnRef idx="2">
+              <a:schemeClr val="accent1"/>
+            </a:lnRef>
+            <a:fillRef idx="0">
+              <a:schemeClr val="accent1"/>
+            </a:fillRef>
+            <a:effectRef idx="0">
               <a:schemeClr val="accent1"/>
             </a:effectRef>
             <a:fontRef idx="minor">
@@ -8818,15 +8953,16 @@
                 <a:srgbClr val="8FBFBF"/>
               </a:solidFill>
             </a:ln>
-          </p:spPr>
-          <p:style>
-            <a:lnRef idx="2">
-              <a:schemeClr val="accent1"/>
-            </a:lnRef>
-            <a:fillRef idx="0">
-              <a:schemeClr val="accent1"/>
-            </a:fillRef>
-            <a:effectRef idx="1">
+            <a:effectLst/>
+          </p:spPr>
+          <p:style>
+            <a:lnRef idx="2">
+              <a:schemeClr val="accent1"/>
+            </a:lnRef>
+            <a:fillRef idx="0">
+              <a:schemeClr val="accent1"/>
+            </a:fillRef>
+            <a:effectRef idx="0">
               <a:schemeClr val="accent1"/>
             </a:effectRef>
             <a:fontRef idx="minor">
@@ -8853,15 +8989,16 @@
                 <a:srgbClr val="8FBFBF"/>
               </a:solidFill>
             </a:ln>
-          </p:spPr>
-          <p:style>
-            <a:lnRef idx="2">
-              <a:schemeClr val="accent1"/>
-            </a:lnRef>
-            <a:fillRef idx="0">
-              <a:schemeClr val="accent1"/>
-            </a:fillRef>
-            <a:effectRef idx="1">
+            <a:effectLst/>
+          </p:spPr>
+          <p:style>
+            <a:lnRef idx="2">
+              <a:schemeClr val="accent1"/>
+            </a:lnRef>
+            <a:fillRef idx="0">
+              <a:schemeClr val="accent1"/>
+            </a:fillRef>
+            <a:effectRef idx="0">
               <a:schemeClr val="accent1"/>
             </a:effectRef>
             <a:fontRef idx="minor">
@@ -8913,7 +9050,7 @@
             <a:fillRef idx="3">
               <a:schemeClr val="accent1"/>
             </a:fillRef>
-            <a:effectRef idx="2">
+            <a:effectRef idx="0">
               <a:schemeClr val="accent1"/>
             </a:effectRef>
             <a:fontRef idx="minor">
@@ -8947,15 +9084,16 @@
                 <a:srgbClr val="8FBFBF"/>
               </a:solidFill>
             </a:ln>
-          </p:spPr>
-          <p:style>
-            <a:lnRef idx="2">
-              <a:schemeClr val="accent1"/>
-            </a:lnRef>
-            <a:fillRef idx="0">
-              <a:schemeClr val="accent1"/>
-            </a:fillRef>
-            <a:effectRef idx="1">
+            <a:effectLst/>
+          </p:spPr>
+          <p:style>
+            <a:lnRef idx="2">
+              <a:schemeClr val="accent1"/>
+            </a:lnRef>
+            <a:fillRef idx="0">
+              <a:schemeClr val="accent1"/>
+            </a:fillRef>
+            <a:effectRef idx="0">
               <a:schemeClr val="accent1"/>
             </a:effectRef>
             <a:fontRef idx="minor">
@@ -8982,15 +9120,16 @@
                 <a:srgbClr val="8FBFBF"/>
               </a:solidFill>
             </a:ln>
-          </p:spPr>
-          <p:style>
-            <a:lnRef idx="2">
-              <a:schemeClr val="accent1"/>
-            </a:lnRef>
-            <a:fillRef idx="0">
-              <a:schemeClr val="accent1"/>
-            </a:fillRef>
-            <a:effectRef idx="1">
+            <a:effectLst/>
+          </p:spPr>
+          <p:style>
+            <a:lnRef idx="2">
+              <a:schemeClr val="accent1"/>
+            </a:lnRef>
+            <a:fillRef idx="0">
+              <a:schemeClr val="accent1"/>
+            </a:fillRef>
+            <a:effectRef idx="0">
               <a:schemeClr val="accent1"/>
             </a:effectRef>
             <a:fontRef idx="minor">
@@ -9017,15 +9156,16 @@
                 <a:srgbClr val="8FBFBF"/>
               </a:solidFill>
             </a:ln>
-          </p:spPr>
-          <p:style>
-            <a:lnRef idx="2">
-              <a:schemeClr val="accent1"/>
-            </a:lnRef>
-            <a:fillRef idx="0">
-              <a:schemeClr val="accent1"/>
-            </a:fillRef>
-            <a:effectRef idx="1">
+            <a:effectLst/>
+          </p:spPr>
+          <p:style>
+            <a:lnRef idx="2">
+              <a:schemeClr val="accent1"/>
+            </a:lnRef>
+            <a:fillRef idx="0">
+              <a:schemeClr val="accent1"/>
+            </a:fillRef>
+            <a:effectRef idx="0">
               <a:schemeClr val="accent1"/>
             </a:effectRef>
             <a:fontRef idx="minor">
@@ -9052,15 +9192,16 @@
                 <a:srgbClr val="8FBFBF"/>
               </a:solidFill>
             </a:ln>
-          </p:spPr>
-          <p:style>
-            <a:lnRef idx="2">
-              <a:schemeClr val="accent1"/>
-            </a:lnRef>
-            <a:fillRef idx="0">
-              <a:schemeClr val="accent1"/>
-            </a:fillRef>
-            <a:effectRef idx="1">
+            <a:effectLst/>
+          </p:spPr>
+          <p:style>
+            <a:lnRef idx="2">
+              <a:schemeClr val="accent1"/>
+            </a:lnRef>
+            <a:fillRef idx="0">
+              <a:schemeClr val="accent1"/>
+            </a:fillRef>
+            <a:effectRef idx="0">
               <a:schemeClr val="accent1"/>
             </a:effectRef>
             <a:fontRef idx="minor">
@@ -9087,15 +9228,16 @@
                 <a:srgbClr val="8FBFBF"/>
               </a:solidFill>
             </a:ln>
-          </p:spPr>
-          <p:style>
-            <a:lnRef idx="2">
-              <a:schemeClr val="accent1"/>
-            </a:lnRef>
-            <a:fillRef idx="0">
-              <a:schemeClr val="accent1"/>
-            </a:fillRef>
-            <a:effectRef idx="1">
+            <a:effectLst/>
+          </p:spPr>
+          <p:style>
+            <a:lnRef idx="2">
+              <a:schemeClr val="accent1"/>
+            </a:lnRef>
+            <a:fillRef idx="0">
+              <a:schemeClr val="accent1"/>
+            </a:fillRef>
+            <a:effectRef idx="0">
               <a:schemeClr val="accent1"/>
             </a:effectRef>
             <a:fontRef idx="minor">
@@ -9122,15 +9264,16 @@
                 <a:srgbClr val="8FBFBF"/>
               </a:solidFill>
             </a:ln>
-          </p:spPr>
-          <p:style>
-            <a:lnRef idx="2">
-              <a:schemeClr val="accent1"/>
-            </a:lnRef>
-            <a:fillRef idx="0">
-              <a:schemeClr val="accent1"/>
-            </a:fillRef>
-            <a:effectRef idx="1">
+            <a:effectLst/>
+          </p:spPr>
+          <p:style>
+            <a:lnRef idx="2">
+              <a:schemeClr val="accent1"/>
+            </a:lnRef>
+            <a:fillRef idx="0">
+              <a:schemeClr val="accent1"/>
+            </a:fillRef>
+            <a:effectRef idx="0">
               <a:schemeClr val="accent1"/>
             </a:effectRef>
             <a:fontRef idx="minor">
@@ -9157,15 +9300,16 @@
                 <a:srgbClr val="8FBFBF"/>
               </a:solidFill>
             </a:ln>
-          </p:spPr>
-          <p:style>
-            <a:lnRef idx="2">
-              <a:schemeClr val="accent1"/>
-            </a:lnRef>
-            <a:fillRef idx="0">
-              <a:schemeClr val="accent1"/>
-            </a:fillRef>
-            <a:effectRef idx="1">
+            <a:effectLst/>
+          </p:spPr>
+          <p:style>
+            <a:lnRef idx="2">
+              <a:schemeClr val="accent1"/>
+            </a:lnRef>
+            <a:fillRef idx="0">
+              <a:schemeClr val="accent1"/>
+            </a:fillRef>
+            <a:effectRef idx="0">
               <a:schemeClr val="accent1"/>
             </a:effectRef>
             <a:fontRef idx="minor">
@@ -9192,15 +9336,16 @@
                 <a:srgbClr val="8FBFBF"/>
               </a:solidFill>
             </a:ln>
-          </p:spPr>
-          <p:style>
-            <a:lnRef idx="2">
-              <a:schemeClr val="accent1"/>
-            </a:lnRef>
-            <a:fillRef idx="0">
-              <a:schemeClr val="accent1"/>
-            </a:fillRef>
-            <a:effectRef idx="1">
+            <a:effectLst/>
+          </p:spPr>
+          <p:style>
+            <a:lnRef idx="2">
+              <a:schemeClr val="accent1"/>
+            </a:lnRef>
+            <a:fillRef idx="0">
+              <a:schemeClr val="accent1"/>
+            </a:fillRef>
+            <a:effectRef idx="0">
               <a:schemeClr val="accent1"/>
             </a:effectRef>
             <a:fontRef idx="minor">
@@ -9227,15 +9372,16 @@
                 <a:srgbClr val="8FBFBF"/>
               </a:solidFill>
             </a:ln>
-          </p:spPr>
-          <p:style>
-            <a:lnRef idx="2">
-              <a:schemeClr val="accent1"/>
-            </a:lnRef>
-            <a:fillRef idx="0">
-              <a:schemeClr val="accent1"/>
-            </a:fillRef>
-            <a:effectRef idx="1">
+            <a:effectLst/>
+          </p:spPr>
+          <p:style>
+            <a:lnRef idx="2">
+              <a:schemeClr val="accent1"/>
+            </a:lnRef>
+            <a:fillRef idx="0">
+              <a:schemeClr val="accent1"/>
+            </a:fillRef>
+            <a:effectRef idx="0">
               <a:schemeClr val="accent1"/>
             </a:effectRef>
             <a:fontRef idx="minor">
@@ -9262,15 +9408,16 @@
                 <a:srgbClr val="8FBFBF"/>
               </a:solidFill>
             </a:ln>
-          </p:spPr>
-          <p:style>
-            <a:lnRef idx="2">
-              <a:schemeClr val="accent1"/>
-            </a:lnRef>
-            <a:fillRef idx="0">
-              <a:schemeClr val="accent1"/>
-            </a:fillRef>
-            <a:effectRef idx="1">
+            <a:effectLst/>
+          </p:spPr>
+          <p:style>
+            <a:lnRef idx="2">
+              <a:schemeClr val="accent1"/>
+            </a:lnRef>
+            <a:fillRef idx="0">
+              <a:schemeClr val="accent1"/>
+            </a:fillRef>
+            <a:effectRef idx="0">
               <a:schemeClr val="accent1"/>
             </a:effectRef>
             <a:fontRef idx="minor">
@@ -9297,15 +9444,16 @@
                 <a:srgbClr val="8FBFBF"/>
               </a:solidFill>
             </a:ln>
-          </p:spPr>
-          <p:style>
-            <a:lnRef idx="2">
-              <a:schemeClr val="accent1"/>
-            </a:lnRef>
-            <a:fillRef idx="0">
-              <a:schemeClr val="accent1"/>
-            </a:fillRef>
-            <a:effectRef idx="1">
+            <a:effectLst/>
+          </p:spPr>
+          <p:style>
+            <a:lnRef idx="2">
+              <a:schemeClr val="accent1"/>
+            </a:lnRef>
+            <a:fillRef idx="0">
+              <a:schemeClr val="accent1"/>
+            </a:fillRef>
+            <a:effectRef idx="0">
               <a:schemeClr val="accent1"/>
             </a:effectRef>
             <a:fontRef idx="minor">
@@ -9332,15 +9480,16 @@
                 <a:srgbClr val="8FBFBF"/>
               </a:solidFill>
             </a:ln>
-          </p:spPr>
-          <p:style>
-            <a:lnRef idx="2">
-              <a:schemeClr val="accent1"/>
-            </a:lnRef>
-            <a:fillRef idx="0">
-              <a:schemeClr val="accent1"/>
-            </a:fillRef>
-            <a:effectRef idx="1">
+            <a:effectLst/>
+          </p:spPr>
+          <p:style>
+            <a:lnRef idx="2">
+              <a:schemeClr val="accent1"/>
+            </a:lnRef>
+            <a:fillRef idx="0">
+              <a:schemeClr val="accent1"/>
+            </a:fillRef>
+            <a:effectRef idx="0">
               <a:schemeClr val="accent1"/>
             </a:effectRef>
             <a:fontRef idx="minor">
@@ -9367,15 +9516,16 @@
                 <a:srgbClr val="8FBFBF"/>
               </a:solidFill>
             </a:ln>
-          </p:spPr>
-          <p:style>
-            <a:lnRef idx="2">
-              <a:schemeClr val="accent1"/>
-            </a:lnRef>
-            <a:fillRef idx="0">
-              <a:schemeClr val="accent1"/>
-            </a:fillRef>
-            <a:effectRef idx="1">
+            <a:effectLst/>
+          </p:spPr>
+          <p:style>
+            <a:lnRef idx="2">
+              <a:schemeClr val="accent1"/>
+            </a:lnRef>
+            <a:fillRef idx="0">
+              <a:schemeClr val="accent1"/>
+            </a:fillRef>
+            <a:effectRef idx="0">
               <a:schemeClr val="accent1"/>
             </a:effectRef>
             <a:fontRef idx="minor">
@@ -9402,15 +9552,16 @@
                 <a:srgbClr val="8FBFBF"/>
               </a:solidFill>
             </a:ln>
-          </p:spPr>
-          <p:style>
-            <a:lnRef idx="2">
-              <a:schemeClr val="accent1"/>
-            </a:lnRef>
-            <a:fillRef idx="0">
-              <a:schemeClr val="accent1"/>
-            </a:fillRef>
-            <a:effectRef idx="1">
+            <a:effectLst/>
+          </p:spPr>
+          <p:style>
+            <a:lnRef idx="2">
+              <a:schemeClr val="accent1"/>
+            </a:lnRef>
+            <a:fillRef idx="0">
+              <a:schemeClr val="accent1"/>
+            </a:fillRef>
+            <a:effectRef idx="0">
               <a:schemeClr val="accent1"/>
             </a:effectRef>
             <a:fontRef idx="minor">
@@ -9437,15 +9588,16 @@
                 <a:srgbClr val="8FBFBF"/>
               </a:solidFill>
             </a:ln>
-          </p:spPr>
-          <p:style>
-            <a:lnRef idx="2">
-              <a:schemeClr val="accent1"/>
-            </a:lnRef>
-            <a:fillRef idx="0">
-              <a:schemeClr val="accent1"/>
-            </a:fillRef>
-            <a:effectRef idx="1">
+            <a:effectLst/>
+          </p:spPr>
+          <p:style>
+            <a:lnRef idx="2">
+              <a:schemeClr val="accent1"/>
+            </a:lnRef>
+            <a:fillRef idx="0">
+              <a:schemeClr val="accent1"/>
+            </a:fillRef>
+            <a:effectRef idx="0">
               <a:schemeClr val="accent1"/>
             </a:effectRef>
             <a:fontRef idx="minor">
@@ -9472,15 +9624,16 @@
                 <a:srgbClr val="8FBFBF"/>
               </a:solidFill>
             </a:ln>
-          </p:spPr>
-          <p:style>
-            <a:lnRef idx="2">
-              <a:schemeClr val="accent1"/>
-            </a:lnRef>
-            <a:fillRef idx="0">
-              <a:schemeClr val="accent1"/>
-            </a:fillRef>
-            <a:effectRef idx="1">
+            <a:effectLst/>
+          </p:spPr>
+          <p:style>
+            <a:lnRef idx="2">
+              <a:schemeClr val="accent1"/>
+            </a:lnRef>
+            <a:fillRef idx="0">
+              <a:schemeClr val="accent1"/>
+            </a:fillRef>
+            <a:effectRef idx="0">
               <a:schemeClr val="accent1"/>
             </a:effectRef>
             <a:fontRef idx="minor">
@@ -9507,15 +9660,16 @@
                 <a:srgbClr val="8FBFBF"/>
               </a:solidFill>
             </a:ln>
-          </p:spPr>
-          <p:style>
-            <a:lnRef idx="2">
-              <a:schemeClr val="accent1"/>
-            </a:lnRef>
-            <a:fillRef idx="0">
-              <a:schemeClr val="accent1"/>
-            </a:fillRef>
-            <a:effectRef idx="1">
+            <a:effectLst/>
+          </p:spPr>
+          <p:style>
+            <a:lnRef idx="2">
+              <a:schemeClr val="accent1"/>
+            </a:lnRef>
+            <a:fillRef idx="0">
+              <a:schemeClr val="accent1"/>
+            </a:fillRef>
+            <a:effectRef idx="0">
               <a:schemeClr val="accent1"/>
             </a:effectRef>
             <a:fontRef idx="minor">
@@ -9567,7 +9721,7 @@
             <a:fillRef idx="3">
               <a:schemeClr val="accent1"/>
             </a:fillRef>
-            <a:effectRef idx="2">
+            <a:effectRef idx="0">
               <a:schemeClr val="accent1"/>
             </a:effectRef>
             <a:fontRef idx="minor">
@@ -9601,15 +9755,16 @@
                 <a:srgbClr val="8FBFBF"/>
               </a:solidFill>
             </a:ln>
-          </p:spPr>
-          <p:style>
-            <a:lnRef idx="2">
-              <a:schemeClr val="accent1"/>
-            </a:lnRef>
-            <a:fillRef idx="0">
-              <a:schemeClr val="accent1"/>
-            </a:fillRef>
-            <a:effectRef idx="1">
+            <a:effectLst/>
+          </p:spPr>
+          <p:style>
+            <a:lnRef idx="2">
+              <a:schemeClr val="accent1"/>
+            </a:lnRef>
+            <a:fillRef idx="0">
+              <a:schemeClr val="accent1"/>
+            </a:fillRef>
+            <a:effectRef idx="0">
               <a:schemeClr val="accent1"/>
             </a:effectRef>
             <a:fontRef idx="minor">
@@ -9636,15 +9791,16 @@
                 <a:srgbClr val="8FBFBF"/>
               </a:solidFill>
             </a:ln>
-          </p:spPr>
-          <p:style>
-            <a:lnRef idx="2">
-              <a:schemeClr val="accent1"/>
-            </a:lnRef>
-            <a:fillRef idx="0">
-              <a:schemeClr val="accent1"/>
-            </a:fillRef>
-            <a:effectRef idx="1">
+            <a:effectLst/>
+          </p:spPr>
+          <p:style>
+            <a:lnRef idx="2">
+              <a:schemeClr val="accent1"/>
+            </a:lnRef>
+            <a:fillRef idx="0">
+              <a:schemeClr val="accent1"/>
+            </a:fillRef>
+            <a:effectRef idx="0">
               <a:schemeClr val="accent1"/>
             </a:effectRef>
             <a:fontRef idx="minor">
@@ -9671,15 +9827,16 @@
                 <a:srgbClr val="8FBFBF"/>
               </a:solidFill>
             </a:ln>
-          </p:spPr>
-          <p:style>
-            <a:lnRef idx="2">
-              <a:schemeClr val="accent1"/>
-            </a:lnRef>
-            <a:fillRef idx="0">
-              <a:schemeClr val="accent1"/>
-            </a:fillRef>
-            <a:effectRef idx="1">
+            <a:effectLst/>
+          </p:spPr>
+          <p:style>
+            <a:lnRef idx="2">
+              <a:schemeClr val="accent1"/>
+            </a:lnRef>
+            <a:fillRef idx="0">
+              <a:schemeClr val="accent1"/>
+            </a:fillRef>
+            <a:effectRef idx="0">
               <a:schemeClr val="accent1"/>
             </a:effectRef>
             <a:fontRef idx="minor">
@@ -9706,15 +9863,16 @@
                 <a:srgbClr val="8FBFBF"/>
               </a:solidFill>
             </a:ln>
-          </p:spPr>
-          <p:style>
-            <a:lnRef idx="2">
-              <a:schemeClr val="accent1"/>
-            </a:lnRef>
-            <a:fillRef idx="0">
-              <a:schemeClr val="accent1"/>
-            </a:fillRef>
-            <a:effectRef idx="1">
+            <a:effectLst/>
+          </p:spPr>
+          <p:style>
+            <a:lnRef idx="2">
+              <a:schemeClr val="accent1"/>
+            </a:lnRef>
+            <a:fillRef idx="0">
+              <a:schemeClr val="accent1"/>
+            </a:fillRef>
+            <a:effectRef idx="0">
               <a:schemeClr val="accent1"/>
             </a:effectRef>
             <a:fontRef idx="minor">
@@ -9741,15 +9899,16 @@
                 <a:srgbClr val="8FBFBF"/>
               </a:solidFill>
             </a:ln>
-          </p:spPr>
-          <p:style>
-            <a:lnRef idx="2">
-              <a:schemeClr val="accent1"/>
-            </a:lnRef>
-            <a:fillRef idx="0">
-              <a:schemeClr val="accent1"/>
-            </a:fillRef>
-            <a:effectRef idx="1">
+            <a:effectLst/>
+          </p:spPr>
+          <p:style>
+            <a:lnRef idx="2">
+              <a:schemeClr val="accent1"/>
+            </a:lnRef>
+            <a:fillRef idx="0">
+              <a:schemeClr val="accent1"/>
+            </a:fillRef>
+            <a:effectRef idx="0">
               <a:schemeClr val="accent1"/>
             </a:effectRef>
             <a:fontRef idx="minor">
@@ -9776,15 +9935,16 @@
                 <a:srgbClr val="8FBFBF"/>
               </a:solidFill>
             </a:ln>
-          </p:spPr>
-          <p:style>
-            <a:lnRef idx="2">
-              <a:schemeClr val="accent1"/>
-            </a:lnRef>
-            <a:fillRef idx="0">
-              <a:schemeClr val="accent1"/>
-            </a:fillRef>
-            <a:effectRef idx="1">
+            <a:effectLst/>
+          </p:spPr>
+          <p:style>
+            <a:lnRef idx="2">
+              <a:schemeClr val="accent1"/>
+            </a:lnRef>
+            <a:fillRef idx="0">
+              <a:schemeClr val="accent1"/>
+            </a:fillRef>
+            <a:effectRef idx="0">
               <a:schemeClr val="accent1"/>
             </a:effectRef>
             <a:fontRef idx="minor">
@@ -9811,15 +9971,16 @@
                 <a:srgbClr val="8FBFBF"/>
               </a:solidFill>
             </a:ln>
-          </p:spPr>
-          <p:style>
-            <a:lnRef idx="2">
-              <a:schemeClr val="accent1"/>
-            </a:lnRef>
-            <a:fillRef idx="0">
-              <a:schemeClr val="accent1"/>
-            </a:fillRef>
-            <a:effectRef idx="1">
+            <a:effectLst/>
+          </p:spPr>
+          <p:style>
+            <a:lnRef idx="2">
+              <a:schemeClr val="accent1"/>
+            </a:lnRef>
+            <a:fillRef idx="0">
+              <a:schemeClr val="accent1"/>
+            </a:fillRef>
+            <a:effectRef idx="0">
               <a:schemeClr val="accent1"/>
             </a:effectRef>
             <a:fontRef idx="minor">
@@ -9846,15 +10007,16 @@
                 <a:srgbClr val="8FBFBF"/>
               </a:solidFill>
             </a:ln>
-          </p:spPr>
-          <p:style>
-            <a:lnRef idx="2">
-              <a:schemeClr val="accent1"/>
-            </a:lnRef>
-            <a:fillRef idx="0">
-              <a:schemeClr val="accent1"/>
-            </a:fillRef>
-            <a:effectRef idx="1">
+            <a:effectLst/>
+          </p:spPr>
+          <p:style>
+            <a:lnRef idx="2">
+              <a:schemeClr val="accent1"/>
+            </a:lnRef>
+            <a:fillRef idx="0">
+              <a:schemeClr val="accent1"/>
+            </a:fillRef>
+            <a:effectRef idx="0">
               <a:schemeClr val="accent1"/>
             </a:effectRef>
             <a:fontRef idx="minor">
@@ -9881,15 +10043,16 @@
                 <a:srgbClr val="8FBFBF"/>
               </a:solidFill>
             </a:ln>
-          </p:spPr>
-          <p:style>
-            <a:lnRef idx="2">
-              <a:schemeClr val="accent1"/>
-            </a:lnRef>
-            <a:fillRef idx="0">
-              <a:schemeClr val="accent1"/>
-            </a:fillRef>
-            <a:effectRef idx="1">
+            <a:effectLst/>
+          </p:spPr>
+          <p:style>
+            <a:lnRef idx="2">
+              <a:schemeClr val="accent1"/>
+            </a:lnRef>
+            <a:fillRef idx="0">
+              <a:schemeClr val="accent1"/>
+            </a:fillRef>
+            <a:effectRef idx="0">
               <a:schemeClr val="accent1"/>
             </a:effectRef>
             <a:fontRef idx="minor">
@@ -9916,15 +10079,16 @@
                 <a:srgbClr val="8FBFBF"/>
               </a:solidFill>
             </a:ln>
-          </p:spPr>
-          <p:style>
-            <a:lnRef idx="2">
-              <a:schemeClr val="accent1"/>
-            </a:lnRef>
-            <a:fillRef idx="0">
-              <a:schemeClr val="accent1"/>
-            </a:fillRef>
-            <a:effectRef idx="1">
+            <a:effectLst/>
+          </p:spPr>
+          <p:style>
+            <a:lnRef idx="2">
+              <a:schemeClr val="accent1"/>
+            </a:lnRef>
+            <a:fillRef idx="0">
+              <a:schemeClr val="accent1"/>
+            </a:fillRef>
+            <a:effectRef idx="0">
               <a:schemeClr val="accent1"/>
             </a:effectRef>
             <a:fontRef idx="minor">
@@ -9951,15 +10115,16 @@
                 <a:srgbClr val="8FBFBF"/>
               </a:solidFill>
             </a:ln>
-          </p:spPr>
-          <p:style>
-            <a:lnRef idx="2">
-              <a:schemeClr val="accent1"/>
-            </a:lnRef>
-            <a:fillRef idx="0">
-              <a:schemeClr val="accent1"/>
-            </a:fillRef>
-            <a:effectRef idx="1">
+            <a:effectLst/>
+          </p:spPr>
+          <p:style>
+            <a:lnRef idx="2">
+              <a:schemeClr val="accent1"/>
+            </a:lnRef>
+            <a:fillRef idx="0">
+              <a:schemeClr val="accent1"/>
+            </a:fillRef>
+            <a:effectRef idx="0">
               <a:schemeClr val="accent1"/>
             </a:effectRef>
             <a:fontRef idx="minor">
@@ -9986,15 +10151,16 @@
                 <a:srgbClr val="8FBFBF"/>
               </a:solidFill>
             </a:ln>
-          </p:spPr>
-          <p:style>
-            <a:lnRef idx="2">
-              <a:schemeClr val="accent1"/>
-            </a:lnRef>
-            <a:fillRef idx="0">
-              <a:schemeClr val="accent1"/>
-            </a:fillRef>
-            <a:effectRef idx="1">
+            <a:effectLst/>
+          </p:spPr>
+          <p:style>
+            <a:lnRef idx="2">
+              <a:schemeClr val="accent1"/>
+            </a:lnRef>
+            <a:fillRef idx="0">
+              <a:schemeClr val="accent1"/>
+            </a:fillRef>
+            <a:effectRef idx="0">
               <a:schemeClr val="accent1"/>
             </a:effectRef>
             <a:fontRef idx="minor">
@@ -10021,15 +10187,16 @@
                 <a:srgbClr val="8FBFBF"/>
               </a:solidFill>
             </a:ln>
-          </p:spPr>
-          <p:style>
-            <a:lnRef idx="2">
-              <a:schemeClr val="accent1"/>
-            </a:lnRef>
-            <a:fillRef idx="0">
-              <a:schemeClr val="accent1"/>
-            </a:fillRef>
-            <a:effectRef idx="1">
+            <a:effectLst/>
+          </p:spPr>
+          <p:style>
+            <a:lnRef idx="2">
+              <a:schemeClr val="accent1"/>
+            </a:lnRef>
+            <a:fillRef idx="0">
+              <a:schemeClr val="accent1"/>
+            </a:fillRef>
+            <a:effectRef idx="0">
               <a:schemeClr val="accent1"/>
             </a:effectRef>
             <a:fontRef idx="minor">
@@ -10056,15 +10223,16 @@
                 <a:srgbClr val="8FBFBF"/>
               </a:solidFill>
             </a:ln>
-          </p:spPr>
-          <p:style>
-            <a:lnRef idx="2">
-              <a:schemeClr val="accent1"/>
-            </a:lnRef>
-            <a:fillRef idx="0">
-              <a:schemeClr val="accent1"/>
-            </a:fillRef>
-            <a:effectRef idx="1">
+            <a:effectLst/>
+          </p:spPr>
+          <p:style>
+            <a:lnRef idx="2">
+              <a:schemeClr val="accent1"/>
+            </a:lnRef>
+            <a:fillRef idx="0">
+              <a:schemeClr val="accent1"/>
+            </a:fillRef>
+            <a:effectRef idx="0">
               <a:schemeClr val="accent1"/>
             </a:effectRef>
             <a:fontRef idx="minor">
@@ -10091,15 +10259,16 @@
                 <a:srgbClr val="8FBFBF"/>
               </a:solidFill>
             </a:ln>
-          </p:spPr>
-          <p:style>
-            <a:lnRef idx="2">
-              <a:schemeClr val="accent1"/>
-            </a:lnRef>
-            <a:fillRef idx="0">
-              <a:schemeClr val="accent1"/>
-            </a:fillRef>
-            <a:effectRef idx="1">
+            <a:effectLst/>
+          </p:spPr>
+          <p:style>
+            <a:lnRef idx="2">
+              <a:schemeClr val="accent1"/>
+            </a:lnRef>
+            <a:fillRef idx="0">
+              <a:schemeClr val="accent1"/>
+            </a:fillRef>
+            <a:effectRef idx="0">
               <a:schemeClr val="accent1"/>
             </a:effectRef>
             <a:fontRef idx="minor">
@@ -10126,15 +10295,16 @@
                 <a:srgbClr val="8FBFBF"/>
               </a:solidFill>
             </a:ln>
-          </p:spPr>
-          <p:style>
-            <a:lnRef idx="2">
-              <a:schemeClr val="accent1"/>
-            </a:lnRef>
-            <a:fillRef idx="0">
-              <a:schemeClr val="accent1"/>
-            </a:fillRef>
-            <a:effectRef idx="1">
+            <a:effectLst/>
+          </p:spPr>
+          <p:style>
+            <a:lnRef idx="2">
+              <a:schemeClr val="accent1"/>
+            </a:lnRef>
+            <a:fillRef idx="0">
+              <a:schemeClr val="accent1"/>
+            </a:fillRef>
+            <a:effectRef idx="0">
               <a:schemeClr val="accent1"/>
             </a:effectRef>
             <a:fontRef idx="minor">
@@ -10161,15 +10331,16 @@
                 <a:srgbClr val="8FBFBF"/>
               </a:solidFill>
             </a:ln>
-          </p:spPr>
-          <p:style>
-            <a:lnRef idx="2">
-              <a:schemeClr val="accent1"/>
-            </a:lnRef>
-            <a:fillRef idx="0">
-              <a:schemeClr val="accent1"/>
-            </a:fillRef>
-            <a:effectRef idx="1">
+            <a:effectLst/>
+          </p:spPr>
+          <p:style>
+            <a:lnRef idx="2">
+              <a:schemeClr val="accent1"/>
+            </a:lnRef>
+            <a:fillRef idx="0">
+              <a:schemeClr val="accent1"/>
+            </a:fillRef>
+            <a:effectRef idx="0">
               <a:schemeClr val="accent1"/>
             </a:effectRef>
             <a:fontRef idx="minor">
@@ -10221,7 +10392,7 @@
             <a:fillRef idx="3">
               <a:schemeClr val="accent1"/>
             </a:fillRef>
-            <a:effectRef idx="2">
+            <a:effectRef idx="0">
               <a:schemeClr val="accent1"/>
             </a:effectRef>
             <a:fontRef idx="minor">
@@ -10255,15 +10426,16 @@
                 <a:srgbClr val="8FBFBF"/>
               </a:solidFill>
             </a:ln>
-          </p:spPr>
-          <p:style>
-            <a:lnRef idx="2">
-              <a:schemeClr val="accent1"/>
-            </a:lnRef>
-            <a:fillRef idx="0">
-              <a:schemeClr val="accent1"/>
-            </a:fillRef>
-            <a:effectRef idx="1">
+            <a:effectLst/>
+          </p:spPr>
+          <p:style>
+            <a:lnRef idx="2">
+              <a:schemeClr val="accent1"/>
+            </a:lnRef>
+            <a:fillRef idx="0">
+              <a:schemeClr val="accent1"/>
+            </a:fillRef>
+            <a:effectRef idx="0">
               <a:schemeClr val="accent1"/>
             </a:effectRef>
             <a:fontRef idx="minor">
@@ -10290,15 +10462,16 @@
                 <a:srgbClr val="8FBFBF"/>
               </a:solidFill>
             </a:ln>
-          </p:spPr>
-          <p:style>
-            <a:lnRef idx="2">
-              <a:schemeClr val="accent1"/>
-            </a:lnRef>
-            <a:fillRef idx="0">
-              <a:schemeClr val="accent1"/>
-            </a:fillRef>
-            <a:effectRef idx="1">
+            <a:effectLst/>
+          </p:spPr>
+          <p:style>
+            <a:lnRef idx="2">
+              <a:schemeClr val="accent1"/>
+            </a:lnRef>
+            <a:fillRef idx="0">
+              <a:schemeClr val="accent1"/>
+            </a:fillRef>
+            <a:effectRef idx="0">
               <a:schemeClr val="accent1"/>
             </a:effectRef>
             <a:fontRef idx="minor">
@@ -10325,15 +10498,16 @@
                 <a:srgbClr val="8FBFBF"/>
               </a:solidFill>
             </a:ln>
-          </p:spPr>
-          <p:style>
-            <a:lnRef idx="2">
-              <a:schemeClr val="accent1"/>
-            </a:lnRef>
-            <a:fillRef idx="0">
-              <a:schemeClr val="accent1"/>
-            </a:fillRef>
-            <a:effectRef idx="1">
+            <a:effectLst/>
+          </p:spPr>
+          <p:style>
+            <a:lnRef idx="2">
+              <a:schemeClr val="accent1"/>
+            </a:lnRef>
+            <a:fillRef idx="0">
+              <a:schemeClr val="accent1"/>
+            </a:fillRef>
+            <a:effectRef idx="0">
               <a:schemeClr val="accent1"/>
             </a:effectRef>
             <a:fontRef idx="minor">
@@ -10360,15 +10534,16 @@
                 <a:srgbClr val="8FBFBF"/>
               </a:solidFill>
             </a:ln>
-          </p:spPr>
-          <p:style>
-            <a:lnRef idx="2">
-              <a:schemeClr val="accent1"/>
-            </a:lnRef>
-            <a:fillRef idx="0">
-              <a:schemeClr val="accent1"/>
-            </a:fillRef>
-            <a:effectRef idx="1">
+            <a:effectLst/>
+          </p:spPr>
+          <p:style>
+            <a:lnRef idx="2">
+              <a:schemeClr val="accent1"/>
+            </a:lnRef>
+            <a:fillRef idx="0">
+              <a:schemeClr val="accent1"/>
+            </a:fillRef>
+            <a:effectRef idx="0">
               <a:schemeClr val="accent1"/>
             </a:effectRef>
             <a:fontRef idx="minor">
@@ -10395,15 +10570,16 @@
                 <a:srgbClr val="8FBFBF"/>
               </a:solidFill>
             </a:ln>
-          </p:spPr>
-          <p:style>
-            <a:lnRef idx="2">
-              <a:schemeClr val="accent1"/>
-            </a:lnRef>
-            <a:fillRef idx="0">
-              <a:schemeClr val="accent1"/>
-            </a:fillRef>
-            <a:effectRef idx="1">
+            <a:effectLst/>
+          </p:spPr>
+          <p:style>
+            <a:lnRef idx="2">
+              <a:schemeClr val="accent1"/>
+            </a:lnRef>
+            <a:fillRef idx="0">
+              <a:schemeClr val="accent1"/>
+            </a:fillRef>
+            <a:effectRef idx="0">
               <a:schemeClr val="accent1"/>
             </a:effectRef>
             <a:fontRef idx="minor">
@@ -10430,15 +10606,16 @@
                 <a:srgbClr val="8FBFBF"/>
               </a:solidFill>
             </a:ln>
-          </p:spPr>
-          <p:style>
-            <a:lnRef idx="2">
-              <a:schemeClr val="accent1"/>
-            </a:lnRef>
-            <a:fillRef idx="0">
-              <a:schemeClr val="accent1"/>
-            </a:fillRef>
-            <a:effectRef idx="1">
+            <a:effectLst/>
+          </p:spPr>
+          <p:style>
+            <a:lnRef idx="2">
+              <a:schemeClr val="accent1"/>
+            </a:lnRef>
+            <a:fillRef idx="0">
+              <a:schemeClr val="accent1"/>
+            </a:fillRef>
+            <a:effectRef idx="0">
               <a:schemeClr val="accent1"/>
             </a:effectRef>
             <a:fontRef idx="minor">
@@ -10465,15 +10642,16 @@
                 <a:srgbClr val="8FBFBF"/>
               </a:solidFill>
             </a:ln>
-          </p:spPr>
-          <p:style>
-            <a:lnRef idx="2">
-              <a:schemeClr val="accent1"/>
-            </a:lnRef>
-            <a:fillRef idx="0">
-              <a:schemeClr val="accent1"/>
-            </a:fillRef>
-            <a:effectRef idx="1">
+            <a:effectLst/>
+          </p:spPr>
+          <p:style>
+            <a:lnRef idx="2">
+              <a:schemeClr val="accent1"/>
+            </a:lnRef>
+            <a:fillRef idx="0">
+              <a:schemeClr val="accent1"/>
+            </a:fillRef>
+            <a:effectRef idx="0">
               <a:schemeClr val="accent1"/>
             </a:effectRef>
             <a:fontRef idx="minor">
@@ -10500,15 +10678,16 @@
                 <a:srgbClr val="8FBFBF"/>
               </a:solidFill>
             </a:ln>
-          </p:spPr>
-          <p:style>
-            <a:lnRef idx="2">
-              <a:schemeClr val="accent1"/>
-            </a:lnRef>
-            <a:fillRef idx="0">
-              <a:schemeClr val="accent1"/>
-            </a:fillRef>
-            <a:effectRef idx="1">
+            <a:effectLst/>
+          </p:spPr>
+          <p:style>
+            <a:lnRef idx="2">
+              <a:schemeClr val="accent1"/>
+            </a:lnRef>
+            <a:fillRef idx="0">
+              <a:schemeClr val="accent1"/>
+            </a:fillRef>
+            <a:effectRef idx="0">
               <a:schemeClr val="accent1"/>
             </a:effectRef>
             <a:fontRef idx="minor">
@@ -10535,15 +10714,16 @@
                 <a:srgbClr val="8FBFBF"/>
               </a:solidFill>
             </a:ln>
-          </p:spPr>
-          <p:style>
-            <a:lnRef idx="2">
-              <a:schemeClr val="accent1"/>
-            </a:lnRef>
-            <a:fillRef idx="0">
-              <a:schemeClr val="accent1"/>
-            </a:fillRef>
-            <a:effectRef idx="1">
+            <a:effectLst/>
+          </p:spPr>
+          <p:style>
+            <a:lnRef idx="2">
+              <a:schemeClr val="accent1"/>
+            </a:lnRef>
+            <a:fillRef idx="0">
+              <a:schemeClr val="accent1"/>
+            </a:fillRef>
+            <a:effectRef idx="0">
               <a:schemeClr val="accent1"/>
             </a:effectRef>
             <a:fontRef idx="minor">
@@ -10570,15 +10750,16 @@
                 <a:srgbClr val="8FBFBF"/>
               </a:solidFill>
             </a:ln>
-          </p:spPr>
-          <p:style>
-            <a:lnRef idx="2">
-              <a:schemeClr val="accent1"/>
-            </a:lnRef>
-            <a:fillRef idx="0">
-              <a:schemeClr val="accent1"/>
-            </a:fillRef>
-            <a:effectRef idx="1">
+            <a:effectLst/>
+          </p:spPr>
+          <p:style>
+            <a:lnRef idx="2">
+              <a:schemeClr val="accent1"/>
+            </a:lnRef>
+            <a:fillRef idx="0">
+              <a:schemeClr val="accent1"/>
+            </a:fillRef>
+            <a:effectRef idx="0">
               <a:schemeClr val="accent1"/>
             </a:effectRef>
             <a:fontRef idx="minor">
@@ -10605,15 +10786,16 @@
                 <a:srgbClr val="8FBFBF"/>
               </a:solidFill>
             </a:ln>
-          </p:spPr>
-          <p:style>
-            <a:lnRef idx="2">
-              <a:schemeClr val="accent1"/>
-            </a:lnRef>
-            <a:fillRef idx="0">
-              <a:schemeClr val="accent1"/>
-            </a:fillRef>
-            <a:effectRef idx="1">
+            <a:effectLst/>
+          </p:spPr>
+          <p:style>
+            <a:lnRef idx="2">
+              <a:schemeClr val="accent1"/>
+            </a:lnRef>
+            <a:fillRef idx="0">
+              <a:schemeClr val="accent1"/>
+            </a:fillRef>
+            <a:effectRef idx="0">
               <a:schemeClr val="accent1"/>
             </a:effectRef>
             <a:fontRef idx="minor">
@@ -10640,15 +10822,16 @@
                 <a:srgbClr val="8FBFBF"/>
               </a:solidFill>
             </a:ln>
-          </p:spPr>
-          <p:style>
-            <a:lnRef idx="2">
-              <a:schemeClr val="accent1"/>
-            </a:lnRef>
-            <a:fillRef idx="0">
-              <a:schemeClr val="accent1"/>
-            </a:fillRef>
-            <a:effectRef idx="1">
+            <a:effectLst/>
+          </p:spPr>
+          <p:style>
+            <a:lnRef idx="2">
+              <a:schemeClr val="accent1"/>
+            </a:lnRef>
+            <a:fillRef idx="0">
+              <a:schemeClr val="accent1"/>
+            </a:fillRef>
+            <a:effectRef idx="0">
               <a:schemeClr val="accent1"/>
             </a:effectRef>
             <a:fontRef idx="minor">
@@ -10675,15 +10858,16 @@
                 <a:srgbClr val="8FBFBF"/>
               </a:solidFill>
             </a:ln>
-          </p:spPr>
-          <p:style>
-            <a:lnRef idx="2">
-              <a:schemeClr val="accent1"/>
-            </a:lnRef>
-            <a:fillRef idx="0">
-              <a:schemeClr val="accent1"/>
-            </a:fillRef>
-            <a:effectRef idx="1">
+            <a:effectLst/>
+          </p:spPr>
+          <p:style>
+            <a:lnRef idx="2">
+              <a:schemeClr val="accent1"/>
+            </a:lnRef>
+            <a:fillRef idx="0">
+              <a:schemeClr val="accent1"/>
+            </a:fillRef>
+            <a:effectRef idx="0">
               <a:schemeClr val="accent1"/>
             </a:effectRef>
             <a:fontRef idx="minor">
@@ -10710,15 +10894,16 @@
                 <a:srgbClr val="8FBFBF"/>
               </a:solidFill>
             </a:ln>
-          </p:spPr>
-          <p:style>
-            <a:lnRef idx="2">
-              <a:schemeClr val="accent1"/>
-            </a:lnRef>
-            <a:fillRef idx="0">
-              <a:schemeClr val="accent1"/>
-            </a:fillRef>
-            <a:effectRef idx="1">
+            <a:effectLst/>
+          </p:spPr>
+          <p:style>
+            <a:lnRef idx="2">
+              <a:schemeClr val="accent1"/>
+            </a:lnRef>
+            <a:fillRef idx="0">
+              <a:schemeClr val="accent1"/>
+            </a:fillRef>
+            <a:effectRef idx="0">
               <a:schemeClr val="accent1"/>
             </a:effectRef>
             <a:fontRef idx="minor">
@@ -10745,15 +10930,16 @@
                 <a:srgbClr val="8FBFBF"/>
               </a:solidFill>
             </a:ln>
-          </p:spPr>
-          <p:style>
-            <a:lnRef idx="2">
-              <a:schemeClr val="accent1"/>
-            </a:lnRef>
-            <a:fillRef idx="0">
-              <a:schemeClr val="accent1"/>
-            </a:fillRef>
-            <a:effectRef idx="1">
+            <a:effectLst/>
+          </p:spPr>
+          <p:style>
+            <a:lnRef idx="2">
+              <a:schemeClr val="accent1"/>
+            </a:lnRef>
+            <a:fillRef idx="0">
+              <a:schemeClr val="accent1"/>
+            </a:fillRef>
+            <a:effectRef idx="0">
               <a:schemeClr val="accent1"/>
             </a:effectRef>
             <a:fontRef idx="minor">
@@ -10780,15 +10966,16 @@
                 <a:srgbClr val="8FBFBF"/>
               </a:solidFill>
             </a:ln>
-          </p:spPr>
-          <p:style>
-            <a:lnRef idx="2">
-              <a:schemeClr val="accent1"/>
-            </a:lnRef>
-            <a:fillRef idx="0">
-              <a:schemeClr val="accent1"/>
-            </a:fillRef>
-            <a:effectRef idx="1">
+            <a:effectLst/>
+          </p:spPr>
+          <p:style>
+            <a:lnRef idx="2">
+              <a:schemeClr val="accent1"/>
+            </a:lnRef>
+            <a:fillRef idx="0">
+              <a:schemeClr val="accent1"/>
+            </a:fillRef>
+            <a:effectRef idx="0">
               <a:schemeClr val="accent1"/>
             </a:effectRef>
             <a:fontRef idx="minor">
@@ -10815,15 +11002,16 @@
                 <a:srgbClr val="8FBFBF"/>
               </a:solidFill>
             </a:ln>
-          </p:spPr>
-          <p:style>
-            <a:lnRef idx="2">
-              <a:schemeClr val="accent1"/>
-            </a:lnRef>
-            <a:fillRef idx="0">
-              <a:schemeClr val="accent1"/>
-            </a:fillRef>
-            <a:effectRef idx="1">
+            <a:effectLst/>
+          </p:spPr>
+          <p:style>
+            <a:lnRef idx="2">
+              <a:schemeClr val="accent1"/>
+            </a:lnRef>
+            <a:fillRef idx="0">
+              <a:schemeClr val="accent1"/>
+            </a:fillRef>
+            <a:effectRef idx="0">
               <a:schemeClr val="accent1"/>
             </a:effectRef>
             <a:fontRef idx="minor">

--- a/gakkyu/tegami/pptx/T3.pptx
+++ b/gakkyu/tegami/pptx/T3.pptx
@@ -3568,44 +3568,9 @@
           </a:p>
         </p:txBody>
       </p:sp>
-      <p:sp>
-        <p:nvSpPr>
-          <p:cNvPr id="3" name="名前欄"/>
-          <p:cNvSpPr txBox="1"/>
-          <p:nvPr/>
-        </p:nvSpPr>
-        <p:spPr>
-          <a:xfrm>
-            <a:off x="3600000" y="475200"/>
-            <a:ext cx="3420000" cy="252000"/>
-          </a:xfrm>
-          <a:prstGeom prst="rect">
-            <a:avLst/>
-          </a:prstGeom>
-          <a:noFill/>
-        </p:spPr>
-        <p:txBody>
-          <a:bodyPr wrap="square" lIns="0" rIns="0" tIns="0" bIns="0" anchor="t">
-            <a:spAutoFit/>
-          </a:bodyPr>
-          <a:lstStyle/>
-          <a:p>
-            <a:pPr algn="r"/>
-            <a:r>
-              <a:rPr sz="1000" b="0">
-                <a:solidFill>
-                  <a:srgbClr val="38424B"/>
-                </a:solidFill>
-                <a:latin typeface="UD デジタル 教科書体 N-R"/>
-              </a:rPr>
-              <a:t>（　　年　　組　　名前　　　　　　　　）</a:t>
-            </a:r>
-          </a:p>
-        </p:txBody>
-      </p:sp>
       <p:cxnSp>
         <p:nvCxnSpPr>
-          <p:cNvPr id="4" name="見出しの線"/>
+          <p:cNvPr id="3" name="見出しの線"/>
           <p:cNvCxnSpPr/>
           <p:nvPr/>
         </p:nvCxnSpPr>
@@ -3641,7 +3606,7 @@
       </p:cxnSp>
       <p:grpSp>
         <p:nvGrpSpPr>
-          <p:cNvPr id="5" name="1行目（右から）"/>
+          <p:cNvPr id="4" name="1行目（右から）"/>
           <p:cNvGrpSpPr/>
           <p:nvPr/>
         </p:nvGrpSpPr>
@@ -3655,7 +3620,7 @@
         </p:grpSpPr>
         <p:sp>
           <p:nvSpPr>
-            <p:cNvPr id="6" name="外わく"/>
+            <p:cNvPr id="5" name="外わく"/>
             <p:cNvSpPr/>
             <p:nvPr/>
           </p:nvSpPr>
@@ -3699,7 +3664,7 @@
         </p:sp>
         <p:cxnSp>
           <p:nvCxnSpPr>
-            <p:cNvPr id="7" name="マスの線 1"/>
+            <p:cNvPr id="6" name="マスの線 1"/>
             <p:cNvCxnSpPr/>
             <p:nvPr/>
           </p:nvCxnSpPr>
@@ -3735,7 +3700,7 @@
         </p:cxnSp>
         <p:cxnSp>
           <p:nvCxnSpPr>
-            <p:cNvPr id="8" name="マスの線 2"/>
+            <p:cNvPr id="7" name="マスの線 2"/>
             <p:cNvCxnSpPr/>
             <p:nvPr/>
           </p:nvCxnSpPr>
@@ -3771,7 +3736,7 @@
         </p:cxnSp>
         <p:cxnSp>
           <p:nvCxnSpPr>
-            <p:cNvPr id="9" name="マスの線 3"/>
+            <p:cNvPr id="8" name="マスの線 3"/>
             <p:cNvCxnSpPr/>
             <p:nvPr/>
           </p:nvCxnSpPr>
@@ -3807,7 +3772,7 @@
         </p:cxnSp>
         <p:cxnSp>
           <p:nvCxnSpPr>
-            <p:cNvPr id="10" name="マスの線 4"/>
+            <p:cNvPr id="9" name="マスの線 4"/>
             <p:cNvCxnSpPr/>
             <p:nvPr/>
           </p:nvCxnSpPr>
@@ -3843,7 +3808,7 @@
         </p:cxnSp>
         <p:cxnSp>
           <p:nvCxnSpPr>
-            <p:cNvPr id="11" name="マスの線 5"/>
+            <p:cNvPr id="10" name="マスの線 5"/>
             <p:cNvCxnSpPr/>
             <p:nvPr/>
           </p:nvCxnSpPr>
@@ -3879,7 +3844,7 @@
         </p:cxnSp>
         <p:cxnSp>
           <p:nvCxnSpPr>
-            <p:cNvPr id="12" name="マスの線 6"/>
+            <p:cNvPr id="11" name="マスの線 6"/>
             <p:cNvCxnSpPr/>
             <p:nvPr/>
           </p:nvCxnSpPr>
@@ -3915,7 +3880,7 @@
         </p:cxnSp>
         <p:cxnSp>
           <p:nvCxnSpPr>
-            <p:cNvPr id="13" name="マスの線 7"/>
+            <p:cNvPr id="12" name="マスの線 7"/>
             <p:cNvCxnSpPr/>
             <p:nvPr/>
           </p:nvCxnSpPr>
@@ -3951,7 +3916,7 @@
         </p:cxnSp>
         <p:cxnSp>
           <p:nvCxnSpPr>
-            <p:cNvPr id="14" name="マスの線 8"/>
+            <p:cNvPr id="13" name="マスの線 8"/>
             <p:cNvCxnSpPr/>
             <p:nvPr/>
           </p:nvCxnSpPr>
@@ -3987,7 +3952,7 @@
         </p:cxnSp>
         <p:cxnSp>
           <p:nvCxnSpPr>
-            <p:cNvPr id="15" name="マスの線 9"/>
+            <p:cNvPr id="14" name="マスの線 9"/>
             <p:cNvCxnSpPr/>
             <p:nvPr/>
           </p:nvCxnSpPr>
@@ -4023,7 +3988,7 @@
         </p:cxnSp>
         <p:cxnSp>
           <p:nvCxnSpPr>
-            <p:cNvPr id="16" name="マスの線 10"/>
+            <p:cNvPr id="15" name="マスの線 10"/>
             <p:cNvCxnSpPr/>
             <p:nvPr/>
           </p:nvCxnSpPr>
@@ -4059,7 +4024,7 @@
         </p:cxnSp>
         <p:cxnSp>
           <p:nvCxnSpPr>
-            <p:cNvPr id="17" name="マスの線 11"/>
+            <p:cNvPr id="16" name="マスの線 11"/>
             <p:cNvCxnSpPr/>
             <p:nvPr/>
           </p:nvCxnSpPr>
@@ -4095,7 +4060,7 @@
         </p:cxnSp>
         <p:cxnSp>
           <p:nvCxnSpPr>
-            <p:cNvPr id="18" name="マスの線 12"/>
+            <p:cNvPr id="17" name="マスの線 12"/>
             <p:cNvCxnSpPr/>
             <p:nvPr/>
           </p:nvCxnSpPr>
@@ -4131,7 +4096,7 @@
         </p:cxnSp>
         <p:cxnSp>
           <p:nvCxnSpPr>
-            <p:cNvPr id="19" name="マスの線 13"/>
+            <p:cNvPr id="18" name="マスの線 13"/>
             <p:cNvCxnSpPr/>
             <p:nvPr/>
           </p:nvCxnSpPr>
@@ -4167,7 +4132,7 @@
         </p:cxnSp>
         <p:cxnSp>
           <p:nvCxnSpPr>
-            <p:cNvPr id="20" name="マスの線 14"/>
+            <p:cNvPr id="19" name="マスの線 14"/>
             <p:cNvCxnSpPr/>
             <p:nvPr/>
           </p:nvCxnSpPr>
@@ -4203,7 +4168,7 @@
         </p:cxnSp>
         <p:cxnSp>
           <p:nvCxnSpPr>
-            <p:cNvPr id="21" name="マスの線 15"/>
+            <p:cNvPr id="20" name="マスの線 15"/>
             <p:cNvCxnSpPr/>
             <p:nvPr/>
           </p:nvCxnSpPr>
@@ -4239,7 +4204,7 @@
         </p:cxnSp>
         <p:cxnSp>
           <p:nvCxnSpPr>
-            <p:cNvPr id="22" name="マスの線 16"/>
+            <p:cNvPr id="21" name="マスの線 16"/>
             <p:cNvCxnSpPr/>
             <p:nvPr/>
           </p:nvCxnSpPr>
@@ -4275,7 +4240,7 @@
         </p:cxnSp>
         <p:cxnSp>
           <p:nvCxnSpPr>
-            <p:cNvPr id="23" name="マスの線 17"/>
+            <p:cNvPr id="22" name="マスの線 17"/>
             <p:cNvCxnSpPr/>
             <p:nvPr/>
           </p:nvCxnSpPr>
@@ -4312,7 +4277,7 @@
       </p:grpSp>
       <p:grpSp>
         <p:nvGrpSpPr>
-          <p:cNvPr id="24" name="2行目（右から）"/>
+          <p:cNvPr id="23" name="2行目（右から）"/>
           <p:cNvGrpSpPr/>
           <p:nvPr/>
         </p:nvGrpSpPr>
@@ -4326,7 +4291,7 @@
         </p:grpSpPr>
         <p:sp>
           <p:nvSpPr>
-            <p:cNvPr id="25" name="外わく"/>
+            <p:cNvPr id="24" name="外わく"/>
             <p:cNvSpPr/>
             <p:nvPr/>
           </p:nvSpPr>
@@ -4370,7 +4335,7 @@
         </p:sp>
         <p:cxnSp>
           <p:nvCxnSpPr>
-            <p:cNvPr id="26" name="マスの線 1"/>
+            <p:cNvPr id="25" name="マスの線 1"/>
             <p:cNvCxnSpPr/>
             <p:nvPr/>
           </p:nvCxnSpPr>
@@ -4406,7 +4371,7 @@
         </p:cxnSp>
         <p:cxnSp>
           <p:nvCxnSpPr>
-            <p:cNvPr id="27" name="マスの線 2"/>
+            <p:cNvPr id="26" name="マスの線 2"/>
             <p:cNvCxnSpPr/>
             <p:nvPr/>
           </p:nvCxnSpPr>
@@ -4442,7 +4407,7 @@
         </p:cxnSp>
         <p:cxnSp>
           <p:nvCxnSpPr>
-            <p:cNvPr id="28" name="マスの線 3"/>
+            <p:cNvPr id="27" name="マスの線 3"/>
             <p:cNvCxnSpPr/>
             <p:nvPr/>
           </p:nvCxnSpPr>
@@ -4478,7 +4443,7 @@
         </p:cxnSp>
         <p:cxnSp>
           <p:nvCxnSpPr>
-            <p:cNvPr id="29" name="マスの線 4"/>
+            <p:cNvPr id="28" name="マスの線 4"/>
             <p:cNvCxnSpPr/>
             <p:nvPr/>
           </p:nvCxnSpPr>
@@ -4514,7 +4479,7 @@
         </p:cxnSp>
         <p:cxnSp>
           <p:nvCxnSpPr>
-            <p:cNvPr id="30" name="マスの線 5"/>
+            <p:cNvPr id="29" name="マスの線 5"/>
             <p:cNvCxnSpPr/>
             <p:nvPr/>
           </p:nvCxnSpPr>
@@ -4550,7 +4515,7 @@
         </p:cxnSp>
         <p:cxnSp>
           <p:nvCxnSpPr>
-            <p:cNvPr id="31" name="マスの線 6"/>
+            <p:cNvPr id="30" name="マスの線 6"/>
             <p:cNvCxnSpPr/>
             <p:nvPr/>
           </p:nvCxnSpPr>
@@ -4586,7 +4551,7 @@
         </p:cxnSp>
         <p:cxnSp>
           <p:nvCxnSpPr>
-            <p:cNvPr id="32" name="マスの線 7"/>
+            <p:cNvPr id="31" name="マスの線 7"/>
             <p:cNvCxnSpPr/>
             <p:nvPr/>
           </p:nvCxnSpPr>
@@ -4622,7 +4587,7 @@
         </p:cxnSp>
         <p:cxnSp>
           <p:nvCxnSpPr>
-            <p:cNvPr id="33" name="マスの線 8"/>
+            <p:cNvPr id="32" name="マスの線 8"/>
             <p:cNvCxnSpPr/>
             <p:nvPr/>
           </p:nvCxnSpPr>
@@ -4658,7 +4623,7 @@
         </p:cxnSp>
         <p:cxnSp>
           <p:nvCxnSpPr>
-            <p:cNvPr id="34" name="マスの線 9"/>
+            <p:cNvPr id="33" name="マスの線 9"/>
             <p:cNvCxnSpPr/>
             <p:nvPr/>
           </p:nvCxnSpPr>
@@ -4694,7 +4659,7 @@
         </p:cxnSp>
         <p:cxnSp>
           <p:nvCxnSpPr>
-            <p:cNvPr id="35" name="マスの線 10"/>
+            <p:cNvPr id="34" name="マスの線 10"/>
             <p:cNvCxnSpPr/>
             <p:nvPr/>
           </p:nvCxnSpPr>
@@ -4730,7 +4695,7 @@
         </p:cxnSp>
         <p:cxnSp>
           <p:nvCxnSpPr>
-            <p:cNvPr id="36" name="マスの線 11"/>
+            <p:cNvPr id="35" name="マスの線 11"/>
             <p:cNvCxnSpPr/>
             <p:nvPr/>
           </p:nvCxnSpPr>
@@ -4766,7 +4731,7 @@
         </p:cxnSp>
         <p:cxnSp>
           <p:nvCxnSpPr>
-            <p:cNvPr id="37" name="マスの線 12"/>
+            <p:cNvPr id="36" name="マスの線 12"/>
             <p:cNvCxnSpPr/>
             <p:nvPr/>
           </p:nvCxnSpPr>
@@ -4802,7 +4767,7 @@
         </p:cxnSp>
         <p:cxnSp>
           <p:nvCxnSpPr>
-            <p:cNvPr id="38" name="マスの線 13"/>
+            <p:cNvPr id="37" name="マスの線 13"/>
             <p:cNvCxnSpPr/>
             <p:nvPr/>
           </p:nvCxnSpPr>
@@ -4838,7 +4803,7 @@
         </p:cxnSp>
         <p:cxnSp>
           <p:nvCxnSpPr>
-            <p:cNvPr id="39" name="マスの線 14"/>
+            <p:cNvPr id="38" name="マスの線 14"/>
             <p:cNvCxnSpPr/>
             <p:nvPr/>
           </p:nvCxnSpPr>
@@ -4874,7 +4839,7 @@
         </p:cxnSp>
         <p:cxnSp>
           <p:nvCxnSpPr>
-            <p:cNvPr id="40" name="マスの線 15"/>
+            <p:cNvPr id="39" name="マスの線 15"/>
             <p:cNvCxnSpPr/>
             <p:nvPr/>
           </p:nvCxnSpPr>
@@ -4910,7 +4875,7 @@
         </p:cxnSp>
         <p:cxnSp>
           <p:nvCxnSpPr>
-            <p:cNvPr id="41" name="マスの線 16"/>
+            <p:cNvPr id="40" name="マスの線 16"/>
             <p:cNvCxnSpPr/>
             <p:nvPr/>
           </p:nvCxnSpPr>
@@ -4946,7 +4911,7 @@
         </p:cxnSp>
         <p:cxnSp>
           <p:nvCxnSpPr>
-            <p:cNvPr id="42" name="マスの線 17"/>
+            <p:cNvPr id="41" name="マスの線 17"/>
             <p:cNvCxnSpPr/>
             <p:nvPr/>
           </p:nvCxnSpPr>
@@ -4983,7 +4948,7 @@
       </p:grpSp>
       <p:grpSp>
         <p:nvGrpSpPr>
-          <p:cNvPr id="43" name="3行目（右から）"/>
+          <p:cNvPr id="42" name="3行目（右から）"/>
           <p:cNvGrpSpPr/>
           <p:nvPr/>
         </p:nvGrpSpPr>
@@ -4997,7 +4962,7 @@
         </p:grpSpPr>
         <p:sp>
           <p:nvSpPr>
-            <p:cNvPr id="44" name="外わく"/>
+            <p:cNvPr id="43" name="外わく"/>
             <p:cNvSpPr/>
             <p:nvPr/>
           </p:nvSpPr>
@@ -5041,7 +5006,7 @@
         </p:sp>
         <p:cxnSp>
           <p:nvCxnSpPr>
-            <p:cNvPr id="45" name="マスの線 1"/>
+            <p:cNvPr id="44" name="マスの線 1"/>
             <p:cNvCxnSpPr/>
             <p:nvPr/>
           </p:nvCxnSpPr>
@@ -5077,7 +5042,7 @@
         </p:cxnSp>
         <p:cxnSp>
           <p:nvCxnSpPr>
-            <p:cNvPr id="46" name="マスの線 2"/>
+            <p:cNvPr id="45" name="マスの線 2"/>
             <p:cNvCxnSpPr/>
             <p:nvPr/>
           </p:nvCxnSpPr>
@@ -5113,7 +5078,7 @@
         </p:cxnSp>
         <p:cxnSp>
           <p:nvCxnSpPr>
-            <p:cNvPr id="47" name="マスの線 3"/>
+            <p:cNvPr id="46" name="マスの線 3"/>
             <p:cNvCxnSpPr/>
             <p:nvPr/>
           </p:nvCxnSpPr>
@@ -5149,7 +5114,7 @@
         </p:cxnSp>
         <p:cxnSp>
           <p:nvCxnSpPr>
-            <p:cNvPr id="48" name="マスの線 4"/>
+            <p:cNvPr id="47" name="マスの線 4"/>
             <p:cNvCxnSpPr/>
             <p:nvPr/>
           </p:nvCxnSpPr>
@@ -5185,7 +5150,7 @@
         </p:cxnSp>
         <p:cxnSp>
           <p:nvCxnSpPr>
-            <p:cNvPr id="49" name="マスの線 5"/>
+            <p:cNvPr id="48" name="マスの線 5"/>
             <p:cNvCxnSpPr/>
             <p:nvPr/>
           </p:nvCxnSpPr>
@@ -5221,7 +5186,7 @@
         </p:cxnSp>
         <p:cxnSp>
           <p:nvCxnSpPr>
-            <p:cNvPr id="50" name="マスの線 6"/>
+            <p:cNvPr id="49" name="マスの線 6"/>
             <p:cNvCxnSpPr/>
             <p:nvPr/>
           </p:nvCxnSpPr>
@@ -5257,7 +5222,7 @@
         </p:cxnSp>
         <p:cxnSp>
           <p:nvCxnSpPr>
-            <p:cNvPr id="51" name="マスの線 7"/>
+            <p:cNvPr id="50" name="マスの線 7"/>
             <p:cNvCxnSpPr/>
             <p:nvPr/>
           </p:nvCxnSpPr>
@@ -5293,7 +5258,7 @@
         </p:cxnSp>
         <p:cxnSp>
           <p:nvCxnSpPr>
-            <p:cNvPr id="52" name="マスの線 8"/>
+            <p:cNvPr id="51" name="マスの線 8"/>
             <p:cNvCxnSpPr/>
             <p:nvPr/>
           </p:nvCxnSpPr>
@@ -5329,7 +5294,7 @@
         </p:cxnSp>
         <p:cxnSp>
           <p:nvCxnSpPr>
-            <p:cNvPr id="53" name="マスの線 9"/>
+            <p:cNvPr id="52" name="マスの線 9"/>
             <p:cNvCxnSpPr/>
             <p:nvPr/>
           </p:nvCxnSpPr>
@@ -5365,7 +5330,7 @@
         </p:cxnSp>
         <p:cxnSp>
           <p:nvCxnSpPr>
-            <p:cNvPr id="54" name="マスの線 10"/>
+            <p:cNvPr id="53" name="マスの線 10"/>
             <p:cNvCxnSpPr/>
             <p:nvPr/>
           </p:nvCxnSpPr>
@@ -5401,7 +5366,7 @@
         </p:cxnSp>
         <p:cxnSp>
           <p:nvCxnSpPr>
-            <p:cNvPr id="55" name="マスの線 11"/>
+            <p:cNvPr id="54" name="マスの線 11"/>
             <p:cNvCxnSpPr/>
             <p:nvPr/>
           </p:nvCxnSpPr>
@@ -5437,7 +5402,7 @@
         </p:cxnSp>
         <p:cxnSp>
           <p:nvCxnSpPr>
-            <p:cNvPr id="56" name="マスの線 12"/>
+            <p:cNvPr id="55" name="マスの線 12"/>
             <p:cNvCxnSpPr/>
             <p:nvPr/>
           </p:nvCxnSpPr>
@@ -5473,7 +5438,7 @@
         </p:cxnSp>
         <p:cxnSp>
           <p:nvCxnSpPr>
-            <p:cNvPr id="57" name="マスの線 13"/>
+            <p:cNvPr id="56" name="マスの線 13"/>
             <p:cNvCxnSpPr/>
             <p:nvPr/>
           </p:nvCxnSpPr>
@@ -5509,7 +5474,7 @@
         </p:cxnSp>
         <p:cxnSp>
           <p:nvCxnSpPr>
-            <p:cNvPr id="58" name="マスの線 14"/>
+            <p:cNvPr id="57" name="マスの線 14"/>
             <p:cNvCxnSpPr/>
             <p:nvPr/>
           </p:nvCxnSpPr>
@@ -5545,7 +5510,7 @@
         </p:cxnSp>
         <p:cxnSp>
           <p:nvCxnSpPr>
-            <p:cNvPr id="59" name="マスの線 15"/>
+            <p:cNvPr id="58" name="マスの線 15"/>
             <p:cNvCxnSpPr/>
             <p:nvPr/>
           </p:nvCxnSpPr>
@@ -5581,7 +5546,7 @@
         </p:cxnSp>
         <p:cxnSp>
           <p:nvCxnSpPr>
-            <p:cNvPr id="60" name="マスの線 16"/>
+            <p:cNvPr id="59" name="マスの線 16"/>
             <p:cNvCxnSpPr/>
             <p:nvPr/>
           </p:nvCxnSpPr>
@@ -5617,7 +5582,7 @@
         </p:cxnSp>
         <p:cxnSp>
           <p:nvCxnSpPr>
-            <p:cNvPr id="61" name="マスの線 17"/>
+            <p:cNvPr id="60" name="マスの線 17"/>
             <p:cNvCxnSpPr/>
             <p:nvPr/>
           </p:nvCxnSpPr>
@@ -5654,7 +5619,7 @@
       </p:grpSp>
       <p:grpSp>
         <p:nvGrpSpPr>
-          <p:cNvPr id="62" name="4行目（右から）"/>
+          <p:cNvPr id="61" name="4行目（右から）"/>
           <p:cNvGrpSpPr/>
           <p:nvPr/>
         </p:nvGrpSpPr>
@@ -5668,7 +5633,7 @@
         </p:grpSpPr>
         <p:sp>
           <p:nvSpPr>
-            <p:cNvPr id="63" name="外わく"/>
+            <p:cNvPr id="62" name="外わく"/>
             <p:cNvSpPr/>
             <p:nvPr/>
           </p:nvSpPr>
@@ -5712,7 +5677,7 @@
         </p:sp>
         <p:cxnSp>
           <p:nvCxnSpPr>
-            <p:cNvPr id="64" name="マスの線 1"/>
+            <p:cNvPr id="63" name="マスの線 1"/>
             <p:cNvCxnSpPr/>
             <p:nvPr/>
           </p:nvCxnSpPr>
@@ -5748,7 +5713,7 @@
         </p:cxnSp>
         <p:cxnSp>
           <p:nvCxnSpPr>
-            <p:cNvPr id="65" name="マスの線 2"/>
+            <p:cNvPr id="64" name="マスの線 2"/>
             <p:cNvCxnSpPr/>
             <p:nvPr/>
           </p:nvCxnSpPr>
@@ -5784,7 +5749,7 @@
         </p:cxnSp>
         <p:cxnSp>
           <p:nvCxnSpPr>
-            <p:cNvPr id="66" name="マスの線 3"/>
+            <p:cNvPr id="65" name="マスの線 3"/>
             <p:cNvCxnSpPr/>
             <p:nvPr/>
           </p:nvCxnSpPr>
@@ -5820,7 +5785,7 @@
         </p:cxnSp>
         <p:cxnSp>
           <p:nvCxnSpPr>
-            <p:cNvPr id="67" name="マスの線 4"/>
+            <p:cNvPr id="66" name="マスの線 4"/>
             <p:cNvCxnSpPr/>
             <p:nvPr/>
           </p:nvCxnSpPr>
@@ -5856,7 +5821,7 @@
         </p:cxnSp>
         <p:cxnSp>
           <p:nvCxnSpPr>
-            <p:cNvPr id="68" name="マスの線 5"/>
+            <p:cNvPr id="67" name="マスの線 5"/>
             <p:cNvCxnSpPr/>
             <p:nvPr/>
           </p:nvCxnSpPr>
@@ -5892,7 +5857,7 @@
         </p:cxnSp>
         <p:cxnSp>
           <p:nvCxnSpPr>
-            <p:cNvPr id="69" name="マスの線 6"/>
+            <p:cNvPr id="68" name="マスの線 6"/>
             <p:cNvCxnSpPr/>
             <p:nvPr/>
           </p:nvCxnSpPr>
@@ -5928,7 +5893,7 @@
         </p:cxnSp>
         <p:cxnSp>
           <p:nvCxnSpPr>
-            <p:cNvPr id="70" name="マスの線 7"/>
+            <p:cNvPr id="69" name="マスの線 7"/>
             <p:cNvCxnSpPr/>
             <p:nvPr/>
           </p:nvCxnSpPr>
@@ -5964,7 +5929,7 @@
         </p:cxnSp>
         <p:cxnSp>
           <p:nvCxnSpPr>
-            <p:cNvPr id="71" name="マスの線 8"/>
+            <p:cNvPr id="70" name="マスの線 8"/>
             <p:cNvCxnSpPr/>
             <p:nvPr/>
           </p:nvCxnSpPr>
@@ -6000,7 +5965,7 @@
         </p:cxnSp>
         <p:cxnSp>
           <p:nvCxnSpPr>
-            <p:cNvPr id="72" name="マスの線 9"/>
+            <p:cNvPr id="71" name="マスの線 9"/>
             <p:cNvCxnSpPr/>
             <p:nvPr/>
           </p:nvCxnSpPr>
@@ -6036,7 +6001,7 @@
         </p:cxnSp>
         <p:cxnSp>
           <p:nvCxnSpPr>
-            <p:cNvPr id="73" name="マスの線 10"/>
+            <p:cNvPr id="72" name="マスの線 10"/>
             <p:cNvCxnSpPr/>
             <p:nvPr/>
           </p:nvCxnSpPr>
@@ -6072,7 +6037,7 @@
         </p:cxnSp>
         <p:cxnSp>
           <p:nvCxnSpPr>
-            <p:cNvPr id="74" name="マスの線 11"/>
+            <p:cNvPr id="73" name="マスの線 11"/>
             <p:cNvCxnSpPr/>
             <p:nvPr/>
           </p:nvCxnSpPr>
@@ -6108,7 +6073,7 @@
         </p:cxnSp>
         <p:cxnSp>
           <p:nvCxnSpPr>
-            <p:cNvPr id="75" name="マスの線 12"/>
+            <p:cNvPr id="74" name="マスの線 12"/>
             <p:cNvCxnSpPr/>
             <p:nvPr/>
           </p:nvCxnSpPr>
@@ -6144,7 +6109,7 @@
         </p:cxnSp>
         <p:cxnSp>
           <p:nvCxnSpPr>
-            <p:cNvPr id="76" name="マスの線 13"/>
+            <p:cNvPr id="75" name="マスの線 13"/>
             <p:cNvCxnSpPr/>
             <p:nvPr/>
           </p:nvCxnSpPr>
@@ -6180,7 +6145,7 @@
         </p:cxnSp>
         <p:cxnSp>
           <p:nvCxnSpPr>
-            <p:cNvPr id="77" name="マスの線 14"/>
+            <p:cNvPr id="76" name="マスの線 14"/>
             <p:cNvCxnSpPr/>
             <p:nvPr/>
           </p:nvCxnSpPr>
@@ -6216,7 +6181,7 @@
         </p:cxnSp>
         <p:cxnSp>
           <p:nvCxnSpPr>
-            <p:cNvPr id="78" name="マスの線 15"/>
+            <p:cNvPr id="77" name="マスの線 15"/>
             <p:cNvCxnSpPr/>
             <p:nvPr/>
           </p:nvCxnSpPr>
@@ -6252,7 +6217,7 @@
         </p:cxnSp>
         <p:cxnSp>
           <p:nvCxnSpPr>
-            <p:cNvPr id="79" name="マスの線 16"/>
+            <p:cNvPr id="78" name="マスの線 16"/>
             <p:cNvCxnSpPr/>
             <p:nvPr/>
           </p:nvCxnSpPr>
@@ -6288,7 +6253,7 @@
         </p:cxnSp>
         <p:cxnSp>
           <p:nvCxnSpPr>
-            <p:cNvPr id="80" name="マスの線 17"/>
+            <p:cNvPr id="79" name="マスの線 17"/>
             <p:cNvCxnSpPr/>
             <p:nvPr/>
           </p:nvCxnSpPr>
@@ -6325,7 +6290,7 @@
       </p:grpSp>
       <p:grpSp>
         <p:nvGrpSpPr>
-          <p:cNvPr id="81" name="5行目（右から）"/>
+          <p:cNvPr id="80" name="5行目（右から）"/>
           <p:cNvGrpSpPr/>
           <p:nvPr/>
         </p:nvGrpSpPr>
@@ -6339,7 +6304,7 @@
         </p:grpSpPr>
         <p:sp>
           <p:nvSpPr>
-            <p:cNvPr id="82" name="外わく"/>
+            <p:cNvPr id="81" name="外わく"/>
             <p:cNvSpPr/>
             <p:nvPr/>
           </p:nvSpPr>
@@ -6383,7 +6348,7 @@
         </p:sp>
         <p:cxnSp>
           <p:nvCxnSpPr>
-            <p:cNvPr id="83" name="マスの線 1"/>
+            <p:cNvPr id="82" name="マスの線 1"/>
             <p:cNvCxnSpPr/>
             <p:nvPr/>
           </p:nvCxnSpPr>
@@ -6419,7 +6384,7 @@
         </p:cxnSp>
         <p:cxnSp>
           <p:nvCxnSpPr>
-            <p:cNvPr id="84" name="マスの線 2"/>
+            <p:cNvPr id="83" name="マスの線 2"/>
             <p:cNvCxnSpPr/>
             <p:nvPr/>
           </p:nvCxnSpPr>
@@ -6455,7 +6420,7 @@
         </p:cxnSp>
         <p:cxnSp>
           <p:nvCxnSpPr>
-            <p:cNvPr id="85" name="マスの線 3"/>
+            <p:cNvPr id="84" name="マスの線 3"/>
             <p:cNvCxnSpPr/>
             <p:nvPr/>
           </p:nvCxnSpPr>
@@ -6491,7 +6456,7 @@
         </p:cxnSp>
         <p:cxnSp>
           <p:nvCxnSpPr>
-            <p:cNvPr id="86" name="マスの線 4"/>
+            <p:cNvPr id="85" name="マスの線 4"/>
             <p:cNvCxnSpPr/>
             <p:nvPr/>
           </p:nvCxnSpPr>
@@ -6527,7 +6492,7 @@
         </p:cxnSp>
         <p:cxnSp>
           <p:nvCxnSpPr>
-            <p:cNvPr id="87" name="マスの線 5"/>
+            <p:cNvPr id="86" name="マスの線 5"/>
             <p:cNvCxnSpPr/>
             <p:nvPr/>
           </p:nvCxnSpPr>
@@ -6563,7 +6528,7 @@
         </p:cxnSp>
         <p:cxnSp>
           <p:nvCxnSpPr>
-            <p:cNvPr id="88" name="マスの線 6"/>
+            <p:cNvPr id="87" name="マスの線 6"/>
             <p:cNvCxnSpPr/>
             <p:nvPr/>
           </p:nvCxnSpPr>
@@ -6599,7 +6564,7 @@
         </p:cxnSp>
         <p:cxnSp>
           <p:nvCxnSpPr>
-            <p:cNvPr id="89" name="マスの線 7"/>
+            <p:cNvPr id="88" name="マスの線 7"/>
             <p:cNvCxnSpPr/>
             <p:nvPr/>
           </p:nvCxnSpPr>
@@ -6635,7 +6600,7 @@
         </p:cxnSp>
         <p:cxnSp>
           <p:nvCxnSpPr>
-            <p:cNvPr id="90" name="マスの線 8"/>
+            <p:cNvPr id="89" name="マスの線 8"/>
             <p:cNvCxnSpPr/>
             <p:nvPr/>
           </p:nvCxnSpPr>
@@ -6671,7 +6636,7 @@
         </p:cxnSp>
         <p:cxnSp>
           <p:nvCxnSpPr>
-            <p:cNvPr id="91" name="マスの線 9"/>
+            <p:cNvPr id="90" name="マスの線 9"/>
             <p:cNvCxnSpPr/>
             <p:nvPr/>
           </p:nvCxnSpPr>
@@ -6707,7 +6672,7 @@
         </p:cxnSp>
         <p:cxnSp>
           <p:nvCxnSpPr>
-            <p:cNvPr id="92" name="マスの線 10"/>
+            <p:cNvPr id="91" name="マスの線 10"/>
             <p:cNvCxnSpPr/>
             <p:nvPr/>
           </p:nvCxnSpPr>
@@ -6743,7 +6708,7 @@
         </p:cxnSp>
         <p:cxnSp>
           <p:nvCxnSpPr>
-            <p:cNvPr id="93" name="マスの線 11"/>
+            <p:cNvPr id="92" name="マスの線 11"/>
             <p:cNvCxnSpPr/>
             <p:nvPr/>
           </p:nvCxnSpPr>
@@ -6779,7 +6744,7 @@
         </p:cxnSp>
         <p:cxnSp>
           <p:nvCxnSpPr>
-            <p:cNvPr id="94" name="マスの線 12"/>
+            <p:cNvPr id="93" name="マスの線 12"/>
             <p:cNvCxnSpPr/>
             <p:nvPr/>
           </p:nvCxnSpPr>
@@ -6815,7 +6780,7 @@
         </p:cxnSp>
         <p:cxnSp>
           <p:nvCxnSpPr>
-            <p:cNvPr id="95" name="マスの線 13"/>
+            <p:cNvPr id="94" name="マスの線 13"/>
             <p:cNvCxnSpPr/>
             <p:nvPr/>
           </p:nvCxnSpPr>
@@ -6851,7 +6816,7 @@
         </p:cxnSp>
         <p:cxnSp>
           <p:nvCxnSpPr>
-            <p:cNvPr id="96" name="マスの線 14"/>
+            <p:cNvPr id="95" name="マスの線 14"/>
             <p:cNvCxnSpPr/>
             <p:nvPr/>
           </p:nvCxnSpPr>
@@ -6887,7 +6852,7 @@
         </p:cxnSp>
         <p:cxnSp>
           <p:nvCxnSpPr>
-            <p:cNvPr id="97" name="マスの線 15"/>
+            <p:cNvPr id="96" name="マスの線 15"/>
             <p:cNvCxnSpPr/>
             <p:nvPr/>
           </p:nvCxnSpPr>
@@ -6923,7 +6888,7 @@
         </p:cxnSp>
         <p:cxnSp>
           <p:nvCxnSpPr>
-            <p:cNvPr id="98" name="マスの線 16"/>
+            <p:cNvPr id="97" name="マスの線 16"/>
             <p:cNvCxnSpPr/>
             <p:nvPr/>
           </p:nvCxnSpPr>
@@ -6959,7 +6924,7 @@
         </p:cxnSp>
         <p:cxnSp>
           <p:nvCxnSpPr>
-            <p:cNvPr id="99" name="マスの線 17"/>
+            <p:cNvPr id="98" name="マスの線 17"/>
             <p:cNvCxnSpPr/>
             <p:nvPr/>
           </p:nvCxnSpPr>
@@ -6996,7 +6961,7 @@
       </p:grpSp>
       <p:grpSp>
         <p:nvGrpSpPr>
-          <p:cNvPr id="100" name="6行目（右から）"/>
+          <p:cNvPr id="99" name="6行目（右から）"/>
           <p:cNvGrpSpPr/>
           <p:nvPr/>
         </p:nvGrpSpPr>
@@ -7010,7 +6975,7 @@
         </p:grpSpPr>
         <p:sp>
           <p:nvSpPr>
-            <p:cNvPr id="101" name="外わく"/>
+            <p:cNvPr id="100" name="外わく"/>
             <p:cNvSpPr/>
             <p:nvPr/>
           </p:nvSpPr>
@@ -7054,7 +7019,7 @@
         </p:sp>
         <p:cxnSp>
           <p:nvCxnSpPr>
-            <p:cNvPr id="102" name="マスの線 1"/>
+            <p:cNvPr id="101" name="マスの線 1"/>
             <p:cNvCxnSpPr/>
             <p:nvPr/>
           </p:nvCxnSpPr>
@@ -7090,7 +7055,7 @@
         </p:cxnSp>
         <p:cxnSp>
           <p:nvCxnSpPr>
-            <p:cNvPr id="103" name="マスの線 2"/>
+            <p:cNvPr id="102" name="マスの線 2"/>
             <p:cNvCxnSpPr/>
             <p:nvPr/>
           </p:nvCxnSpPr>
@@ -7126,7 +7091,7 @@
         </p:cxnSp>
         <p:cxnSp>
           <p:nvCxnSpPr>
-            <p:cNvPr id="104" name="マスの線 3"/>
+            <p:cNvPr id="103" name="マスの線 3"/>
             <p:cNvCxnSpPr/>
             <p:nvPr/>
           </p:nvCxnSpPr>
@@ -7162,7 +7127,7 @@
         </p:cxnSp>
         <p:cxnSp>
           <p:nvCxnSpPr>
-            <p:cNvPr id="105" name="マスの線 4"/>
+            <p:cNvPr id="104" name="マスの線 4"/>
             <p:cNvCxnSpPr/>
             <p:nvPr/>
           </p:nvCxnSpPr>
@@ -7198,7 +7163,7 @@
         </p:cxnSp>
         <p:cxnSp>
           <p:nvCxnSpPr>
-            <p:cNvPr id="106" name="マスの線 5"/>
+            <p:cNvPr id="105" name="マスの線 5"/>
             <p:cNvCxnSpPr/>
             <p:nvPr/>
           </p:nvCxnSpPr>
@@ -7234,7 +7199,7 @@
         </p:cxnSp>
         <p:cxnSp>
           <p:nvCxnSpPr>
-            <p:cNvPr id="107" name="マスの線 6"/>
+            <p:cNvPr id="106" name="マスの線 6"/>
             <p:cNvCxnSpPr/>
             <p:nvPr/>
           </p:nvCxnSpPr>
@@ -7270,7 +7235,7 @@
         </p:cxnSp>
         <p:cxnSp>
           <p:nvCxnSpPr>
-            <p:cNvPr id="108" name="マスの線 7"/>
+            <p:cNvPr id="107" name="マスの線 7"/>
             <p:cNvCxnSpPr/>
             <p:nvPr/>
           </p:nvCxnSpPr>
@@ -7306,7 +7271,7 @@
         </p:cxnSp>
         <p:cxnSp>
           <p:nvCxnSpPr>
-            <p:cNvPr id="109" name="マスの線 8"/>
+            <p:cNvPr id="108" name="マスの線 8"/>
             <p:cNvCxnSpPr/>
             <p:nvPr/>
           </p:nvCxnSpPr>
@@ -7342,7 +7307,7 @@
         </p:cxnSp>
         <p:cxnSp>
           <p:nvCxnSpPr>
-            <p:cNvPr id="110" name="マスの線 9"/>
+            <p:cNvPr id="109" name="マスの線 9"/>
             <p:cNvCxnSpPr/>
             <p:nvPr/>
           </p:nvCxnSpPr>
@@ -7378,7 +7343,7 @@
         </p:cxnSp>
         <p:cxnSp>
           <p:nvCxnSpPr>
-            <p:cNvPr id="111" name="マスの線 10"/>
+            <p:cNvPr id="110" name="マスの線 10"/>
             <p:cNvCxnSpPr/>
             <p:nvPr/>
           </p:nvCxnSpPr>
@@ -7414,7 +7379,7 @@
         </p:cxnSp>
         <p:cxnSp>
           <p:nvCxnSpPr>
-            <p:cNvPr id="112" name="マスの線 11"/>
+            <p:cNvPr id="111" name="マスの線 11"/>
             <p:cNvCxnSpPr/>
             <p:nvPr/>
           </p:nvCxnSpPr>
@@ -7450,7 +7415,7 @@
         </p:cxnSp>
         <p:cxnSp>
           <p:nvCxnSpPr>
-            <p:cNvPr id="113" name="マスの線 12"/>
+            <p:cNvPr id="112" name="マスの線 12"/>
             <p:cNvCxnSpPr/>
             <p:nvPr/>
           </p:nvCxnSpPr>
@@ -7486,7 +7451,7 @@
         </p:cxnSp>
         <p:cxnSp>
           <p:nvCxnSpPr>
-            <p:cNvPr id="114" name="マスの線 13"/>
+            <p:cNvPr id="113" name="マスの線 13"/>
             <p:cNvCxnSpPr/>
             <p:nvPr/>
           </p:nvCxnSpPr>
@@ -7522,7 +7487,7 @@
         </p:cxnSp>
         <p:cxnSp>
           <p:nvCxnSpPr>
-            <p:cNvPr id="115" name="マスの線 14"/>
+            <p:cNvPr id="114" name="マスの線 14"/>
             <p:cNvCxnSpPr/>
             <p:nvPr/>
           </p:nvCxnSpPr>
@@ -7558,7 +7523,7 @@
         </p:cxnSp>
         <p:cxnSp>
           <p:nvCxnSpPr>
-            <p:cNvPr id="116" name="マスの線 15"/>
+            <p:cNvPr id="115" name="マスの線 15"/>
             <p:cNvCxnSpPr/>
             <p:nvPr/>
           </p:nvCxnSpPr>
@@ -7594,7 +7559,7 @@
         </p:cxnSp>
         <p:cxnSp>
           <p:nvCxnSpPr>
-            <p:cNvPr id="117" name="マスの線 16"/>
+            <p:cNvPr id="116" name="マスの線 16"/>
             <p:cNvCxnSpPr/>
             <p:nvPr/>
           </p:nvCxnSpPr>
@@ -7630,7 +7595,7 @@
         </p:cxnSp>
         <p:cxnSp>
           <p:nvCxnSpPr>
-            <p:cNvPr id="118" name="マスの線 17"/>
+            <p:cNvPr id="117" name="マスの線 17"/>
             <p:cNvCxnSpPr/>
             <p:nvPr/>
           </p:nvCxnSpPr>
@@ -7667,7 +7632,7 @@
       </p:grpSp>
       <p:grpSp>
         <p:nvGrpSpPr>
-          <p:cNvPr id="119" name="7行目（右から）"/>
+          <p:cNvPr id="118" name="7行目（右から）"/>
           <p:cNvGrpSpPr/>
           <p:nvPr/>
         </p:nvGrpSpPr>
@@ -7681,7 +7646,7 @@
         </p:grpSpPr>
         <p:sp>
           <p:nvSpPr>
-            <p:cNvPr id="120" name="外わく"/>
+            <p:cNvPr id="119" name="外わく"/>
             <p:cNvSpPr/>
             <p:nvPr/>
           </p:nvSpPr>
@@ -7725,7 +7690,7 @@
         </p:sp>
         <p:cxnSp>
           <p:nvCxnSpPr>
-            <p:cNvPr id="121" name="マスの線 1"/>
+            <p:cNvPr id="120" name="マスの線 1"/>
             <p:cNvCxnSpPr/>
             <p:nvPr/>
           </p:nvCxnSpPr>
@@ -7761,7 +7726,7 @@
         </p:cxnSp>
         <p:cxnSp>
           <p:nvCxnSpPr>
-            <p:cNvPr id="122" name="マスの線 2"/>
+            <p:cNvPr id="121" name="マスの線 2"/>
             <p:cNvCxnSpPr/>
             <p:nvPr/>
           </p:nvCxnSpPr>
@@ -7797,7 +7762,7 @@
         </p:cxnSp>
         <p:cxnSp>
           <p:nvCxnSpPr>
-            <p:cNvPr id="123" name="マスの線 3"/>
+            <p:cNvPr id="122" name="マスの線 3"/>
             <p:cNvCxnSpPr/>
             <p:nvPr/>
           </p:nvCxnSpPr>
@@ -7833,7 +7798,7 @@
         </p:cxnSp>
         <p:cxnSp>
           <p:nvCxnSpPr>
-            <p:cNvPr id="124" name="マスの線 4"/>
+            <p:cNvPr id="123" name="マスの線 4"/>
             <p:cNvCxnSpPr/>
             <p:nvPr/>
           </p:nvCxnSpPr>
@@ -7869,7 +7834,7 @@
         </p:cxnSp>
         <p:cxnSp>
           <p:nvCxnSpPr>
-            <p:cNvPr id="125" name="マスの線 5"/>
+            <p:cNvPr id="124" name="マスの線 5"/>
             <p:cNvCxnSpPr/>
             <p:nvPr/>
           </p:nvCxnSpPr>
@@ -7905,7 +7870,7 @@
         </p:cxnSp>
         <p:cxnSp>
           <p:nvCxnSpPr>
-            <p:cNvPr id="126" name="マスの線 6"/>
+            <p:cNvPr id="125" name="マスの線 6"/>
             <p:cNvCxnSpPr/>
             <p:nvPr/>
           </p:nvCxnSpPr>
@@ -7941,7 +7906,7 @@
         </p:cxnSp>
         <p:cxnSp>
           <p:nvCxnSpPr>
-            <p:cNvPr id="127" name="マスの線 7"/>
+            <p:cNvPr id="126" name="マスの線 7"/>
             <p:cNvCxnSpPr/>
             <p:nvPr/>
           </p:nvCxnSpPr>
@@ -7977,7 +7942,7 @@
         </p:cxnSp>
         <p:cxnSp>
           <p:nvCxnSpPr>
-            <p:cNvPr id="128" name="マスの線 8"/>
+            <p:cNvPr id="127" name="マスの線 8"/>
             <p:cNvCxnSpPr/>
             <p:nvPr/>
           </p:nvCxnSpPr>
@@ -8013,7 +7978,7 @@
         </p:cxnSp>
         <p:cxnSp>
           <p:nvCxnSpPr>
-            <p:cNvPr id="129" name="マスの線 9"/>
+            <p:cNvPr id="128" name="マスの線 9"/>
             <p:cNvCxnSpPr/>
             <p:nvPr/>
           </p:nvCxnSpPr>
@@ -8049,7 +8014,7 @@
         </p:cxnSp>
         <p:cxnSp>
           <p:nvCxnSpPr>
-            <p:cNvPr id="130" name="マスの線 10"/>
+            <p:cNvPr id="129" name="マスの線 10"/>
             <p:cNvCxnSpPr/>
             <p:nvPr/>
           </p:nvCxnSpPr>
@@ -8085,7 +8050,7 @@
         </p:cxnSp>
         <p:cxnSp>
           <p:nvCxnSpPr>
-            <p:cNvPr id="131" name="マスの線 11"/>
+            <p:cNvPr id="130" name="マスの線 11"/>
             <p:cNvCxnSpPr/>
             <p:nvPr/>
           </p:nvCxnSpPr>
@@ -8121,7 +8086,7 @@
         </p:cxnSp>
         <p:cxnSp>
           <p:nvCxnSpPr>
-            <p:cNvPr id="132" name="マスの線 12"/>
+            <p:cNvPr id="131" name="マスの線 12"/>
             <p:cNvCxnSpPr/>
             <p:nvPr/>
           </p:nvCxnSpPr>
@@ -8157,7 +8122,7 @@
         </p:cxnSp>
         <p:cxnSp>
           <p:nvCxnSpPr>
-            <p:cNvPr id="133" name="マスの線 13"/>
+            <p:cNvPr id="132" name="マスの線 13"/>
             <p:cNvCxnSpPr/>
             <p:nvPr/>
           </p:nvCxnSpPr>
@@ -8193,7 +8158,7 @@
         </p:cxnSp>
         <p:cxnSp>
           <p:nvCxnSpPr>
-            <p:cNvPr id="134" name="マスの線 14"/>
+            <p:cNvPr id="133" name="マスの線 14"/>
             <p:cNvCxnSpPr/>
             <p:nvPr/>
           </p:nvCxnSpPr>
@@ -8229,7 +8194,7 @@
         </p:cxnSp>
         <p:cxnSp>
           <p:nvCxnSpPr>
-            <p:cNvPr id="135" name="マスの線 15"/>
+            <p:cNvPr id="134" name="マスの線 15"/>
             <p:cNvCxnSpPr/>
             <p:nvPr/>
           </p:nvCxnSpPr>
@@ -8265,7 +8230,7 @@
         </p:cxnSp>
         <p:cxnSp>
           <p:nvCxnSpPr>
-            <p:cNvPr id="136" name="マスの線 16"/>
+            <p:cNvPr id="135" name="マスの線 16"/>
             <p:cNvCxnSpPr/>
             <p:nvPr/>
           </p:nvCxnSpPr>
@@ -8301,7 +8266,7 @@
         </p:cxnSp>
         <p:cxnSp>
           <p:nvCxnSpPr>
-            <p:cNvPr id="137" name="マスの線 17"/>
+            <p:cNvPr id="136" name="マスの線 17"/>
             <p:cNvCxnSpPr/>
             <p:nvPr/>
           </p:nvCxnSpPr>
@@ -8338,7 +8303,7 @@
       </p:grpSp>
       <p:grpSp>
         <p:nvGrpSpPr>
-          <p:cNvPr id="138" name="8行目（右から）"/>
+          <p:cNvPr id="137" name="8行目（右から）"/>
           <p:cNvGrpSpPr/>
           <p:nvPr/>
         </p:nvGrpSpPr>
@@ -8352,7 +8317,7 @@
         </p:grpSpPr>
         <p:sp>
           <p:nvSpPr>
-            <p:cNvPr id="139" name="外わく"/>
+            <p:cNvPr id="138" name="外わく"/>
             <p:cNvSpPr/>
             <p:nvPr/>
           </p:nvSpPr>
@@ -8396,7 +8361,7 @@
         </p:sp>
         <p:cxnSp>
           <p:nvCxnSpPr>
-            <p:cNvPr id="140" name="マスの線 1"/>
+            <p:cNvPr id="139" name="マスの線 1"/>
             <p:cNvCxnSpPr/>
             <p:nvPr/>
           </p:nvCxnSpPr>
@@ -8432,7 +8397,7 @@
         </p:cxnSp>
         <p:cxnSp>
           <p:nvCxnSpPr>
-            <p:cNvPr id="141" name="マスの線 2"/>
+            <p:cNvPr id="140" name="マスの線 2"/>
             <p:cNvCxnSpPr/>
             <p:nvPr/>
           </p:nvCxnSpPr>
@@ -8468,7 +8433,7 @@
         </p:cxnSp>
         <p:cxnSp>
           <p:nvCxnSpPr>
-            <p:cNvPr id="142" name="マスの線 3"/>
+            <p:cNvPr id="141" name="マスの線 3"/>
             <p:cNvCxnSpPr/>
             <p:nvPr/>
           </p:nvCxnSpPr>
@@ -8504,7 +8469,7 @@
         </p:cxnSp>
         <p:cxnSp>
           <p:nvCxnSpPr>
-            <p:cNvPr id="143" name="マスの線 4"/>
+            <p:cNvPr id="142" name="マスの線 4"/>
             <p:cNvCxnSpPr/>
             <p:nvPr/>
           </p:nvCxnSpPr>
@@ -8540,7 +8505,7 @@
         </p:cxnSp>
         <p:cxnSp>
           <p:nvCxnSpPr>
-            <p:cNvPr id="144" name="マスの線 5"/>
+            <p:cNvPr id="143" name="マスの線 5"/>
             <p:cNvCxnSpPr/>
             <p:nvPr/>
           </p:nvCxnSpPr>
@@ -8576,7 +8541,7 @@
         </p:cxnSp>
         <p:cxnSp>
           <p:nvCxnSpPr>
-            <p:cNvPr id="145" name="マスの線 6"/>
+            <p:cNvPr id="144" name="マスの線 6"/>
             <p:cNvCxnSpPr/>
             <p:nvPr/>
           </p:nvCxnSpPr>
@@ -8612,7 +8577,7 @@
         </p:cxnSp>
         <p:cxnSp>
           <p:nvCxnSpPr>
-            <p:cNvPr id="146" name="マスの線 7"/>
+            <p:cNvPr id="145" name="マスの線 7"/>
             <p:cNvCxnSpPr/>
             <p:nvPr/>
           </p:nvCxnSpPr>
@@ -8648,7 +8613,7 @@
         </p:cxnSp>
         <p:cxnSp>
           <p:nvCxnSpPr>
-            <p:cNvPr id="147" name="マスの線 8"/>
+            <p:cNvPr id="146" name="マスの線 8"/>
             <p:cNvCxnSpPr/>
             <p:nvPr/>
           </p:nvCxnSpPr>
@@ -8684,7 +8649,7 @@
         </p:cxnSp>
         <p:cxnSp>
           <p:nvCxnSpPr>
-            <p:cNvPr id="148" name="マスの線 9"/>
+            <p:cNvPr id="147" name="マスの線 9"/>
             <p:cNvCxnSpPr/>
             <p:nvPr/>
           </p:nvCxnSpPr>
@@ -8720,7 +8685,7 @@
         </p:cxnSp>
         <p:cxnSp>
           <p:nvCxnSpPr>
-            <p:cNvPr id="149" name="マスの線 10"/>
+            <p:cNvPr id="148" name="マスの線 10"/>
             <p:cNvCxnSpPr/>
             <p:nvPr/>
           </p:nvCxnSpPr>
@@ -8756,7 +8721,7 @@
         </p:cxnSp>
         <p:cxnSp>
           <p:nvCxnSpPr>
-            <p:cNvPr id="150" name="マスの線 11"/>
+            <p:cNvPr id="149" name="マスの線 11"/>
             <p:cNvCxnSpPr/>
             <p:nvPr/>
           </p:nvCxnSpPr>
@@ -8792,7 +8757,7 @@
         </p:cxnSp>
         <p:cxnSp>
           <p:nvCxnSpPr>
-            <p:cNvPr id="151" name="マスの線 12"/>
+            <p:cNvPr id="150" name="マスの線 12"/>
             <p:cNvCxnSpPr/>
             <p:nvPr/>
           </p:nvCxnSpPr>
@@ -8828,7 +8793,7 @@
         </p:cxnSp>
         <p:cxnSp>
           <p:nvCxnSpPr>
-            <p:cNvPr id="152" name="マスの線 13"/>
+            <p:cNvPr id="151" name="マスの線 13"/>
             <p:cNvCxnSpPr/>
             <p:nvPr/>
           </p:nvCxnSpPr>
@@ -8864,7 +8829,7 @@
         </p:cxnSp>
         <p:cxnSp>
           <p:nvCxnSpPr>
-            <p:cNvPr id="153" name="マスの線 14"/>
+            <p:cNvPr id="152" name="マスの線 14"/>
             <p:cNvCxnSpPr/>
             <p:nvPr/>
           </p:nvCxnSpPr>
@@ -8900,7 +8865,7 @@
         </p:cxnSp>
         <p:cxnSp>
           <p:nvCxnSpPr>
-            <p:cNvPr id="154" name="マスの線 15"/>
+            <p:cNvPr id="153" name="マスの線 15"/>
             <p:cNvCxnSpPr/>
             <p:nvPr/>
           </p:nvCxnSpPr>
@@ -8936,7 +8901,7 @@
         </p:cxnSp>
         <p:cxnSp>
           <p:nvCxnSpPr>
-            <p:cNvPr id="155" name="マスの線 16"/>
+            <p:cNvPr id="154" name="マスの線 16"/>
             <p:cNvCxnSpPr/>
             <p:nvPr/>
           </p:nvCxnSpPr>
@@ -8972,7 +8937,7 @@
         </p:cxnSp>
         <p:cxnSp>
           <p:nvCxnSpPr>
-            <p:cNvPr id="156" name="マスの線 17"/>
+            <p:cNvPr id="155" name="マスの線 17"/>
             <p:cNvCxnSpPr/>
             <p:nvPr/>
           </p:nvCxnSpPr>
@@ -9009,7 +8974,7 @@
       </p:grpSp>
       <p:grpSp>
         <p:nvGrpSpPr>
-          <p:cNvPr id="157" name="9行目（右から）"/>
+          <p:cNvPr id="156" name="9行目（右から）"/>
           <p:cNvGrpSpPr/>
           <p:nvPr/>
         </p:nvGrpSpPr>
@@ -9023,7 +8988,7 @@
         </p:grpSpPr>
         <p:sp>
           <p:nvSpPr>
-            <p:cNvPr id="158" name="外わく"/>
+            <p:cNvPr id="157" name="外わく"/>
             <p:cNvSpPr/>
             <p:nvPr/>
           </p:nvSpPr>
@@ -9067,7 +9032,7 @@
         </p:sp>
         <p:cxnSp>
           <p:nvCxnSpPr>
-            <p:cNvPr id="159" name="マスの線 1"/>
+            <p:cNvPr id="158" name="マスの線 1"/>
             <p:cNvCxnSpPr/>
             <p:nvPr/>
           </p:nvCxnSpPr>
@@ -9103,7 +9068,7 @@
         </p:cxnSp>
         <p:cxnSp>
           <p:nvCxnSpPr>
-            <p:cNvPr id="160" name="マスの線 2"/>
+            <p:cNvPr id="159" name="マスの線 2"/>
             <p:cNvCxnSpPr/>
             <p:nvPr/>
           </p:nvCxnSpPr>
@@ -9139,7 +9104,7 @@
         </p:cxnSp>
         <p:cxnSp>
           <p:nvCxnSpPr>
-            <p:cNvPr id="161" name="マスの線 3"/>
+            <p:cNvPr id="160" name="マスの線 3"/>
             <p:cNvCxnSpPr/>
             <p:nvPr/>
           </p:nvCxnSpPr>
@@ -9175,7 +9140,7 @@
         </p:cxnSp>
         <p:cxnSp>
           <p:nvCxnSpPr>
-            <p:cNvPr id="162" name="マスの線 4"/>
+            <p:cNvPr id="161" name="マスの線 4"/>
             <p:cNvCxnSpPr/>
             <p:nvPr/>
           </p:nvCxnSpPr>
@@ -9211,7 +9176,7 @@
         </p:cxnSp>
         <p:cxnSp>
           <p:nvCxnSpPr>
-            <p:cNvPr id="163" name="マスの線 5"/>
+            <p:cNvPr id="162" name="マスの線 5"/>
             <p:cNvCxnSpPr/>
             <p:nvPr/>
           </p:nvCxnSpPr>
@@ -9247,7 +9212,7 @@
         </p:cxnSp>
         <p:cxnSp>
           <p:nvCxnSpPr>
-            <p:cNvPr id="164" name="マスの線 6"/>
+            <p:cNvPr id="163" name="マスの線 6"/>
             <p:cNvCxnSpPr/>
             <p:nvPr/>
           </p:nvCxnSpPr>
@@ -9283,7 +9248,7 @@
         </p:cxnSp>
         <p:cxnSp>
           <p:nvCxnSpPr>
-            <p:cNvPr id="165" name="マスの線 7"/>
+            <p:cNvPr id="164" name="マスの線 7"/>
             <p:cNvCxnSpPr/>
             <p:nvPr/>
           </p:nvCxnSpPr>
@@ -9319,7 +9284,7 @@
         </p:cxnSp>
         <p:cxnSp>
           <p:nvCxnSpPr>
-            <p:cNvPr id="166" name="マスの線 8"/>
+            <p:cNvPr id="165" name="マスの線 8"/>
             <p:cNvCxnSpPr/>
             <p:nvPr/>
           </p:nvCxnSpPr>
@@ -9355,7 +9320,7 @@
         </p:cxnSp>
         <p:cxnSp>
           <p:nvCxnSpPr>
-            <p:cNvPr id="167" name="マスの線 9"/>
+            <p:cNvPr id="166" name="マスの線 9"/>
             <p:cNvCxnSpPr/>
             <p:nvPr/>
           </p:nvCxnSpPr>
@@ -9391,7 +9356,7 @@
         </p:cxnSp>
         <p:cxnSp>
           <p:nvCxnSpPr>
-            <p:cNvPr id="168" name="マスの線 10"/>
+            <p:cNvPr id="167" name="マスの線 10"/>
             <p:cNvCxnSpPr/>
             <p:nvPr/>
           </p:nvCxnSpPr>
@@ -9427,7 +9392,7 @@
         </p:cxnSp>
         <p:cxnSp>
           <p:nvCxnSpPr>
-            <p:cNvPr id="169" name="マスの線 11"/>
+            <p:cNvPr id="168" name="マスの線 11"/>
             <p:cNvCxnSpPr/>
             <p:nvPr/>
           </p:nvCxnSpPr>
@@ -9463,7 +9428,7 @@
         </p:cxnSp>
         <p:cxnSp>
           <p:nvCxnSpPr>
-            <p:cNvPr id="170" name="マスの線 12"/>
+            <p:cNvPr id="169" name="マスの線 12"/>
             <p:cNvCxnSpPr/>
             <p:nvPr/>
           </p:nvCxnSpPr>
@@ -9499,7 +9464,7 @@
         </p:cxnSp>
         <p:cxnSp>
           <p:nvCxnSpPr>
-            <p:cNvPr id="171" name="マスの線 13"/>
+            <p:cNvPr id="170" name="マスの線 13"/>
             <p:cNvCxnSpPr/>
             <p:nvPr/>
           </p:nvCxnSpPr>
@@ -9535,7 +9500,7 @@
         </p:cxnSp>
         <p:cxnSp>
           <p:nvCxnSpPr>
-            <p:cNvPr id="172" name="マスの線 14"/>
+            <p:cNvPr id="171" name="マスの線 14"/>
             <p:cNvCxnSpPr/>
             <p:nvPr/>
           </p:nvCxnSpPr>
@@ -9571,7 +9536,7 @@
         </p:cxnSp>
         <p:cxnSp>
           <p:nvCxnSpPr>
-            <p:cNvPr id="173" name="マスの線 15"/>
+            <p:cNvPr id="172" name="マスの線 15"/>
             <p:cNvCxnSpPr/>
             <p:nvPr/>
           </p:nvCxnSpPr>
@@ -9607,7 +9572,7 @@
         </p:cxnSp>
         <p:cxnSp>
           <p:nvCxnSpPr>
-            <p:cNvPr id="174" name="マスの線 16"/>
+            <p:cNvPr id="173" name="マスの線 16"/>
             <p:cNvCxnSpPr/>
             <p:nvPr/>
           </p:nvCxnSpPr>
@@ -9643,7 +9608,7 @@
         </p:cxnSp>
         <p:cxnSp>
           <p:nvCxnSpPr>
-            <p:cNvPr id="175" name="マスの線 17"/>
+            <p:cNvPr id="174" name="マスの線 17"/>
             <p:cNvCxnSpPr/>
             <p:nvPr/>
           </p:nvCxnSpPr>
@@ -9680,7 +9645,7 @@
       </p:grpSp>
       <p:grpSp>
         <p:nvGrpSpPr>
-          <p:cNvPr id="176" name="10行目（右から）"/>
+          <p:cNvPr id="175" name="10行目（右から）"/>
           <p:cNvGrpSpPr/>
           <p:nvPr/>
         </p:nvGrpSpPr>
@@ -9694,7 +9659,7 @@
         </p:grpSpPr>
         <p:sp>
           <p:nvSpPr>
-            <p:cNvPr id="177" name="外わく"/>
+            <p:cNvPr id="176" name="外わく"/>
             <p:cNvSpPr/>
             <p:nvPr/>
           </p:nvSpPr>
@@ -9738,7 +9703,7 @@
         </p:sp>
         <p:cxnSp>
           <p:nvCxnSpPr>
-            <p:cNvPr id="178" name="マスの線 1"/>
+            <p:cNvPr id="177" name="マスの線 1"/>
             <p:cNvCxnSpPr/>
             <p:nvPr/>
           </p:nvCxnSpPr>
@@ -9774,7 +9739,7 @@
         </p:cxnSp>
         <p:cxnSp>
           <p:nvCxnSpPr>
-            <p:cNvPr id="179" name="マスの線 2"/>
+            <p:cNvPr id="178" name="マスの線 2"/>
             <p:cNvCxnSpPr/>
             <p:nvPr/>
           </p:nvCxnSpPr>
@@ -9810,7 +9775,7 @@
         </p:cxnSp>
         <p:cxnSp>
           <p:nvCxnSpPr>
-            <p:cNvPr id="180" name="マスの線 3"/>
+            <p:cNvPr id="179" name="マスの線 3"/>
             <p:cNvCxnSpPr/>
             <p:nvPr/>
           </p:nvCxnSpPr>
@@ -9846,7 +9811,7 @@
         </p:cxnSp>
         <p:cxnSp>
           <p:nvCxnSpPr>
-            <p:cNvPr id="181" name="マスの線 4"/>
+            <p:cNvPr id="180" name="マスの線 4"/>
             <p:cNvCxnSpPr/>
             <p:nvPr/>
           </p:nvCxnSpPr>
@@ -9882,7 +9847,7 @@
         </p:cxnSp>
         <p:cxnSp>
           <p:nvCxnSpPr>
-            <p:cNvPr id="182" name="マスの線 5"/>
+            <p:cNvPr id="181" name="マスの線 5"/>
             <p:cNvCxnSpPr/>
             <p:nvPr/>
           </p:nvCxnSpPr>
@@ -9918,7 +9883,7 @@
         </p:cxnSp>
         <p:cxnSp>
           <p:nvCxnSpPr>
-            <p:cNvPr id="183" name="マスの線 6"/>
+            <p:cNvPr id="182" name="マスの線 6"/>
             <p:cNvCxnSpPr/>
             <p:nvPr/>
           </p:nvCxnSpPr>
@@ -9954,7 +9919,7 @@
         </p:cxnSp>
         <p:cxnSp>
           <p:nvCxnSpPr>
-            <p:cNvPr id="184" name="マスの線 7"/>
+            <p:cNvPr id="183" name="マスの線 7"/>
             <p:cNvCxnSpPr/>
             <p:nvPr/>
           </p:nvCxnSpPr>
@@ -9990,7 +9955,7 @@
         </p:cxnSp>
         <p:cxnSp>
           <p:nvCxnSpPr>
-            <p:cNvPr id="185" name="マスの線 8"/>
+            <p:cNvPr id="184" name="マスの線 8"/>
             <p:cNvCxnSpPr/>
             <p:nvPr/>
           </p:nvCxnSpPr>
@@ -10026,7 +9991,7 @@
         </p:cxnSp>
         <p:cxnSp>
           <p:nvCxnSpPr>
-            <p:cNvPr id="186" name="マスの線 9"/>
+            <p:cNvPr id="185" name="マスの線 9"/>
             <p:cNvCxnSpPr/>
             <p:nvPr/>
           </p:nvCxnSpPr>
@@ -10062,7 +10027,7 @@
         </p:cxnSp>
         <p:cxnSp>
           <p:nvCxnSpPr>
-            <p:cNvPr id="187" name="マスの線 10"/>
+            <p:cNvPr id="186" name="マスの線 10"/>
             <p:cNvCxnSpPr/>
             <p:nvPr/>
           </p:nvCxnSpPr>
@@ -10098,7 +10063,7 @@
         </p:cxnSp>
         <p:cxnSp>
           <p:nvCxnSpPr>
-            <p:cNvPr id="188" name="マスの線 11"/>
+            <p:cNvPr id="187" name="マスの線 11"/>
             <p:cNvCxnSpPr/>
             <p:nvPr/>
           </p:nvCxnSpPr>
@@ -10134,7 +10099,7 @@
         </p:cxnSp>
         <p:cxnSp>
           <p:nvCxnSpPr>
-            <p:cNvPr id="189" name="マスの線 12"/>
+            <p:cNvPr id="188" name="マスの線 12"/>
             <p:cNvCxnSpPr/>
             <p:nvPr/>
           </p:nvCxnSpPr>
@@ -10170,7 +10135,7 @@
         </p:cxnSp>
         <p:cxnSp>
           <p:nvCxnSpPr>
-            <p:cNvPr id="190" name="マスの線 13"/>
+            <p:cNvPr id="189" name="マスの線 13"/>
             <p:cNvCxnSpPr/>
             <p:nvPr/>
           </p:nvCxnSpPr>
@@ -10206,7 +10171,7 @@
         </p:cxnSp>
         <p:cxnSp>
           <p:nvCxnSpPr>
-            <p:cNvPr id="191" name="マスの線 14"/>
+            <p:cNvPr id="190" name="マスの線 14"/>
             <p:cNvCxnSpPr/>
             <p:nvPr/>
           </p:nvCxnSpPr>
@@ -10242,7 +10207,7 @@
         </p:cxnSp>
         <p:cxnSp>
           <p:nvCxnSpPr>
-            <p:cNvPr id="192" name="マスの線 15"/>
+            <p:cNvPr id="191" name="マスの線 15"/>
             <p:cNvCxnSpPr/>
             <p:nvPr/>
           </p:nvCxnSpPr>
@@ -10278,7 +10243,7 @@
         </p:cxnSp>
         <p:cxnSp>
           <p:nvCxnSpPr>
-            <p:cNvPr id="193" name="マスの線 16"/>
+            <p:cNvPr id="192" name="マスの線 16"/>
             <p:cNvCxnSpPr/>
             <p:nvPr/>
           </p:nvCxnSpPr>
@@ -10314,7 +10279,7 @@
         </p:cxnSp>
         <p:cxnSp>
           <p:nvCxnSpPr>
-            <p:cNvPr id="194" name="マスの線 17"/>
+            <p:cNvPr id="193" name="マスの線 17"/>
             <p:cNvCxnSpPr/>
             <p:nvPr/>
           </p:nvCxnSpPr>
@@ -10351,7 +10316,7 @@
       </p:grpSp>
       <p:grpSp>
         <p:nvGrpSpPr>
-          <p:cNvPr id="195" name="11行目（右から）"/>
+          <p:cNvPr id="194" name="11行目（右から）"/>
           <p:cNvGrpSpPr/>
           <p:nvPr/>
         </p:nvGrpSpPr>
@@ -10365,7 +10330,7 @@
         </p:grpSpPr>
         <p:sp>
           <p:nvSpPr>
-            <p:cNvPr id="196" name="外わく"/>
+            <p:cNvPr id="195" name="外わく"/>
             <p:cNvSpPr/>
             <p:nvPr/>
           </p:nvSpPr>
@@ -10409,7 +10374,7 @@
         </p:sp>
         <p:cxnSp>
           <p:nvCxnSpPr>
-            <p:cNvPr id="197" name="マスの線 1"/>
+            <p:cNvPr id="196" name="マスの線 1"/>
             <p:cNvCxnSpPr/>
             <p:nvPr/>
           </p:nvCxnSpPr>
@@ -10445,7 +10410,7 @@
         </p:cxnSp>
         <p:cxnSp>
           <p:nvCxnSpPr>
-            <p:cNvPr id="198" name="マスの線 2"/>
+            <p:cNvPr id="197" name="マスの線 2"/>
             <p:cNvCxnSpPr/>
             <p:nvPr/>
           </p:nvCxnSpPr>
@@ -10481,7 +10446,7 @@
         </p:cxnSp>
         <p:cxnSp>
           <p:nvCxnSpPr>
-            <p:cNvPr id="199" name="マスの線 3"/>
+            <p:cNvPr id="198" name="マスの線 3"/>
             <p:cNvCxnSpPr/>
             <p:nvPr/>
           </p:nvCxnSpPr>
@@ -10517,7 +10482,7 @@
         </p:cxnSp>
         <p:cxnSp>
           <p:nvCxnSpPr>
-            <p:cNvPr id="200" name="マスの線 4"/>
+            <p:cNvPr id="199" name="マスの線 4"/>
             <p:cNvCxnSpPr/>
             <p:nvPr/>
           </p:nvCxnSpPr>
@@ -10553,7 +10518,7 @@
         </p:cxnSp>
         <p:cxnSp>
           <p:nvCxnSpPr>
-            <p:cNvPr id="201" name="マスの線 5"/>
+            <p:cNvPr id="200" name="マスの線 5"/>
             <p:cNvCxnSpPr/>
             <p:nvPr/>
           </p:nvCxnSpPr>
@@ -10589,7 +10554,7 @@
         </p:cxnSp>
         <p:cxnSp>
           <p:nvCxnSpPr>
-            <p:cNvPr id="202" name="マスの線 6"/>
+            <p:cNvPr id="201" name="マスの線 6"/>
             <p:cNvCxnSpPr/>
             <p:nvPr/>
           </p:nvCxnSpPr>
@@ -10625,7 +10590,7 @@
         </p:cxnSp>
         <p:cxnSp>
           <p:nvCxnSpPr>
-            <p:cNvPr id="203" name="マスの線 7"/>
+            <p:cNvPr id="202" name="マスの線 7"/>
             <p:cNvCxnSpPr/>
             <p:nvPr/>
           </p:nvCxnSpPr>
@@ -10661,7 +10626,7 @@
         </p:cxnSp>
         <p:cxnSp>
           <p:nvCxnSpPr>
-            <p:cNvPr id="204" name="マスの線 8"/>
+            <p:cNvPr id="203" name="マスの線 8"/>
             <p:cNvCxnSpPr/>
             <p:nvPr/>
           </p:nvCxnSpPr>
@@ -10697,7 +10662,7 @@
         </p:cxnSp>
         <p:cxnSp>
           <p:nvCxnSpPr>
-            <p:cNvPr id="205" name="マスの線 9"/>
+            <p:cNvPr id="204" name="マスの線 9"/>
             <p:cNvCxnSpPr/>
             <p:nvPr/>
           </p:nvCxnSpPr>
@@ -10733,7 +10698,7 @@
         </p:cxnSp>
         <p:cxnSp>
           <p:nvCxnSpPr>
-            <p:cNvPr id="206" name="マスの線 10"/>
+            <p:cNvPr id="205" name="マスの線 10"/>
             <p:cNvCxnSpPr/>
             <p:nvPr/>
           </p:nvCxnSpPr>
@@ -10769,7 +10734,7 @@
         </p:cxnSp>
         <p:cxnSp>
           <p:nvCxnSpPr>
-            <p:cNvPr id="207" name="マスの線 11"/>
+            <p:cNvPr id="206" name="マスの線 11"/>
             <p:cNvCxnSpPr/>
             <p:nvPr/>
           </p:nvCxnSpPr>
@@ -10805,7 +10770,7 @@
         </p:cxnSp>
         <p:cxnSp>
           <p:nvCxnSpPr>
-            <p:cNvPr id="208" name="マスの線 12"/>
+            <p:cNvPr id="207" name="マスの線 12"/>
             <p:cNvCxnSpPr/>
             <p:nvPr/>
           </p:nvCxnSpPr>
@@ -10841,7 +10806,7 @@
         </p:cxnSp>
         <p:cxnSp>
           <p:nvCxnSpPr>
-            <p:cNvPr id="209" name="マスの線 13"/>
+            <p:cNvPr id="208" name="マスの線 13"/>
             <p:cNvCxnSpPr/>
             <p:nvPr/>
           </p:nvCxnSpPr>
@@ -10877,7 +10842,7 @@
         </p:cxnSp>
         <p:cxnSp>
           <p:nvCxnSpPr>
-            <p:cNvPr id="210" name="マスの線 14"/>
+            <p:cNvPr id="209" name="マスの線 14"/>
             <p:cNvCxnSpPr/>
             <p:nvPr/>
           </p:nvCxnSpPr>
@@ -10913,7 +10878,7 @@
         </p:cxnSp>
         <p:cxnSp>
           <p:nvCxnSpPr>
-            <p:cNvPr id="211" name="マスの線 15"/>
+            <p:cNvPr id="210" name="マスの線 15"/>
             <p:cNvCxnSpPr/>
             <p:nvPr/>
           </p:nvCxnSpPr>
@@ -10949,7 +10914,7 @@
         </p:cxnSp>
         <p:cxnSp>
           <p:nvCxnSpPr>
-            <p:cNvPr id="212" name="マスの線 16"/>
+            <p:cNvPr id="211" name="マスの線 16"/>
             <p:cNvCxnSpPr/>
             <p:nvPr/>
           </p:nvCxnSpPr>
@@ -10985,7 +10950,7 @@
         </p:cxnSp>
         <p:cxnSp>
           <p:nvCxnSpPr>
-            <p:cNvPr id="213" name="マスの線 17"/>
+            <p:cNvPr id="212" name="マスの線 17"/>
             <p:cNvCxnSpPr/>
             <p:nvPr/>
           </p:nvCxnSpPr>
@@ -11022,7 +10987,7 @@
       </p:grpSp>
       <p:pic>
         <p:nvPicPr>
-          <p:cNvPr id="214" name="さし絵（消してもかまいません）" descr="_tmp_ill.png"/>
+          <p:cNvPr id="213" name="さし絵（消してもかまいません）" descr="_tmp_ill.png"/>
           <p:cNvPicPr>
             <a:picLocks noChangeAspect="1"/>
           </p:cNvPicPr>
@@ -11046,7 +11011,7 @@
       </p:pic>
       <p:sp>
         <p:nvSpPr>
-          <p:cNvPr id="215" name="紙の説明（消してもかまいません）"/>
+          <p:cNvPr id="214" name="紙の説明（消してもかまいません）"/>
           <p:cNvSpPr txBox="1"/>
           <p:nvPr/>
         </p:nvSpPr>
@@ -11081,7 +11046,7 @@
       </p:sp>
       <p:sp>
         <p:nvSpPr>
-          <p:cNvPr id="216" name="クレジット"/>
+          <p:cNvPr id="215" name="クレジット"/>
           <p:cNvSpPr txBox="1"/>
           <p:nvPr/>
         </p:nvSpPr>
